--- a/newsletter_20260522.pptx
+++ b/newsletter_20260522.pptx
@@ -4597,7 +4597,7 @@
                   <a:srgbClr val="212121"/>
                 </a:solidFill>
               </a:rPr>
-              <a:t>Turkey’s London Investor Pitch Gets Upended by Markets Tailspin</a:t>
+              <a:t>Trump Gets Another Ally in EU With Jansa’s Return in Slovenia</a:t>
             </a:r>
           </a:p>
         </p:txBody>
@@ -4763,7 +4763,7 @@
             <a:avLst/>
           </a:prstGeom>
           <a:solidFill>
-            <a:srgbClr val="E65C00"/>
+            <a:srgbClr val="2E7D32"/>
           </a:solidFill>
           <a:ln>
             <a:noFill/>
@@ -4801,6 +4801,228 @@
           <a:xfrm>
             <a:off x="8138160" y="1097280"/>
             <a:ext cx="640080" cy="274320"/>
+          </a:xfrm>
+          <a:prstGeom prst="rect">
+            <a:avLst/>
+          </a:prstGeom>
+          <a:solidFill>
+            <a:srgbClr val="2E7D32"/>
+          </a:solidFill>
+          <a:ln>
+            <a:noFill/>
+          </a:ln>
+        </p:spPr>
+        <p:style>
+          <a:lnRef idx="1">
+            <a:schemeClr val="accent1"/>
+          </a:lnRef>
+          <a:fillRef idx="3">
+            <a:schemeClr val="accent1"/>
+          </a:fillRef>
+          <a:effectRef idx="2">
+            <a:schemeClr val="accent1"/>
+          </a:effectRef>
+          <a:fontRef idx="minor">
+            <a:schemeClr val="lt1"/>
+          </a:fontRef>
+        </p:style>
+        <p:txBody>
+          <a:bodyPr rtlCol="0" anchor="ctr"/>
+          <a:lstStyle/>
+          <a:p>
+            <a:pPr algn="ctr"/>
+          </a:p>
+        </p:txBody>
+      </p:sp>
+      <p:sp>
+        <p:nvSpPr>
+          <p:cNvPr id="7" name="TextBox 6"/>
+          <p:cNvSpPr txBox="1"/>
+          <p:nvPr/>
+        </p:nvSpPr>
+        <p:spPr>
+          <a:xfrm>
+            <a:off x="8138160" y="1097280"/>
+            <a:ext cx="640080" cy="274320"/>
+          </a:xfrm>
+          <a:prstGeom prst="rect">
+            <a:avLst/>
+          </a:prstGeom>
+          <a:noFill/>
+        </p:spPr>
+        <p:txBody>
+          <a:bodyPr wrap="square">
+            <a:spAutoFit/>
+          </a:bodyPr>
+          <a:lstStyle/>
+          <a:p>
+            <a:pPr algn="ctr"/>
+            <a:r>
+              <a:rPr sz="900" b="1">
+                <a:solidFill>
+                  <a:srgbClr val="FFFFFF"/>
+                </a:solidFill>
+              </a:rPr>
+              <a:t>5/10</a:t>
+            </a:r>
+          </a:p>
+        </p:txBody>
+      </p:sp>
+      <p:sp>
+        <p:nvSpPr>
+          <p:cNvPr id="8" name="TextBox 7"/>
+          <p:cNvSpPr txBox="1"/>
+          <p:nvPr/>
+        </p:nvSpPr>
+        <p:spPr>
+          <a:xfrm>
+            <a:off x="457200" y="1097280"/>
+            <a:ext cx="7498080" cy="347472"/>
+          </a:xfrm>
+          <a:prstGeom prst="rect">
+            <a:avLst/>
+          </a:prstGeom>
+          <a:noFill/>
+        </p:spPr>
+        <p:txBody>
+          <a:bodyPr wrap="square">
+            <a:spAutoFit/>
+          </a:bodyPr>
+          <a:lstStyle/>
+          <a:p>
+            <a:pPr algn="l"/>
+            <a:r>
+              <a:rPr sz="1100" b="1">
+                <a:solidFill>
+                  <a:srgbClr val="212121"/>
+                </a:solidFill>
+              </a:rPr>
+              <a:t>Trump Gets Another Ally in EU With Jansa’s Return in Slovenia</a:t>
+            </a:r>
+          </a:p>
+        </p:txBody>
+      </p:sp>
+      <p:sp>
+        <p:nvSpPr>
+          <p:cNvPr id="9" name="TextBox 8"/>
+          <p:cNvSpPr txBox="1"/>
+          <p:nvPr/>
+        </p:nvSpPr>
+        <p:spPr>
+          <a:xfrm>
+            <a:off x="457200" y="1444752"/>
+            <a:ext cx="8321040" cy="502920"/>
+          </a:xfrm>
+          <a:prstGeom prst="rect">
+            <a:avLst/>
+          </a:prstGeom>
+          <a:noFill/>
+        </p:spPr>
+        <p:txBody>
+          <a:bodyPr wrap="square">
+            <a:spAutoFit/>
+          </a:bodyPr>
+          <a:lstStyle/>
+          <a:p>
+            <a:pPr algn="l"/>
+            <a:r>
+              <a:rPr sz="900" b="0">
+                <a:solidFill>
+                  <a:srgbClr val="757575"/>
+                </a:solidFill>
+              </a:rPr>
+              <a:t>Slovenian lawmakers elected nationalist leader Janez Jansa as the country’s next premier, tilting another European Union member to the right and handing Donald …</a:t>
+            </a:r>
+          </a:p>
+        </p:txBody>
+      </p:sp>
+      <p:sp>
+        <p:nvSpPr>
+          <p:cNvPr id="10" name="TextBox 9"/>
+          <p:cNvSpPr txBox="1"/>
+          <p:nvPr/>
+        </p:nvSpPr>
+        <p:spPr>
+          <a:xfrm>
+            <a:off x="457200" y="1965960"/>
+            <a:ext cx="3657600" cy="228600"/>
+          </a:xfrm>
+          <a:prstGeom prst="rect">
+            <a:avLst/>
+          </a:prstGeom>
+          <a:noFill/>
+        </p:spPr>
+        <p:txBody>
+          <a:bodyPr wrap="square">
+            <a:spAutoFit/>
+          </a:bodyPr>
+          <a:lstStyle/>
+          <a:p>
+            <a:pPr algn="l"/>
+            <a:r>
+              <a:rPr sz="800" b="0">
+                <a:solidFill>
+                  <a:srgbClr val="757575"/>
+                </a:solidFill>
+              </a:rPr>
+              <a:t>📰 feeds.bloomberg.com</a:t>
+            </a:r>
+          </a:p>
+        </p:txBody>
+      </p:sp>
+      <p:sp>
+        <p:nvSpPr>
+          <p:cNvPr id="11" name="Rectangle 10"/>
+          <p:cNvSpPr/>
+          <p:nvPr/>
+        </p:nvSpPr>
+        <p:spPr>
+          <a:xfrm>
+            <a:off x="274320" y="2350008"/>
+            <a:ext cx="8595360" cy="1234440"/>
+          </a:xfrm>
+          <a:prstGeom prst="rect">
+            <a:avLst/>
+          </a:prstGeom>
+          <a:solidFill>
+            <a:srgbClr val="FFFFFF"/>
+          </a:solidFill>
+          <a:ln>
+            <a:noFill/>
+          </a:ln>
+        </p:spPr>
+        <p:style>
+          <a:lnRef idx="1">
+            <a:schemeClr val="accent1"/>
+          </a:lnRef>
+          <a:fillRef idx="3">
+            <a:schemeClr val="accent1"/>
+          </a:fillRef>
+          <a:effectRef idx="2">
+            <a:schemeClr val="accent1"/>
+          </a:effectRef>
+          <a:fontRef idx="minor">
+            <a:schemeClr val="lt1"/>
+          </a:fontRef>
+        </p:style>
+        <p:txBody>
+          <a:bodyPr rtlCol="0" anchor="ctr"/>
+          <a:lstStyle/>
+          <a:p>
+            <a:pPr algn="ctr"/>
+          </a:p>
+        </p:txBody>
+      </p:sp>
+      <p:sp>
+        <p:nvSpPr>
+          <p:cNvPr id="12" name="Rectangle 11"/>
+          <p:cNvSpPr/>
+          <p:nvPr/>
+        </p:nvSpPr>
+        <p:spPr>
+          <a:xfrm>
+            <a:off x="274320" y="2350008"/>
+            <a:ext cx="54864" cy="1234440"/>
           </a:xfrm>
           <a:prstGeom prst="rect">
             <a:avLst/>
@@ -4836,13 +5058,56 @@
       </p:sp>
       <p:sp>
         <p:nvSpPr>
-          <p:cNvPr id="7" name="TextBox 6"/>
+          <p:cNvPr id="13" name="Rectangle 12"/>
+          <p:cNvSpPr/>
+          <p:nvPr/>
+        </p:nvSpPr>
+        <p:spPr>
+          <a:xfrm>
+            <a:off x="8138160" y="2441448"/>
+            <a:ext cx="640080" cy="274320"/>
+          </a:xfrm>
+          <a:prstGeom prst="rect">
+            <a:avLst/>
+          </a:prstGeom>
+          <a:solidFill>
+            <a:srgbClr val="E65C00"/>
+          </a:solidFill>
+          <a:ln>
+            <a:noFill/>
+          </a:ln>
+        </p:spPr>
+        <p:style>
+          <a:lnRef idx="1">
+            <a:schemeClr val="accent1"/>
+          </a:lnRef>
+          <a:fillRef idx="3">
+            <a:schemeClr val="accent1"/>
+          </a:fillRef>
+          <a:effectRef idx="2">
+            <a:schemeClr val="accent1"/>
+          </a:effectRef>
+          <a:fontRef idx="minor">
+            <a:schemeClr val="lt1"/>
+          </a:fontRef>
+        </p:style>
+        <p:txBody>
+          <a:bodyPr rtlCol="0" anchor="ctr"/>
+          <a:lstStyle/>
+          <a:p>
+            <a:pPr algn="ctr"/>
+          </a:p>
+        </p:txBody>
+      </p:sp>
+      <p:sp>
+        <p:nvSpPr>
+          <p:cNvPr id="14" name="TextBox 13"/>
           <p:cNvSpPr txBox="1"/>
           <p:nvPr/>
         </p:nvSpPr>
         <p:spPr>
           <a:xfrm>
-            <a:off x="8138160" y="1097280"/>
+            <a:off x="8138160" y="2441448"/>
             <a:ext cx="640080" cy="274320"/>
           </a:xfrm>
           <a:prstGeom prst="rect">
@@ -4870,13 +5135,13 @@
       </p:sp>
       <p:sp>
         <p:nvSpPr>
-          <p:cNvPr id="8" name="TextBox 7"/>
+          <p:cNvPr id="15" name="TextBox 14"/>
           <p:cNvSpPr txBox="1"/>
           <p:nvPr/>
         </p:nvSpPr>
         <p:spPr>
           <a:xfrm>
-            <a:off x="457200" y="1097280"/>
+            <a:off x="457200" y="2441448"/>
             <a:ext cx="7498080" cy="347472"/>
           </a:xfrm>
           <a:prstGeom prst="rect">
@@ -4904,13 +5169,13 @@
       </p:sp>
       <p:sp>
         <p:nvSpPr>
-          <p:cNvPr id="9" name="TextBox 8"/>
+          <p:cNvPr id="16" name="TextBox 15"/>
           <p:cNvSpPr txBox="1"/>
           <p:nvPr/>
         </p:nvSpPr>
         <p:spPr>
           <a:xfrm>
-            <a:off x="457200" y="1444752"/>
+            <a:off x="457200" y="2788920"/>
             <a:ext cx="8321040" cy="502920"/>
           </a:xfrm>
           <a:prstGeom prst="rect">
@@ -4938,13 +5203,13 @@
       </p:sp>
       <p:sp>
         <p:nvSpPr>
-          <p:cNvPr id="10" name="TextBox 9"/>
+          <p:cNvPr id="17" name="TextBox 16"/>
           <p:cNvSpPr txBox="1"/>
           <p:nvPr/>
         </p:nvSpPr>
         <p:spPr>
           <a:xfrm>
-            <a:off x="457200" y="1965960"/>
+            <a:off x="457200" y="3310128"/>
             <a:ext cx="3657600" cy="228600"/>
           </a:xfrm>
           <a:prstGeom prst="rect">
@@ -4972,13 +5237,13 @@
       </p:sp>
       <p:sp>
         <p:nvSpPr>
-          <p:cNvPr id="11" name="Rectangle 10"/>
+          <p:cNvPr id="18" name="Rectangle 17"/>
           <p:cNvSpPr/>
           <p:nvPr/>
         </p:nvSpPr>
         <p:spPr>
           <a:xfrm>
-            <a:off x="274320" y="2350008"/>
+            <a:off x="274320" y="3694176"/>
             <a:ext cx="8595360" cy="1234440"/>
           </a:xfrm>
           <a:prstGeom prst="rect">
@@ -5015,13 +5280,13 @@
       </p:sp>
       <p:sp>
         <p:nvSpPr>
-          <p:cNvPr id="12" name="Rectangle 11"/>
+          <p:cNvPr id="19" name="Rectangle 18"/>
           <p:cNvSpPr/>
           <p:nvPr/>
         </p:nvSpPr>
         <p:spPr>
           <a:xfrm>
-            <a:off x="274320" y="2350008"/>
+            <a:off x="274320" y="3694176"/>
             <a:ext cx="54864" cy="1234440"/>
           </a:xfrm>
           <a:prstGeom prst="rect">
@@ -5058,13 +5323,13 @@
       </p:sp>
       <p:sp>
         <p:nvSpPr>
-          <p:cNvPr id="13" name="Rectangle 12"/>
+          <p:cNvPr id="20" name="Rectangle 19"/>
           <p:cNvSpPr/>
           <p:nvPr/>
         </p:nvSpPr>
         <p:spPr>
           <a:xfrm>
-            <a:off x="8138160" y="2441448"/>
+            <a:off x="8138160" y="3785616"/>
             <a:ext cx="640080" cy="274320"/>
           </a:xfrm>
           <a:prstGeom prst="rect">
@@ -5101,13 +5366,13 @@
       </p:sp>
       <p:sp>
         <p:nvSpPr>
-          <p:cNvPr id="14" name="TextBox 13"/>
+          <p:cNvPr id="21" name="TextBox 20"/>
           <p:cNvSpPr txBox="1"/>
           <p:nvPr/>
         </p:nvSpPr>
         <p:spPr>
           <a:xfrm>
-            <a:off x="8138160" y="2441448"/>
+            <a:off x="8138160" y="3785616"/>
             <a:ext cx="640080" cy="274320"/>
           </a:xfrm>
           <a:prstGeom prst="rect">
@@ -5135,13 +5400,13 @@
       </p:sp>
       <p:sp>
         <p:nvSpPr>
-          <p:cNvPr id="15" name="TextBox 14"/>
+          <p:cNvPr id="22" name="TextBox 21"/>
           <p:cNvSpPr txBox="1"/>
           <p:nvPr/>
         </p:nvSpPr>
         <p:spPr>
           <a:xfrm>
-            <a:off x="457200" y="2441448"/>
+            <a:off x="457200" y="3785616"/>
             <a:ext cx="7498080" cy="347472"/>
           </a:xfrm>
           <a:prstGeom prst="rect">
@@ -5169,13 +5434,13 @@
       </p:sp>
       <p:sp>
         <p:nvSpPr>
-          <p:cNvPr id="16" name="TextBox 15"/>
+          <p:cNvPr id="23" name="TextBox 22"/>
           <p:cNvSpPr txBox="1"/>
           <p:nvPr/>
         </p:nvSpPr>
         <p:spPr>
           <a:xfrm>
-            <a:off x="457200" y="2788920"/>
+            <a:off x="457200" y="4133088"/>
             <a:ext cx="8321040" cy="502920"/>
           </a:xfrm>
           <a:prstGeom prst="rect">
@@ -5203,13 +5468,13 @@
       </p:sp>
       <p:sp>
         <p:nvSpPr>
-          <p:cNvPr id="17" name="TextBox 16"/>
+          <p:cNvPr id="24" name="TextBox 23"/>
           <p:cNvSpPr txBox="1"/>
           <p:nvPr/>
         </p:nvSpPr>
         <p:spPr>
           <a:xfrm>
-            <a:off x="457200" y="3310128"/>
+            <a:off x="457200" y="4654296"/>
             <a:ext cx="3657600" cy="228600"/>
           </a:xfrm>
           <a:prstGeom prst="rect">
@@ -5237,13 +5502,13 @@
       </p:sp>
       <p:sp>
         <p:nvSpPr>
-          <p:cNvPr id="18" name="Rectangle 17"/>
+          <p:cNvPr id="25" name="Rectangle 24"/>
           <p:cNvSpPr/>
           <p:nvPr/>
         </p:nvSpPr>
         <p:spPr>
           <a:xfrm>
-            <a:off x="274320" y="3694176"/>
+            <a:off x="274320" y="5038344"/>
             <a:ext cx="8595360" cy="1234440"/>
           </a:xfrm>
           <a:prstGeom prst="rect">
@@ -5280,13 +5545,13 @@
       </p:sp>
       <p:sp>
         <p:nvSpPr>
-          <p:cNvPr id="19" name="Rectangle 18"/>
+          <p:cNvPr id="26" name="Rectangle 25"/>
           <p:cNvSpPr/>
           <p:nvPr/>
         </p:nvSpPr>
         <p:spPr>
           <a:xfrm>
-            <a:off x="274320" y="3694176"/>
+            <a:off x="274320" y="5038344"/>
             <a:ext cx="54864" cy="1234440"/>
           </a:xfrm>
           <a:prstGeom prst="rect">
@@ -5323,13 +5588,13 @@
       </p:sp>
       <p:sp>
         <p:nvSpPr>
-          <p:cNvPr id="20" name="Rectangle 19"/>
+          <p:cNvPr id="27" name="Rectangle 26"/>
           <p:cNvSpPr/>
           <p:nvPr/>
         </p:nvSpPr>
         <p:spPr>
           <a:xfrm>
-            <a:off x="8138160" y="3785616"/>
+            <a:off x="8138160" y="5129784"/>
             <a:ext cx="640080" cy="274320"/>
           </a:xfrm>
           <a:prstGeom prst="rect">
@@ -5366,13 +5631,13 @@
       </p:sp>
       <p:sp>
         <p:nvSpPr>
-          <p:cNvPr id="21" name="TextBox 20"/>
+          <p:cNvPr id="28" name="TextBox 27"/>
           <p:cNvSpPr txBox="1"/>
           <p:nvPr/>
         </p:nvSpPr>
         <p:spPr>
           <a:xfrm>
-            <a:off x="8138160" y="3785616"/>
+            <a:off x="8138160" y="5129784"/>
             <a:ext cx="640080" cy="274320"/>
           </a:xfrm>
           <a:prstGeom prst="rect">
@@ -5400,13 +5665,13 @@
       </p:sp>
       <p:sp>
         <p:nvSpPr>
-          <p:cNvPr id="22" name="TextBox 21"/>
+          <p:cNvPr id="29" name="TextBox 28"/>
           <p:cNvSpPr txBox="1"/>
           <p:nvPr/>
         </p:nvSpPr>
         <p:spPr>
           <a:xfrm>
-            <a:off x="457200" y="3785616"/>
+            <a:off x="457200" y="5129784"/>
             <a:ext cx="7498080" cy="347472"/>
           </a:xfrm>
           <a:prstGeom prst="rect">
@@ -5434,13 +5699,13 @@
       </p:sp>
       <p:sp>
         <p:nvSpPr>
-          <p:cNvPr id="23" name="TextBox 22"/>
+          <p:cNvPr id="30" name="TextBox 29"/>
           <p:cNvSpPr txBox="1"/>
           <p:nvPr/>
         </p:nvSpPr>
         <p:spPr>
           <a:xfrm>
-            <a:off x="457200" y="4133088"/>
+            <a:off x="457200" y="5477256"/>
             <a:ext cx="8321040" cy="502920"/>
           </a:xfrm>
           <a:prstGeom prst="rect">
@@ -5462,271 +5727,6 @@
                 </a:solidFill>
               </a:rPr>
               <a:t>The Royal International Air Tattoo at RAF Fairford, the UK’s biggest military air show, has been canceled this summer because US aircraft are using the venue fo…</a:t>
-            </a:r>
-          </a:p>
-        </p:txBody>
-      </p:sp>
-      <p:sp>
-        <p:nvSpPr>
-          <p:cNvPr id="24" name="TextBox 23"/>
-          <p:cNvSpPr txBox="1"/>
-          <p:nvPr/>
-        </p:nvSpPr>
-        <p:spPr>
-          <a:xfrm>
-            <a:off x="457200" y="4654296"/>
-            <a:ext cx="3657600" cy="228600"/>
-          </a:xfrm>
-          <a:prstGeom prst="rect">
-            <a:avLst/>
-          </a:prstGeom>
-          <a:noFill/>
-        </p:spPr>
-        <p:txBody>
-          <a:bodyPr wrap="square">
-            <a:spAutoFit/>
-          </a:bodyPr>
-          <a:lstStyle/>
-          <a:p>
-            <a:pPr algn="l"/>
-            <a:r>
-              <a:rPr sz="800" b="0">
-                <a:solidFill>
-                  <a:srgbClr val="757575"/>
-                </a:solidFill>
-              </a:rPr>
-              <a:t>📰 feeds.bloomberg.com</a:t>
-            </a:r>
-          </a:p>
-        </p:txBody>
-      </p:sp>
-      <p:sp>
-        <p:nvSpPr>
-          <p:cNvPr id="25" name="Rectangle 24"/>
-          <p:cNvSpPr/>
-          <p:nvPr/>
-        </p:nvSpPr>
-        <p:spPr>
-          <a:xfrm>
-            <a:off x="274320" y="5038344"/>
-            <a:ext cx="8595360" cy="1234440"/>
-          </a:xfrm>
-          <a:prstGeom prst="rect">
-            <a:avLst/>
-          </a:prstGeom>
-          <a:solidFill>
-            <a:srgbClr val="FFFFFF"/>
-          </a:solidFill>
-          <a:ln>
-            <a:noFill/>
-          </a:ln>
-        </p:spPr>
-        <p:style>
-          <a:lnRef idx="1">
-            <a:schemeClr val="accent1"/>
-          </a:lnRef>
-          <a:fillRef idx="3">
-            <a:schemeClr val="accent1"/>
-          </a:fillRef>
-          <a:effectRef idx="2">
-            <a:schemeClr val="accent1"/>
-          </a:effectRef>
-          <a:fontRef idx="minor">
-            <a:schemeClr val="lt1"/>
-          </a:fontRef>
-        </p:style>
-        <p:txBody>
-          <a:bodyPr rtlCol="0" anchor="ctr"/>
-          <a:lstStyle/>
-          <a:p>
-            <a:pPr algn="ctr"/>
-          </a:p>
-        </p:txBody>
-      </p:sp>
-      <p:sp>
-        <p:nvSpPr>
-          <p:cNvPr id="26" name="Rectangle 25"/>
-          <p:cNvSpPr/>
-          <p:nvPr/>
-        </p:nvSpPr>
-        <p:spPr>
-          <a:xfrm>
-            <a:off x="274320" y="5038344"/>
-            <a:ext cx="54864" cy="1234440"/>
-          </a:xfrm>
-          <a:prstGeom prst="rect">
-            <a:avLst/>
-          </a:prstGeom>
-          <a:solidFill>
-            <a:srgbClr val="2E7D32"/>
-          </a:solidFill>
-          <a:ln>
-            <a:noFill/>
-          </a:ln>
-        </p:spPr>
-        <p:style>
-          <a:lnRef idx="1">
-            <a:schemeClr val="accent1"/>
-          </a:lnRef>
-          <a:fillRef idx="3">
-            <a:schemeClr val="accent1"/>
-          </a:fillRef>
-          <a:effectRef idx="2">
-            <a:schemeClr val="accent1"/>
-          </a:effectRef>
-          <a:fontRef idx="minor">
-            <a:schemeClr val="lt1"/>
-          </a:fontRef>
-        </p:style>
-        <p:txBody>
-          <a:bodyPr rtlCol="0" anchor="ctr"/>
-          <a:lstStyle/>
-          <a:p>
-            <a:pPr algn="ctr"/>
-          </a:p>
-        </p:txBody>
-      </p:sp>
-      <p:sp>
-        <p:nvSpPr>
-          <p:cNvPr id="27" name="Rectangle 26"/>
-          <p:cNvSpPr/>
-          <p:nvPr/>
-        </p:nvSpPr>
-        <p:spPr>
-          <a:xfrm>
-            <a:off x="8138160" y="5129784"/>
-            <a:ext cx="640080" cy="274320"/>
-          </a:xfrm>
-          <a:prstGeom prst="rect">
-            <a:avLst/>
-          </a:prstGeom>
-          <a:solidFill>
-            <a:srgbClr val="2E7D32"/>
-          </a:solidFill>
-          <a:ln>
-            <a:noFill/>
-          </a:ln>
-        </p:spPr>
-        <p:style>
-          <a:lnRef idx="1">
-            <a:schemeClr val="accent1"/>
-          </a:lnRef>
-          <a:fillRef idx="3">
-            <a:schemeClr val="accent1"/>
-          </a:fillRef>
-          <a:effectRef idx="2">
-            <a:schemeClr val="accent1"/>
-          </a:effectRef>
-          <a:fontRef idx="minor">
-            <a:schemeClr val="lt1"/>
-          </a:fontRef>
-        </p:style>
-        <p:txBody>
-          <a:bodyPr rtlCol="0" anchor="ctr"/>
-          <a:lstStyle/>
-          <a:p>
-            <a:pPr algn="ctr"/>
-          </a:p>
-        </p:txBody>
-      </p:sp>
-      <p:sp>
-        <p:nvSpPr>
-          <p:cNvPr id="28" name="TextBox 27"/>
-          <p:cNvSpPr txBox="1"/>
-          <p:nvPr/>
-        </p:nvSpPr>
-        <p:spPr>
-          <a:xfrm>
-            <a:off x="8138160" y="5129784"/>
-            <a:ext cx="640080" cy="274320"/>
-          </a:xfrm>
-          <a:prstGeom prst="rect">
-            <a:avLst/>
-          </a:prstGeom>
-          <a:noFill/>
-        </p:spPr>
-        <p:txBody>
-          <a:bodyPr wrap="square">
-            <a:spAutoFit/>
-          </a:bodyPr>
-          <a:lstStyle/>
-          <a:p>
-            <a:pPr algn="ctr"/>
-            <a:r>
-              <a:rPr sz="900" b="1">
-                <a:solidFill>
-                  <a:srgbClr val="FFFFFF"/>
-                </a:solidFill>
-              </a:rPr>
-              <a:t>5/10</a:t>
-            </a:r>
-          </a:p>
-        </p:txBody>
-      </p:sp>
-      <p:sp>
-        <p:nvSpPr>
-          <p:cNvPr id="29" name="TextBox 28"/>
-          <p:cNvSpPr txBox="1"/>
-          <p:nvPr/>
-        </p:nvSpPr>
-        <p:spPr>
-          <a:xfrm>
-            <a:off x="457200" y="5129784"/>
-            <a:ext cx="7498080" cy="347472"/>
-          </a:xfrm>
-          <a:prstGeom prst="rect">
-            <a:avLst/>
-          </a:prstGeom>
-          <a:noFill/>
-        </p:spPr>
-        <p:txBody>
-          <a:bodyPr wrap="square">
-            <a:spAutoFit/>
-          </a:bodyPr>
-          <a:lstStyle/>
-          <a:p>
-            <a:pPr algn="l"/>
-            <a:r>
-              <a:rPr sz="1100" b="1">
-                <a:solidFill>
-                  <a:srgbClr val="212121"/>
-                </a:solidFill>
-              </a:rPr>
-              <a:t>Turkey’s London Investor Pitch Gets Upended by Markets Tailspin</a:t>
-            </a:r>
-          </a:p>
-        </p:txBody>
-      </p:sp>
-      <p:sp>
-        <p:nvSpPr>
-          <p:cNvPr id="30" name="TextBox 29"/>
-          <p:cNvSpPr txBox="1"/>
-          <p:nvPr/>
-        </p:nvSpPr>
-        <p:spPr>
-          <a:xfrm>
-            <a:off x="457200" y="5477256"/>
-            <a:ext cx="8321040" cy="502920"/>
-          </a:xfrm>
-          <a:prstGeom prst="rect">
-            <a:avLst/>
-          </a:prstGeom>
-          <a:noFill/>
-        </p:spPr>
-        <p:txBody>
-          <a:bodyPr wrap="square">
-            <a:spAutoFit/>
-          </a:bodyPr>
-          <a:lstStyle/>
-          <a:p>
-            <a:pPr algn="l"/>
-            <a:r>
-              <a:rPr sz="900" b="0">
-                <a:solidFill>
-                  <a:srgbClr val="757575"/>
-                </a:solidFill>
-              </a:rPr>
-              <a:t>With a packed schedule of meetings and speeches in front of London investors, Turkey’s top economic officials set out on Thursday to ease concerns about the cou…</a:t>
             </a:r>
           </a:p>
         </p:txBody>

--- a/newsletter_20260522.pptx
+++ b/newsletter_20260522.pptx
@@ -4033,7 +4033,7 @@
                   <a:srgbClr val="212121"/>
                 </a:solidFill>
               </a:rPr>
-              <a:t>Fed's Waller Now Says Rate Increases Are Possible</a:t>
+              <a:t>Trump Tells Warsh to Do ‘Own Thing’ as Fed Chair Sworn In</a:t>
             </a:r>
           </a:p>
         </p:txBody>
@@ -4221,7 +4221,7 @@
                   <a:srgbClr val="212121"/>
                 </a:solidFill>
               </a:rPr>
-              <a:t>EU Warns Companies to Diversify Supply Lines From China Faster</a:t>
+              <a:t>Trump Tells Warsh to 'Do Your Own Thing' at Fed</a:t>
             </a:r>
           </a:p>
         </p:txBody>
@@ -4284,7 +4284,7 @@
             <a:avLst/>
           </a:prstGeom>
           <a:solidFill>
-            <a:srgbClr val="2E7D32"/>
+            <a:srgbClr val="E65C00"/>
           </a:solidFill>
           <a:ln>
             <a:noFill/>
@@ -4341,7 +4341,7 @@
                   <a:srgbClr val="FFFFFF"/>
                 </a:solidFill>
               </a:rPr>
-              <a:t>5</a:t>
+              <a:t>7</a:t>
             </a:r>
           </a:p>
         </p:txBody>
@@ -4409,7 +4409,7 @@
                   <a:srgbClr val="212121"/>
                 </a:solidFill>
               </a:rPr>
-              <a:t>UK Military Air Show Canceled Over Middle East War Uncertainty</a:t>
+              <a:t>Ken Griffin Gives $5 Million to GOP in First Midterm Donation</a:t>
             </a:r>
           </a:p>
         </p:txBody>
@@ -4597,7 +4597,7 @@
                   <a:srgbClr val="212121"/>
                 </a:solidFill>
               </a:rPr>
-              <a:t>Trump Gets Another Ally in EU With Jansa’s Return in Slovenia</a:t>
+              <a:t>What Turkey’s PoliticalDrama Means forErdogan and Markets</a:t>
             </a:r>
           </a:p>
         </p:txBody>
@@ -4763,7 +4763,7 @@
             <a:avLst/>
           </a:prstGeom>
           <a:solidFill>
-            <a:srgbClr val="2E7D32"/>
+            <a:srgbClr val="E65C00"/>
           </a:solidFill>
           <a:ln>
             <a:noFill/>
@@ -4801,6 +4801,493 @@
           <a:xfrm>
             <a:off x="8138160" y="1097280"/>
             <a:ext cx="640080" cy="274320"/>
+          </a:xfrm>
+          <a:prstGeom prst="rect">
+            <a:avLst/>
+          </a:prstGeom>
+          <a:solidFill>
+            <a:srgbClr val="E65C00"/>
+          </a:solidFill>
+          <a:ln>
+            <a:noFill/>
+          </a:ln>
+        </p:spPr>
+        <p:style>
+          <a:lnRef idx="1">
+            <a:schemeClr val="accent1"/>
+          </a:lnRef>
+          <a:fillRef idx="3">
+            <a:schemeClr val="accent1"/>
+          </a:fillRef>
+          <a:effectRef idx="2">
+            <a:schemeClr val="accent1"/>
+          </a:effectRef>
+          <a:fontRef idx="minor">
+            <a:schemeClr val="lt1"/>
+          </a:fontRef>
+        </p:style>
+        <p:txBody>
+          <a:bodyPr rtlCol="0" anchor="ctr"/>
+          <a:lstStyle/>
+          <a:p>
+            <a:pPr algn="ctr"/>
+          </a:p>
+        </p:txBody>
+      </p:sp>
+      <p:sp>
+        <p:nvSpPr>
+          <p:cNvPr id="7" name="TextBox 6"/>
+          <p:cNvSpPr txBox="1"/>
+          <p:nvPr/>
+        </p:nvSpPr>
+        <p:spPr>
+          <a:xfrm>
+            <a:off x="8138160" y="1097280"/>
+            <a:ext cx="640080" cy="274320"/>
+          </a:xfrm>
+          <a:prstGeom prst="rect">
+            <a:avLst/>
+          </a:prstGeom>
+          <a:noFill/>
+        </p:spPr>
+        <p:txBody>
+          <a:bodyPr wrap="square">
+            <a:spAutoFit/>
+          </a:bodyPr>
+          <a:lstStyle/>
+          <a:p>
+            <a:pPr algn="ctr"/>
+            <a:r>
+              <a:rPr sz="900" b="1">
+                <a:solidFill>
+                  <a:srgbClr val="FFFFFF"/>
+                </a:solidFill>
+              </a:rPr>
+              <a:t>7/10</a:t>
+            </a:r>
+          </a:p>
+        </p:txBody>
+      </p:sp>
+      <p:sp>
+        <p:nvSpPr>
+          <p:cNvPr id="8" name="TextBox 7"/>
+          <p:cNvSpPr txBox="1"/>
+          <p:nvPr/>
+        </p:nvSpPr>
+        <p:spPr>
+          <a:xfrm>
+            <a:off x="457200" y="1097280"/>
+            <a:ext cx="7498080" cy="347472"/>
+          </a:xfrm>
+          <a:prstGeom prst="rect">
+            <a:avLst/>
+          </a:prstGeom>
+          <a:noFill/>
+        </p:spPr>
+        <p:txBody>
+          <a:bodyPr wrap="square">
+            <a:spAutoFit/>
+          </a:bodyPr>
+          <a:lstStyle/>
+          <a:p>
+            <a:pPr algn="l"/>
+            <a:r>
+              <a:rPr sz="1100" b="1">
+                <a:solidFill>
+                  <a:srgbClr val="212121"/>
+                </a:solidFill>
+              </a:rPr>
+              <a:t>Trump Tells Warsh to Do ‘Own Thing’ as Fed Chair Sworn In</a:t>
+            </a:r>
+          </a:p>
+        </p:txBody>
+      </p:sp>
+      <p:sp>
+        <p:nvSpPr>
+          <p:cNvPr id="9" name="TextBox 8"/>
+          <p:cNvSpPr txBox="1"/>
+          <p:nvPr/>
+        </p:nvSpPr>
+        <p:spPr>
+          <a:xfrm>
+            <a:off x="457200" y="1444752"/>
+            <a:ext cx="8321040" cy="502920"/>
+          </a:xfrm>
+          <a:prstGeom prst="rect">
+            <a:avLst/>
+          </a:prstGeom>
+          <a:noFill/>
+        </p:spPr>
+        <p:txBody>
+          <a:bodyPr wrap="square">
+            <a:spAutoFit/>
+          </a:bodyPr>
+          <a:lstStyle/>
+          <a:p>
+            <a:pPr algn="l"/>
+            <a:r>
+              <a:rPr sz="900" b="0">
+                <a:solidFill>
+                  <a:srgbClr val="757575"/>
+                </a:solidFill>
+              </a:rPr>
+              <a:t>President Donald Trump stressed that he wants Kevin Warsh to independently lead the Federal Reserve, as he looked to downplay investor concern that he would pre…</a:t>
+            </a:r>
+          </a:p>
+        </p:txBody>
+      </p:sp>
+      <p:sp>
+        <p:nvSpPr>
+          <p:cNvPr id="10" name="TextBox 9"/>
+          <p:cNvSpPr txBox="1"/>
+          <p:nvPr/>
+        </p:nvSpPr>
+        <p:spPr>
+          <a:xfrm>
+            <a:off x="457200" y="1965960"/>
+            <a:ext cx="3657600" cy="228600"/>
+          </a:xfrm>
+          <a:prstGeom prst="rect">
+            <a:avLst/>
+          </a:prstGeom>
+          <a:noFill/>
+        </p:spPr>
+        <p:txBody>
+          <a:bodyPr wrap="square">
+            <a:spAutoFit/>
+          </a:bodyPr>
+          <a:lstStyle/>
+          <a:p>
+            <a:pPr algn="l"/>
+            <a:r>
+              <a:rPr sz="800" b="0">
+                <a:solidFill>
+                  <a:srgbClr val="757575"/>
+                </a:solidFill>
+              </a:rPr>
+              <a:t>📰 feeds.bloomberg.com</a:t>
+            </a:r>
+          </a:p>
+        </p:txBody>
+      </p:sp>
+      <p:sp>
+        <p:nvSpPr>
+          <p:cNvPr id="11" name="Rectangle 10"/>
+          <p:cNvSpPr/>
+          <p:nvPr/>
+        </p:nvSpPr>
+        <p:spPr>
+          <a:xfrm>
+            <a:off x="274320" y="2350008"/>
+            <a:ext cx="8595360" cy="1234440"/>
+          </a:xfrm>
+          <a:prstGeom prst="rect">
+            <a:avLst/>
+          </a:prstGeom>
+          <a:solidFill>
+            <a:srgbClr val="FFFFFF"/>
+          </a:solidFill>
+          <a:ln>
+            <a:noFill/>
+          </a:ln>
+        </p:spPr>
+        <p:style>
+          <a:lnRef idx="1">
+            <a:schemeClr val="accent1"/>
+          </a:lnRef>
+          <a:fillRef idx="3">
+            <a:schemeClr val="accent1"/>
+          </a:fillRef>
+          <a:effectRef idx="2">
+            <a:schemeClr val="accent1"/>
+          </a:effectRef>
+          <a:fontRef idx="minor">
+            <a:schemeClr val="lt1"/>
+          </a:fontRef>
+        </p:style>
+        <p:txBody>
+          <a:bodyPr rtlCol="0" anchor="ctr"/>
+          <a:lstStyle/>
+          <a:p>
+            <a:pPr algn="ctr"/>
+          </a:p>
+        </p:txBody>
+      </p:sp>
+      <p:sp>
+        <p:nvSpPr>
+          <p:cNvPr id="12" name="Rectangle 11"/>
+          <p:cNvSpPr/>
+          <p:nvPr/>
+        </p:nvSpPr>
+        <p:spPr>
+          <a:xfrm>
+            <a:off x="274320" y="2350008"/>
+            <a:ext cx="54864" cy="1234440"/>
+          </a:xfrm>
+          <a:prstGeom prst="rect">
+            <a:avLst/>
+          </a:prstGeom>
+          <a:solidFill>
+            <a:srgbClr val="E65C00"/>
+          </a:solidFill>
+          <a:ln>
+            <a:noFill/>
+          </a:ln>
+        </p:spPr>
+        <p:style>
+          <a:lnRef idx="1">
+            <a:schemeClr val="accent1"/>
+          </a:lnRef>
+          <a:fillRef idx="3">
+            <a:schemeClr val="accent1"/>
+          </a:fillRef>
+          <a:effectRef idx="2">
+            <a:schemeClr val="accent1"/>
+          </a:effectRef>
+          <a:fontRef idx="minor">
+            <a:schemeClr val="lt1"/>
+          </a:fontRef>
+        </p:style>
+        <p:txBody>
+          <a:bodyPr rtlCol="0" anchor="ctr"/>
+          <a:lstStyle/>
+          <a:p>
+            <a:pPr algn="ctr"/>
+          </a:p>
+        </p:txBody>
+      </p:sp>
+      <p:sp>
+        <p:nvSpPr>
+          <p:cNvPr id="13" name="Rectangle 12"/>
+          <p:cNvSpPr/>
+          <p:nvPr/>
+        </p:nvSpPr>
+        <p:spPr>
+          <a:xfrm>
+            <a:off x="8138160" y="2441448"/>
+            <a:ext cx="640080" cy="274320"/>
+          </a:xfrm>
+          <a:prstGeom prst="rect">
+            <a:avLst/>
+          </a:prstGeom>
+          <a:solidFill>
+            <a:srgbClr val="E65C00"/>
+          </a:solidFill>
+          <a:ln>
+            <a:noFill/>
+          </a:ln>
+        </p:spPr>
+        <p:style>
+          <a:lnRef idx="1">
+            <a:schemeClr val="accent1"/>
+          </a:lnRef>
+          <a:fillRef idx="3">
+            <a:schemeClr val="accent1"/>
+          </a:fillRef>
+          <a:effectRef idx="2">
+            <a:schemeClr val="accent1"/>
+          </a:effectRef>
+          <a:fontRef idx="minor">
+            <a:schemeClr val="lt1"/>
+          </a:fontRef>
+        </p:style>
+        <p:txBody>
+          <a:bodyPr rtlCol="0" anchor="ctr"/>
+          <a:lstStyle/>
+          <a:p>
+            <a:pPr algn="ctr"/>
+          </a:p>
+        </p:txBody>
+      </p:sp>
+      <p:sp>
+        <p:nvSpPr>
+          <p:cNvPr id="14" name="TextBox 13"/>
+          <p:cNvSpPr txBox="1"/>
+          <p:nvPr/>
+        </p:nvSpPr>
+        <p:spPr>
+          <a:xfrm>
+            <a:off x="8138160" y="2441448"/>
+            <a:ext cx="640080" cy="274320"/>
+          </a:xfrm>
+          <a:prstGeom prst="rect">
+            <a:avLst/>
+          </a:prstGeom>
+          <a:noFill/>
+        </p:spPr>
+        <p:txBody>
+          <a:bodyPr wrap="square">
+            <a:spAutoFit/>
+          </a:bodyPr>
+          <a:lstStyle/>
+          <a:p>
+            <a:pPr algn="ctr"/>
+            <a:r>
+              <a:rPr sz="900" b="1">
+                <a:solidFill>
+                  <a:srgbClr val="FFFFFF"/>
+                </a:solidFill>
+              </a:rPr>
+              <a:t>7/10</a:t>
+            </a:r>
+          </a:p>
+        </p:txBody>
+      </p:sp>
+      <p:sp>
+        <p:nvSpPr>
+          <p:cNvPr id="15" name="TextBox 14"/>
+          <p:cNvSpPr txBox="1"/>
+          <p:nvPr/>
+        </p:nvSpPr>
+        <p:spPr>
+          <a:xfrm>
+            <a:off x="457200" y="2441448"/>
+            <a:ext cx="7498080" cy="347472"/>
+          </a:xfrm>
+          <a:prstGeom prst="rect">
+            <a:avLst/>
+          </a:prstGeom>
+          <a:noFill/>
+        </p:spPr>
+        <p:txBody>
+          <a:bodyPr wrap="square">
+            <a:spAutoFit/>
+          </a:bodyPr>
+          <a:lstStyle/>
+          <a:p>
+            <a:pPr algn="l"/>
+            <a:r>
+              <a:rPr sz="1100" b="1">
+                <a:solidFill>
+                  <a:srgbClr val="212121"/>
+                </a:solidFill>
+              </a:rPr>
+              <a:t>Trump Tells Warsh to 'Do Your Own Thing' at Fed</a:t>
+            </a:r>
+          </a:p>
+        </p:txBody>
+      </p:sp>
+      <p:sp>
+        <p:nvSpPr>
+          <p:cNvPr id="16" name="TextBox 15"/>
+          <p:cNvSpPr txBox="1"/>
+          <p:nvPr/>
+        </p:nvSpPr>
+        <p:spPr>
+          <a:xfrm>
+            <a:off x="457200" y="2788920"/>
+            <a:ext cx="8321040" cy="502920"/>
+          </a:xfrm>
+          <a:prstGeom prst="rect">
+            <a:avLst/>
+          </a:prstGeom>
+          <a:noFill/>
+        </p:spPr>
+        <p:txBody>
+          <a:bodyPr wrap="square">
+            <a:spAutoFit/>
+          </a:bodyPr>
+          <a:lstStyle/>
+          <a:p>
+            <a:pPr algn="l"/>
+            <a:r>
+              <a:rPr sz="900" b="0">
+                <a:solidFill>
+                  <a:srgbClr val="757575"/>
+                </a:solidFill>
+              </a:rPr>
+              <a:t>President Donald Trump says no one in the US is better prepared to lead the Federal Reserve than Kevin Warsh as he swears Warsh in at the White House as the 17t…</a:t>
+            </a:r>
+          </a:p>
+        </p:txBody>
+      </p:sp>
+      <p:sp>
+        <p:nvSpPr>
+          <p:cNvPr id="17" name="TextBox 16"/>
+          <p:cNvSpPr txBox="1"/>
+          <p:nvPr/>
+        </p:nvSpPr>
+        <p:spPr>
+          <a:xfrm>
+            <a:off x="457200" y="3310128"/>
+            <a:ext cx="3657600" cy="228600"/>
+          </a:xfrm>
+          <a:prstGeom prst="rect">
+            <a:avLst/>
+          </a:prstGeom>
+          <a:noFill/>
+        </p:spPr>
+        <p:txBody>
+          <a:bodyPr wrap="square">
+            <a:spAutoFit/>
+          </a:bodyPr>
+          <a:lstStyle/>
+          <a:p>
+            <a:pPr algn="l"/>
+            <a:r>
+              <a:rPr sz="800" b="0">
+                <a:solidFill>
+                  <a:srgbClr val="757575"/>
+                </a:solidFill>
+              </a:rPr>
+              <a:t>📰 feeds.bloomberg.com</a:t>
+            </a:r>
+          </a:p>
+        </p:txBody>
+      </p:sp>
+      <p:sp>
+        <p:nvSpPr>
+          <p:cNvPr id="18" name="Rectangle 17"/>
+          <p:cNvSpPr/>
+          <p:nvPr/>
+        </p:nvSpPr>
+        <p:spPr>
+          <a:xfrm>
+            <a:off x="274320" y="3694176"/>
+            <a:ext cx="8595360" cy="1234440"/>
+          </a:xfrm>
+          <a:prstGeom prst="rect">
+            <a:avLst/>
+          </a:prstGeom>
+          <a:solidFill>
+            <a:srgbClr val="FFFFFF"/>
+          </a:solidFill>
+          <a:ln>
+            <a:noFill/>
+          </a:ln>
+        </p:spPr>
+        <p:style>
+          <a:lnRef idx="1">
+            <a:schemeClr val="accent1"/>
+          </a:lnRef>
+          <a:fillRef idx="3">
+            <a:schemeClr val="accent1"/>
+          </a:fillRef>
+          <a:effectRef idx="2">
+            <a:schemeClr val="accent1"/>
+          </a:effectRef>
+          <a:fontRef idx="minor">
+            <a:schemeClr val="lt1"/>
+          </a:fontRef>
+        </p:style>
+        <p:txBody>
+          <a:bodyPr rtlCol="0" anchor="ctr"/>
+          <a:lstStyle/>
+          <a:p>
+            <a:pPr algn="ctr"/>
+          </a:p>
+        </p:txBody>
+      </p:sp>
+      <p:sp>
+        <p:nvSpPr>
+          <p:cNvPr id="19" name="Rectangle 18"/>
+          <p:cNvSpPr/>
+          <p:nvPr/>
+        </p:nvSpPr>
+        <p:spPr>
+          <a:xfrm>
+            <a:off x="274320" y="3694176"/>
+            <a:ext cx="54864" cy="1234440"/>
           </a:xfrm>
           <a:prstGeom prst="rect">
             <a:avLst/>
@@ -4836,13 +5323,56 @@
       </p:sp>
       <p:sp>
         <p:nvSpPr>
-          <p:cNvPr id="7" name="TextBox 6"/>
+          <p:cNvPr id="20" name="Rectangle 19"/>
+          <p:cNvSpPr/>
+          <p:nvPr/>
+        </p:nvSpPr>
+        <p:spPr>
+          <a:xfrm>
+            <a:off x="8138160" y="3785616"/>
+            <a:ext cx="640080" cy="274320"/>
+          </a:xfrm>
+          <a:prstGeom prst="rect">
+            <a:avLst/>
+          </a:prstGeom>
+          <a:solidFill>
+            <a:srgbClr val="2E7D32"/>
+          </a:solidFill>
+          <a:ln>
+            <a:noFill/>
+          </a:ln>
+        </p:spPr>
+        <p:style>
+          <a:lnRef idx="1">
+            <a:schemeClr val="accent1"/>
+          </a:lnRef>
+          <a:fillRef idx="3">
+            <a:schemeClr val="accent1"/>
+          </a:fillRef>
+          <a:effectRef idx="2">
+            <a:schemeClr val="accent1"/>
+          </a:effectRef>
+          <a:fontRef idx="minor">
+            <a:schemeClr val="lt1"/>
+          </a:fontRef>
+        </p:style>
+        <p:txBody>
+          <a:bodyPr rtlCol="0" anchor="ctr"/>
+          <a:lstStyle/>
+          <a:p>
+            <a:pPr algn="ctr"/>
+          </a:p>
+        </p:txBody>
+      </p:sp>
+      <p:sp>
+        <p:nvSpPr>
+          <p:cNvPr id="21" name="TextBox 20"/>
           <p:cNvSpPr txBox="1"/>
           <p:nvPr/>
         </p:nvSpPr>
         <p:spPr>
           <a:xfrm>
-            <a:off x="8138160" y="1097280"/>
+            <a:off x="8138160" y="3785616"/>
             <a:ext cx="640080" cy="274320"/>
           </a:xfrm>
           <a:prstGeom prst="rect">
@@ -4870,13 +5400,13 @@
       </p:sp>
       <p:sp>
         <p:nvSpPr>
-          <p:cNvPr id="8" name="TextBox 7"/>
+          <p:cNvPr id="22" name="TextBox 21"/>
           <p:cNvSpPr txBox="1"/>
           <p:nvPr/>
         </p:nvSpPr>
         <p:spPr>
           <a:xfrm>
-            <a:off x="457200" y="1097280"/>
+            <a:off x="457200" y="3785616"/>
             <a:ext cx="7498080" cy="347472"/>
           </a:xfrm>
           <a:prstGeom prst="rect">
@@ -4897,20 +5427,20 @@
                   <a:srgbClr val="212121"/>
                 </a:solidFill>
               </a:rPr>
-              <a:t>Trump Gets Another Ally in EU With Jansa’s Return in Slovenia</a:t>
-            </a:r>
-          </a:p>
-        </p:txBody>
-      </p:sp>
-      <p:sp>
-        <p:nvSpPr>
-          <p:cNvPr id="9" name="TextBox 8"/>
+              <a:t>What Turkey’s PoliticalDrama Means forErdogan and Markets</a:t>
+            </a:r>
+          </a:p>
+        </p:txBody>
+      </p:sp>
+      <p:sp>
+        <p:nvSpPr>
+          <p:cNvPr id="23" name="TextBox 22"/>
           <p:cNvSpPr txBox="1"/>
           <p:nvPr/>
         </p:nvSpPr>
         <p:spPr>
           <a:xfrm>
-            <a:off x="457200" y="1444752"/>
+            <a:off x="457200" y="4133088"/>
             <a:ext cx="8321040" cy="502920"/>
           </a:xfrm>
           <a:prstGeom prst="rect">
@@ -4931,20 +5461,20 @@
                   <a:srgbClr val="757575"/>
                 </a:solidFill>
               </a:rPr>
-              <a:t>Slovenian lawmakers elected nationalist leader Janez Jansa as the country’s next premier, tilting another European Union member to the right and handing Donald …</a:t>
-            </a:r>
-          </a:p>
-        </p:txBody>
-      </p:sp>
-      <p:sp>
-        <p:nvSpPr>
-          <p:cNvPr id="10" name="TextBox 9"/>
+              <a:t>A Turkish court decision to remove the leadership of the country’s main opposition party caused the main index to tumble to its lowest in six weeks, then revers…</a:t>
+            </a:r>
+          </a:p>
+        </p:txBody>
+      </p:sp>
+      <p:sp>
+        <p:nvSpPr>
+          <p:cNvPr id="24" name="TextBox 23"/>
           <p:cNvSpPr txBox="1"/>
           <p:nvPr/>
         </p:nvSpPr>
         <p:spPr>
           <a:xfrm>
-            <a:off x="457200" y="1965960"/>
+            <a:off x="457200" y="4654296"/>
             <a:ext cx="3657600" cy="228600"/>
           </a:xfrm>
           <a:prstGeom prst="rect">
@@ -4972,13 +5502,13 @@
       </p:sp>
       <p:sp>
         <p:nvSpPr>
-          <p:cNvPr id="11" name="Rectangle 10"/>
+          <p:cNvPr id="25" name="Rectangle 24"/>
           <p:cNvSpPr/>
           <p:nvPr/>
         </p:nvSpPr>
         <p:spPr>
           <a:xfrm>
-            <a:off x="274320" y="2350008"/>
+            <a:off x="274320" y="5038344"/>
             <a:ext cx="8595360" cy="1234440"/>
           </a:xfrm>
           <a:prstGeom prst="rect">
@@ -5015,13 +5545,13 @@
       </p:sp>
       <p:sp>
         <p:nvSpPr>
-          <p:cNvPr id="12" name="Rectangle 11"/>
+          <p:cNvPr id="26" name="Rectangle 25"/>
           <p:cNvSpPr/>
           <p:nvPr/>
         </p:nvSpPr>
         <p:spPr>
           <a:xfrm>
-            <a:off x="274320" y="2350008"/>
+            <a:off x="274320" y="5038344"/>
             <a:ext cx="54864" cy="1234440"/>
           </a:xfrm>
           <a:prstGeom prst="rect">
@@ -5058,13 +5588,13 @@
       </p:sp>
       <p:sp>
         <p:nvSpPr>
-          <p:cNvPr id="13" name="Rectangle 12"/>
+          <p:cNvPr id="27" name="Rectangle 26"/>
           <p:cNvSpPr/>
           <p:nvPr/>
         </p:nvSpPr>
         <p:spPr>
           <a:xfrm>
-            <a:off x="8138160" y="2441448"/>
+            <a:off x="8138160" y="5129784"/>
             <a:ext cx="640080" cy="274320"/>
           </a:xfrm>
           <a:prstGeom prst="rect">
@@ -5101,13 +5631,13 @@
       </p:sp>
       <p:sp>
         <p:nvSpPr>
-          <p:cNvPr id="14" name="TextBox 13"/>
+          <p:cNvPr id="28" name="TextBox 27"/>
           <p:cNvSpPr txBox="1"/>
           <p:nvPr/>
         </p:nvSpPr>
         <p:spPr>
           <a:xfrm>
-            <a:off x="8138160" y="2441448"/>
+            <a:off x="8138160" y="5129784"/>
             <a:ext cx="640080" cy="274320"/>
           </a:xfrm>
           <a:prstGeom prst="rect">
@@ -5135,13 +5665,13 @@
       </p:sp>
       <p:sp>
         <p:nvSpPr>
-          <p:cNvPr id="15" name="TextBox 14"/>
+          <p:cNvPr id="29" name="TextBox 28"/>
           <p:cNvSpPr txBox="1"/>
           <p:nvPr/>
         </p:nvSpPr>
         <p:spPr>
           <a:xfrm>
-            <a:off x="457200" y="2441448"/>
+            <a:off x="457200" y="5129784"/>
             <a:ext cx="7498080" cy="347472"/>
           </a:xfrm>
           <a:prstGeom prst="rect">
@@ -5162,20 +5692,20 @@
                   <a:srgbClr val="212121"/>
                 </a:solidFill>
               </a:rPr>
-              <a:t>EU Warns Companies to Diversify Supply Lines From China Faster</a:t>
-            </a:r>
-          </a:p>
-        </p:txBody>
-      </p:sp>
-      <p:sp>
-        <p:nvSpPr>
-          <p:cNvPr id="16" name="TextBox 15"/>
+              <a:t>Ken Griffin Gives $5 Million to GOP in First Midterm Donation</a:t>
+            </a:r>
+          </a:p>
+        </p:txBody>
+      </p:sp>
+      <p:sp>
+        <p:nvSpPr>
+          <p:cNvPr id="30" name="TextBox 29"/>
           <p:cNvSpPr txBox="1"/>
           <p:nvPr/>
         </p:nvSpPr>
         <p:spPr>
           <a:xfrm>
-            <a:off x="457200" y="2788920"/>
+            <a:off x="457200" y="5477256"/>
             <a:ext cx="8321040" cy="502920"/>
           </a:xfrm>
           <a:prstGeom prst="rect">
@@ -5196,537 +5726,7 @@
                   <a:srgbClr val="757575"/>
                 </a:solidFill>
               </a:rPr>
-              <a:t>The European Union’s industry chief said that businesses on the continent haven’t done enough to reduce major dependencies on China.</a:t>
-            </a:r>
-          </a:p>
-        </p:txBody>
-      </p:sp>
-      <p:sp>
-        <p:nvSpPr>
-          <p:cNvPr id="17" name="TextBox 16"/>
-          <p:cNvSpPr txBox="1"/>
-          <p:nvPr/>
-        </p:nvSpPr>
-        <p:spPr>
-          <a:xfrm>
-            <a:off x="457200" y="3310128"/>
-            <a:ext cx="3657600" cy="228600"/>
-          </a:xfrm>
-          <a:prstGeom prst="rect">
-            <a:avLst/>
-          </a:prstGeom>
-          <a:noFill/>
-        </p:spPr>
-        <p:txBody>
-          <a:bodyPr wrap="square">
-            <a:spAutoFit/>
-          </a:bodyPr>
-          <a:lstStyle/>
-          <a:p>
-            <a:pPr algn="l"/>
-            <a:r>
-              <a:rPr sz="800" b="0">
-                <a:solidFill>
-                  <a:srgbClr val="757575"/>
-                </a:solidFill>
-              </a:rPr>
-              <a:t>📰 feeds.bloomberg.com</a:t>
-            </a:r>
-          </a:p>
-        </p:txBody>
-      </p:sp>
-      <p:sp>
-        <p:nvSpPr>
-          <p:cNvPr id="18" name="Rectangle 17"/>
-          <p:cNvSpPr/>
-          <p:nvPr/>
-        </p:nvSpPr>
-        <p:spPr>
-          <a:xfrm>
-            <a:off x="274320" y="3694176"/>
-            <a:ext cx="8595360" cy="1234440"/>
-          </a:xfrm>
-          <a:prstGeom prst="rect">
-            <a:avLst/>
-          </a:prstGeom>
-          <a:solidFill>
-            <a:srgbClr val="FFFFFF"/>
-          </a:solidFill>
-          <a:ln>
-            <a:noFill/>
-          </a:ln>
-        </p:spPr>
-        <p:style>
-          <a:lnRef idx="1">
-            <a:schemeClr val="accent1"/>
-          </a:lnRef>
-          <a:fillRef idx="3">
-            <a:schemeClr val="accent1"/>
-          </a:fillRef>
-          <a:effectRef idx="2">
-            <a:schemeClr val="accent1"/>
-          </a:effectRef>
-          <a:fontRef idx="minor">
-            <a:schemeClr val="lt1"/>
-          </a:fontRef>
-        </p:style>
-        <p:txBody>
-          <a:bodyPr rtlCol="0" anchor="ctr"/>
-          <a:lstStyle/>
-          <a:p>
-            <a:pPr algn="ctr"/>
-          </a:p>
-        </p:txBody>
-      </p:sp>
-      <p:sp>
-        <p:nvSpPr>
-          <p:cNvPr id="19" name="Rectangle 18"/>
-          <p:cNvSpPr/>
-          <p:nvPr/>
-        </p:nvSpPr>
-        <p:spPr>
-          <a:xfrm>
-            <a:off x="274320" y="3694176"/>
-            <a:ext cx="54864" cy="1234440"/>
-          </a:xfrm>
-          <a:prstGeom prst="rect">
-            <a:avLst/>
-          </a:prstGeom>
-          <a:solidFill>
-            <a:srgbClr val="E65C00"/>
-          </a:solidFill>
-          <a:ln>
-            <a:noFill/>
-          </a:ln>
-        </p:spPr>
-        <p:style>
-          <a:lnRef idx="1">
-            <a:schemeClr val="accent1"/>
-          </a:lnRef>
-          <a:fillRef idx="3">
-            <a:schemeClr val="accent1"/>
-          </a:fillRef>
-          <a:effectRef idx="2">
-            <a:schemeClr val="accent1"/>
-          </a:effectRef>
-          <a:fontRef idx="minor">
-            <a:schemeClr val="lt1"/>
-          </a:fontRef>
-        </p:style>
-        <p:txBody>
-          <a:bodyPr rtlCol="0" anchor="ctr"/>
-          <a:lstStyle/>
-          <a:p>
-            <a:pPr algn="ctr"/>
-          </a:p>
-        </p:txBody>
-      </p:sp>
-      <p:sp>
-        <p:nvSpPr>
-          <p:cNvPr id="20" name="Rectangle 19"/>
-          <p:cNvSpPr/>
-          <p:nvPr/>
-        </p:nvSpPr>
-        <p:spPr>
-          <a:xfrm>
-            <a:off x="8138160" y="3785616"/>
-            <a:ext cx="640080" cy="274320"/>
-          </a:xfrm>
-          <a:prstGeom prst="rect">
-            <a:avLst/>
-          </a:prstGeom>
-          <a:solidFill>
-            <a:srgbClr val="E65C00"/>
-          </a:solidFill>
-          <a:ln>
-            <a:noFill/>
-          </a:ln>
-        </p:spPr>
-        <p:style>
-          <a:lnRef idx="1">
-            <a:schemeClr val="accent1"/>
-          </a:lnRef>
-          <a:fillRef idx="3">
-            <a:schemeClr val="accent1"/>
-          </a:fillRef>
-          <a:effectRef idx="2">
-            <a:schemeClr val="accent1"/>
-          </a:effectRef>
-          <a:fontRef idx="minor">
-            <a:schemeClr val="lt1"/>
-          </a:fontRef>
-        </p:style>
-        <p:txBody>
-          <a:bodyPr rtlCol="0" anchor="ctr"/>
-          <a:lstStyle/>
-          <a:p>
-            <a:pPr algn="ctr"/>
-          </a:p>
-        </p:txBody>
-      </p:sp>
-      <p:sp>
-        <p:nvSpPr>
-          <p:cNvPr id="21" name="TextBox 20"/>
-          <p:cNvSpPr txBox="1"/>
-          <p:nvPr/>
-        </p:nvSpPr>
-        <p:spPr>
-          <a:xfrm>
-            <a:off x="8138160" y="3785616"/>
-            <a:ext cx="640080" cy="274320"/>
-          </a:xfrm>
-          <a:prstGeom prst="rect">
-            <a:avLst/>
-          </a:prstGeom>
-          <a:noFill/>
-        </p:spPr>
-        <p:txBody>
-          <a:bodyPr wrap="square">
-            <a:spAutoFit/>
-          </a:bodyPr>
-          <a:lstStyle/>
-          <a:p>
-            <a:pPr algn="ctr"/>
-            <a:r>
-              <a:rPr sz="900" b="1">
-                <a:solidFill>
-                  <a:srgbClr val="FFFFFF"/>
-                </a:solidFill>
-              </a:rPr>
-              <a:t>7/10</a:t>
-            </a:r>
-          </a:p>
-        </p:txBody>
-      </p:sp>
-      <p:sp>
-        <p:nvSpPr>
-          <p:cNvPr id="22" name="TextBox 21"/>
-          <p:cNvSpPr txBox="1"/>
-          <p:nvPr/>
-        </p:nvSpPr>
-        <p:spPr>
-          <a:xfrm>
-            <a:off x="457200" y="3785616"/>
-            <a:ext cx="7498080" cy="347472"/>
-          </a:xfrm>
-          <a:prstGeom prst="rect">
-            <a:avLst/>
-          </a:prstGeom>
-          <a:noFill/>
-        </p:spPr>
-        <p:txBody>
-          <a:bodyPr wrap="square">
-            <a:spAutoFit/>
-          </a:bodyPr>
-          <a:lstStyle/>
-          <a:p>
-            <a:pPr algn="l"/>
-            <a:r>
-              <a:rPr sz="1100" b="1">
-                <a:solidFill>
-                  <a:srgbClr val="212121"/>
-                </a:solidFill>
-              </a:rPr>
-              <a:t>Fed's Waller Now Says Rate Increases Are Possible</a:t>
-            </a:r>
-          </a:p>
-        </p:txBody>
-      </p:sp>
-      <p:sp>
-        <p:nvSpPr>
-          <p:cNvPr id="23" name="TextBox 22"/>
-          <p:cNvSpPr txBox="1"/>
-          <p:nvPr/>
-        </p:nvSpPr>
-        <p:spPr>
-          <a:xfrm>
-            <a:off x="457200" y="4133088"/>
-            <a:ext cx="8321040" cy="502920"/>
-          </a:xfrm>
-          <a:prstGeom prst="rect">
-            <a:avLst/>
-          </a:prstGeom>
-          <a:noFill/>
-        </p:spPr>
-        <p:txBody>
-          <a:bodyPr wrap="square">
-            <a:spAutoFit/>
-          </a:bodyPr>
-          <a:lstStyle/>
-          <a:p>
-            <a:pPr algn="l"/>
-            <a:r>
-              <a:rPr sz="900" b="0">
-                <a:solidFill>
-                  <a:srgbClr val="757575"/>
-                </a:solidFill>
-              </a:rPr>
-              <a:t>Federal Reserve Governor Christopher Waller now says he can't rule out voting to raise interest rates if inflation doesn’t start to slow soon, saying “inflation…</a:t>
-            </a:r>
-          </a:p>
-        </p:txBody>
-      </p:sp>
-      <p:sp>
-        <p:nvSpPr>
-          <p:cNvPr id="24" name="TextBox 23"/>
-          <p:cNvSpPr txBox="1"/>
-          <p:nvPr/>
-        </p:nvSpPr>
-        <p:spPr>
-          <a:xfrm>
-            <a:off x="457200" y="4654296"/>
-            <a:ext cx="3657600" cy="228600"/>
-          </a:xfrm>
-          <a:prstGeom prst="rect">
-            <a:avLst/>
-          </a:prstGeom>
-          <a:noFill/>
-        </p:spPr>
-        <p:txBody>
-          <a:bodyPr wrap="square">
-            <a:spAutoFit/>
-          </a:bodyPr>
-          <a:lstStyle/>
-          <a:p>
-            <a:pPr algn="l"/>
-            <a:r>
-              <a:rPr sz="800" b="0">
-                <a:solidFill>
-                  <a:srgbClr val="757575"/>
-                </a:solidFill>
-              </a:rPr>
-              <a:t>📰 feeds.bloomberg.com</a:t>
-            </a:r>
-          </a:p>
-        </p:txBody>
-      </p:sp>
-      <p:sp>
-        <p:nvSpPr>
-          <p:cNvPr id="25" name="Rectangle 24"/>
-          <p:cNvSpPr/>
-          <p:nvPr/>
-        </p:nvSpPr>
-        <p:spPr>
-          <a:xfrm>
-            <a:off x="274320" y="5038344"/>
-            <a:ext cx="8595360" cy="1234440"/>
-          </a:xfrm>
-          <a:prstGeom prst="rect">
-            <a:avLst/>
-          </a:prstGeom>
-          <a:solidFill>
-            <a:srgbClr val="FFFFFF"/>
-          </a:solidFill>
-          <a:ln>
-            <a:noFill/>
-          </a:ln>
-        </p:spPr>
-        <p:style>
-          <a:lnRef idx="1">
-            <a:schemeClr val="accent1"/>
-          </a:lnRef>
-          <a:fillRef idx="3">
-            <a:schemeClr val="accent1"/>
-          </a:fillRef>
-          <a:effectRef idx="2">
-            <a:schemeClr val="accent1"/>
-          </a:effectRef>
-          <a:fontRef idx="minor">
-            <a:schemeClr val="lt1"/>
-          </a:fontRef>
-        </p:style>
-        <p:txBody>
-          <a:bodyPr rtlCol="0" anchor="ctr"/>
-          <a:lstStyle/>
-          <a:p>
-            <a:pPr algn="ctr"/>
-          </a:p>
-        </p:txBody>
-      </p:sp>
-      <p:sp>
-        <p:nvSpPr>
-          <p:cNvPr id="26" name="Rectangle 25"/>
-          <p:cNvSpPr/>
-          <p:nvPr/>
-        </p:nvSpPr>
-        <p:spPr>
-          <a:xfrm>
-            <a:off x="274320" y="5038344"/>
-            <a:ext cx="54864" cy="1234440"/>
-          </a:xfrm>
-          <a:prstGeom prst="rect">
-            <a:avLst/>
-          </a:prstGeom>
-          <a:solidFill>
-            <a:srgbClr val="2E7D32"/>
-          </a:solidFill>
-          <a:ln>
-            <a:noFill/>
-          </a:ln>
-        </p:spPr>
-        <p:style>
-          <a:lnRef idx="1">
-            <a:schemeClr val="accent1"/>
-          </a:lnRef>
-          <a:fillRef idx="3">
-            <a:schemeClr val="accent1"/>
-          </a:fillRef>
-          <a:effectRef idx="2">
-            <a:schemeClr val="accent1"/>
-          </a:effectRef>
-          <a:fontRef idx="minor">
-            <a:schemeClr val="lt1"/>
-          </a:fontRef>
-        </p:style>
-        <p:txBody>
-          <a:bodyPr rtlCol="0" anchor="ctr"/>
-          <a:lstStyle/>
-          <a:p>
-            <a:pPr algn="ctr"/>
-          </a:p>
-        </p:txBody>
-      </p:sp>
-      <p:sp>
-        <p:nvSpPr>
-          <p:cNvPr id="27" name="Rectangle 26"/>
-          <p:cNvSpPr/>
-          <p:nvPr/>
-        </p:nvSpPr>
-        <p:spPr>
-          <a:xfrm>
-            <a:off x="8138160" y="5129784"/>
-            <a:ext cx="640080" cy="274320"/>
-          </a:xfrm>
-          <a:prstGeom prst="rect">
-            <a:avLst/>
-          </a:prstGeom>
-          <a:solidFill>
-            <a:srgbClr val="2E7D32"/>
-          </a:solidFill>
-          <a:ln>
-            <a:noFill/>
-          </a:ln>
-        </p:spPr>
-        <p:style>
-          <a:lnRef idx="1">
-            <a:schemeClr val="accent1"/>
-          </a:lnRef>
-          <a:fillRef idx="3">
-            <a:schemeClr val="accent1"/>
-          </a:fillRef>
-          <a:effectRef idx="2">
-            <a:schemeClr val="accent1"/>
-          </a:effectRef>
-          <a:fontRef idx="minor">
-            <a:schemeClr val="lt1"/>
-          </a:fontRef>
-        </p:style>
-        <p:txBody>
-          <a:bodyPr rtlCol="0" anchor="ctr"/>
-          <a:lstStyle/>
-          <a:p>
-            <a:pPr algn="ctr"/>
-          </a:p>
-        </p:txBody>
-      </p:sp>
-      <p:sp>
-        <p:nvSpPr>
-          <p:cNvPr id="28" name="TextBox 27"/>
-          <p:cNvSpPr txBox="1"/>
-          <p:nvPr/>
-        </p:nvSpPr>
-        <p:spPr>
-          <a:xfrm>
-            <a:off x="8138160" y="5129784"/>
-            <a:ext cx="640080" cy="274320"/>
-          </a:xfrm>
-          <a:prstGeom prst="rect">
-            <a:avLst/>
-          </a:prstGeom>
-          <a:noFill/>
-        </p:spPr>
-        <p:txBody>
-          <a:bodyPr wrap="square">
-            <a:spAutoFit/>
-          </a:bodyPr>
-          <a:lstStyle/>
-          <a:p>
-            <a:pPr algn="ctr"/>
-            <a:r>
-              <a:rPr sz="900" b="1">
-                <a:solidFill>
-                  <a:srgbClr val="FFFFFF"/>
-                </a:solidFill>
-              </a:rPr>
-              <a:t>5/10</a:t>
-            </a:r>
-          </a:p>
-        </p:txBody>
-      </p:sp>
-      <p:sp>
-        <p:nvSpPr>
-          <p:cNvPr id="29" name="TextBox 28"/>
-          <p:cNvSpPr txBox="1"/>
-          <p:nvPr/>
-        </p:nvSpPr>
-        <p:spPr>
-          <a:xfrm>
-            <a:off x="457200" y="5129784"/>
-            <a:ext cx="7498080" cy="347472"/>
-          </a:xfrm>
-          <a:prstGeom prst="rect">
-            <a:avLst/>
-          </a:prstGeom>
-          <a:noFill/>
-        </p:spPr>
-        <p:txBody>
-          <a:bodyPr wrap="square">
-            <a:spAutoFit/>
-          </a:bodyPr>
-          <a:lstStyle/>
-          <a:p>
-            <a:pPr algn="l"/>
-            <a:r>
-              <a:rPr sz="1100" b="1">
-                <a:solidFill>
-                  <a:srgbClr val="212121"/>
-                </a:solidFill>
-              </a:rPr>
-              <a:t>UK Military Air Show Canceled Over Middle East War Uncertainty</a:t>
-            </a:r>
-          </a:p>
-        </p:txBody>
-      </p:sp>
-      <p:sp>
-        <p:nvSpPr>
-          <p:cNvPr id="30" name="TextBox 29"/>
-          <p:cNvSpPr txBox="1"/>
-          <p:nvPr/>
-        </p:nvSpPr>
-        <p:spPr>
-          <a:xfrm>
-            <a:off x="457200" y="5477256"/>
-            <a:ext cx="8321040" cy="502920"/>
-          </a:xfrm>
-          <a:prstGeom prst="rect">
-            <a:avLst/>
-          </a:prstGeom>
-          <a:noFill/>
-        </p:spPr>
-        <p:txBody>
-          <a:bodyPr wrap="square">
-            <a:spAutoFit/>
-          </a:bodyPr>
-          <a:lstStyle/>
-          <a:p>
-            <a:pPr algn="l"/>
-            <a:r>
-              <a:rPr sz="900" b="0">
-                <a:solidFill>
-                  <a:srgbClr val="757575"/>
-                </a:solidFill>
-              </a:rPr>
-              <a:t>The Royal International Air Tattoo at RAF Fairford, the UK’s biggest military air show, has been canceled this summer because US aircraft are using the venue fo…</a:t>
+              <a:t>Ken Griffin, one of the biggest political donors in recent election cycles, has made his first federal contribution for the 2026 midterm races.</a:t>
             </a:r>
           </a:p>
         </p:txBody>

--- a/newsletter_20260522.pptx
+++ b/newsletter_20260522.pptx
@@ -4221,7 +4221,7 @@
                   <a:srgbClr val="212121"/>
                 </a:solidFill>
               </a:rPr>
-              <a:t>Trump Tells Warsh to 'Do Your Own Thing' at Fed</a:t>
+              <a:t>Kevin Warsh Sworn In as 17th Federal Reserve Chair</a:t>
             </a:r>
           </a:p>
         </p:txBody>
@@ -4284,7 +4284,7 @@
             <a:avLst/>
           </a:prstGeom>
           <a:solidFill>
-            <a:srgbClr val="E65C00"/>
+            <a:srgbClr val="2E7D32"/>
           </a:solidFill>
           <a:ln>
             <a:noFill/>
@@ -4341,7 +4341,7 @@
                   <a:srgbClr val="FFFFFF"/>
                 </a:solidFill>
               </a:rPr>
-              <a:t>7</a:t>
+              <a:t>5</a:t>
             </a:r>
           </a:p>
         </p:txBody>
@@ -4409,7 +4409,7 @@
                   <a:srgbClr val="212121"/>
                 </a:solidFill>
               </a:rPr>
-              <a:t>Ken Griffin Gives $5 Million to GOP in First Midterm Donation</a:t>
+              <a:t>Progress in Iran Talks Undercut Over Uranium, Tolls</a:t>
             </a:r>
           </a:p>
         </p:txBody>
@@ -4597,7 +4597,7 @@
                   <a:srgbClr val="212121"/>
                 </a:solidFill>
               </a:rPr>
-              <a:t>What Turkey’s PoliticalDrama Means forErdogan and Markets</a:t>
+              <a:t>Iran Says US’s Latest Proposal Has ‘Narrowed the Gaps’</a:t>
             </a:r>
           </a:p>
         </p:txBody>
@@ -4763,7 +4763,7 @@
             <a:avLst/>
           </a:prstGeom>
           <a:solidFill>
-            <a:srgbClr val="E65C00"/>
+            <a:srgbClr val="2E7D32"/>
           </a:solidFill>
           <a:ln>
             <a:noFill/>
@@ -4801,6 +4801,228 @@
           <a:xfrm>
             <a:off x="8138160" y="1097280"/>
             <a:ext cx="640080" cy="274320"/>
+          </a:xfrm>
+          <a:prstGeom prst="rect">
+            <a:avLst/>
+          </a:prstGeom>
+          <a:solidFill>
+            <a:srgbClr val="2E7D32"/>
+          </a:solidFill>
+          <a:ln>
+            <a:noFill/>
+          </a:ln>
+        </p:spPr>
+        <p:style>
+          <a:lnRef idx="1">
+            <a:schemeClr val="accent1"/>
+          </a:lnRef>
+          <a:fillRef idx="3">
+            <a:schemeClr val="accent1"/>
+          </a:fillRef>
+          <a:effectRef idx="2">
+            <a:schemeClr val="accent1"/>
+          </a:effectRef>
+          <a:fontRef idx="minor">
+            <a:schemeClr val="lt1"/>
+          </a:fontRef>
+        </p:style>
+        <p:txBody>
+          <a:bodyPr rtlCol="0" anchor="ctr"/>
+          <a:lstStyle/>
+          <a:p>
+            <a:pPr algn="ctr"/>
+          </a:p>
+        </p:txBody>
+      </p:sp>
+      <p:sp>
+        <p:nvSpPr>
+          <p:cNvPr id="7" name="TextBox 6"/>
+          <p:cNvSpPr txBox="1"/>
+          <p:nvPr/>
+        </p:nvSpPr>
+        <p:spPr>
+          <a:xfrm>
+            <a:off x="8138160" y="1097280"/>
+            <a:ext cx="640080" cy="274320"/>
+          </a:xfrm>
+          <a:prstGeom prst="rect">
+            <a:avLst/>
+          </a:prstGeom>
+          <a:noFill/>
+        </p:spPr>
+        <p:txBody>
+          <a:bodyPr wrap="square">
+            <a:spAutoFit/>
+          </a:bodyPr>
+          <a:lstStyle/>
+          <a:p>
+            <a:pPr algn="ctr"/>
+            <a:r>
+              <a:rPr sz="900" b="1">
+                <a:solidFill>
+                  <a:srgbClr val="FFFFFF"/>
+                </a:solidFill>
+              </a:rPr>
+              <a:t>5/10</a:t>
+            </a:r>
+          </a:p>
+        </p:txBody>
+      </p:sp>
+      <p:sp>
+        <p:nvSpPr>
+          <p:cNvPr id="8" name="TextBox 7"/>
+          <p:cNvSpPr txBox="1"/>
+          <p:nvPr/>
+        </p:nvSpPr>
+        <p:spPr>
+          <a:xfrm>
+            <a:off x="457200" y="1097280"/>
+            <a:ext cx="7498080" cy="347472"/>
+          </a:xfrm>
+          <a:prstGeom prst="rect">
+            <a:avLst/>
+          </a:prstGeom>
+          <a:noFill/>
+        </p:spPr>
+        <p:txBody>
+          <a:bodyPr wrap="square">
+            <a:spAutoFit/>
+          </a:bodyPr>
+          <a:lstStyle/>
+          <a:p>
+            <a:pPr algn="l"/>
+            <a:r>
+              <a:rPr sz="1100" b="1">
+                <a:solidFill>
+                  <a:srgbClr val="212121"/>
+                </a:solidFill>
+              </a:rPr>
+              <a:t>Progress in Iran Talks Undercut Over Uranium, Tolls</a:t>
+            </a:r>
+          </a:p>
+        </p:txBody>
+      </p:sp>
+      <p:sp>
+        <p:nvSpPr>
+          <p:cNvPr id="9" name="TextBox 8"/>
+          <p:cNvSpPr txBox="1"/>
+          <p:nvPr/>
+        </p:nvSpPr>
+        <p:spPr>
+          <a:xfrm>
+            <a:off x="457200" y="1444752"/>
+            <a:ext cx="8321040" cy="502920"/>
+          </a:xfrm>
+          <a:prstGeom prst="rect">
+            <a:avLst/>
+          </a:prstGeom>
+          <a:noFill/>
+        </p:spPr>
+        <p:txBody>
+          <a:bodyPr wrap="square">
+            <a:spAutoFit/>
+          </a:bodyPr>
+          <a:lstStyle/>
+          <a:p>
+            <a:pPr algn="l"/>
+            <a:r>
+              <a:rPr sz="900" b="0">
+                <a:solidFill>
+                  <a:srgbClr val="757575"/>
+                </a:solidFill>
+              </a:rPr>
+              <a:t>Iran said the latest proposal from the US partly bridged the gap between the warring sides, but comments from the Islamic Republic’s supreme leader about keepin…</a:t>
+            </a:r>
+          </a:p>
+        </p:txBody>
+      </p:sp>
+      <p:sp>
+        <p:nvSpPr>
+          <p:cNvPr id="10" name="TextBox 9"/>
+          <p:cNvSpPr txBox="1"/>
+          <p:nvPr/>
+        </p:nvSpPr>
+        <p:spPr>
+          <a:xfrm>
+            <a:off x="457200" y="1965960"/>
+            <a:ext cx="3657600" cy="228600"/>
+          </a:xfrm>
+          <a:prstGeom prst="rect">
+            <a:avLst/>
+          </a:prstGeom>
+          <a:noFill/>
+        </p:spPr>
+        <p:txBody>
+          <a:bodyPr wrap="square">
+            <a:spAutoFit/>
+          </a:bodyPr>
+          <a:lstStyle/>
+          <a:p>
+            <a:pPr algn="l"/>
+            <a:r>
+              <a:rPr sz="800" b="0">
+                <a:solidFill>
+                  <a:srgbClr val="757575"/>
+                </a:solidFill>
+              </a:rPr>
+              <a:t>📰 feeds.bloomberg.com</a:t>
+            </a:r>
+          </a:p>
+        </p:txBody>
+      </p:sp>
+      <p:sp>
+        <p:nvSpPr>
+          <p:cNvPr id="11" name="Rectangle 10"/>
+          <p:cNvSpPr/>
+          <p:nvPr/>
+        </p:nvSpPr>
+        <p:spPr>
+          <a:xfrm>
+            <a:off x="274320" y="2350008"/>
+            <a:ext cx="8595360" cy="1234440"/>
+          </a:xfrm>
+          <a:prstGeom prst="rect">
+            <a:avLst/>
+          </a:prstGeom>
+          <a:solidFill>
+            <a:srgbClr val="FFFFFF"/>
+          </a:solidFill>
+          <a:ln>
+            <a:noFill/>
+          </a:ln>
+        </p:spPr>
+        <p:style>
+          <a:lnRef idx="1">
+            <a:schemeClr val="accent1"/>
+          </a:lnRef>
+          <a:fillRef idx="3">
+            <a:schemeClr val="accent1"/>
+          </a:fillRef>
+          <a:effectRef idx="2">
+            <a:schemeClr val="accent1"/>
+          </a:effectRef>
+          <a:fontRef idx="minor">
+            <a:schemeClr val="lt1"/>
+          </a:fontRef>
+        </p:style>
+        <p:txBody>
+          <a:bodyPr rtlCol="0" anchor="ctr"/>
+          <a:lstStyle/>
+          <a:p>
+            <a:pPr algn="ctr"/>
+          </a:p>
+        </p:txBody>
+      </p:sp>
+      <p:sp>
+        <p:nvSpPr>
+          <p:cNvPr id="12" name="Rectangle 11"/>
+          <p:cNvSpPr/>
+          <p:nvPr/>
+        </p:nvSpPr>
+        <p:spPr>
+          <a:xfrm>
+            <a:off x="274320" y="2350008"/>
+            <a:ext cx="54864" cy="1234440"/>
           </a:xfrm>
           <a:prstGeom prst="rect">
             <a:avLst/>
@@ -4836,13 +5058,56 @@
       </p:sp>
       <p:sp>
         <p:nvSpPr>
-          <p:cNvPr id="7" name="TextBox 6"/>
+          <p:cNvPr id="13" name="Rectangle 12"/>
+          <p:cNvSpPr/>
+          <p:nvPr/>
+        </p:nvSpPr>
+        <p:spPr>
+          <a:xfrm>
+            <a:off x="8138160" y="2441448"/>
+            <a:ext cx="640080" cy="274320"/>
+          </a:xfrm>
+          <a:prstGeom prst="rect">
+            <a:avLst/>
+          </a:prstGeom>
+          <a:solidFill>
+            <a:srgbClr val="E65C00"/>
+          </a:solidFill>
+          <a:ln>
+            <a:noFill/>
+          </a:ln>
+        </p:spPr>
+        <p:style>
+          <a:lnRef idx="1">
+            <a:schemeClr val="accent1"/>
+          </a:lnRef>
+          <a:fillRef idx="3">
+            <a:schemeClr val="accent1"/>
+          </a:fillRef>
+          <a:effectRef idx="2">
+            <a:schemeClr val="accent1"/>
+          </a:effectRef>
+          <a:fontRef idx="minor">
+            <a:schemeClr val="lt1"/>
+          </a:fontRef>
+        </p:style>
+        <p:txBody>
+          <a:bodyPr rtlCol="0" anchor="ctr"/>
+          <a:lstStyle/>
+          <a:p>
+            <a:pPr algn="ctr"/>
+          </a:p>
+        </p:txBody>
+      </p:sp>
+      <p:sp>
+        <p:nvSpPr>
+          <p:cNvPr id="14" name="TextBox 13"/>
           <p:cNvSpPr txBox="1"/>
           <p:nvPr/>
         </p:nvSpPr>
         <p:spPr>
           <a:xfrm>
-            <a:off x="8138160" y="1097280"/>
+            <a:off x="8138160" y="2441448"/>
             <a:ext cx="640080" cy="274320"/>
           </a:xfrm>
           <a:prstGeom prst="rect">
@@ -4870,13 +5135,13 @@
       </p:sp>
       <p:sp>
         <p:nvSpPr>
-          <p:cNvPr id="8" name="TextBox 7"/>
+          <p:cNvPr id="15" name="TextBox 14"/>
           <p:cNvSpPr txBox="1"/>
           <p:nvPr/>
         </p:nvSpPr>
         <p:spPr>
           <a:xfrm>
-            <a:off x="457200" y="1097280"/>
+            <a:off x="457200" y="2441448"/>
             <a:ext cx="7498080" cy="347472"/>
           </a:xfrm>
           <a:prstGeom prst="rect">
@@ -4897,20 +5162,20 @@
                   <a:srgbClr val="212121"/>
                 </a:solidFill>
               </a:rPr>
-              <a:t>Trump Tells Warsh to Do ‘Own Thing’ as Fed Chair Sworn In</a:t>
-            </a:r>
-          </a:p>
-        </p:txBody>
-      </p:sp>
-      <p:sp>
-        <p:nvSpPr>
-          <p:cNvPr id="9" name="TextBox 8"/>
+              <a:t>Kevin Warsh Sworn In as 17th Federal Reserve Chair</a:t>
+            </a:r>
+          </a:p>
+        </p:txBody>
+      </p:sp>
+      <p:sp>
+        <p:nvSpPr>
+          <p:cNvPr id="16" name="TextBox 15"/>
           <p:cNvSpPr txBox="1"/>
           <p:nvPr/>
         </p:nvSpPr>
         <p:spPr>
           <a:xfrm>
-            <a:off x="457200" y="1444752"/>
+            <a:off x="457200" y="2788920"/>
             <a:ext cx="8321040" cy="502920"/>
           </a:xfrm>
           <a:prstGeom prst="rect">
@@ -4931,20 +5196,20 @@
                   <a:srgbClr val="757575"/>
                 </a:solidFill>
               </a:rPr>
-              <a:t>President Donald Trump stressed that he wants Kevin Warsh to independently lead the Federal Reserve, as he looked to downplay investor concern that he would pre…</a:t>
-            </a:r>
-          </a:p>
-        </p:txBody>
-      </p:sp>
-      <p:sp>
-        <p:nvSpPr>
-          <p:cNvPr id="10" name="TextBox 9"/>
+              <a:t>Kevin Warsh was sworn into office as the 17th chair of the Fed, promising the biggest shakeup in decades at the US central bank, and takes over at a tense momen…</a:t>
+            </a:r>
+          </a:p>
+        </p:txBody>
+      </p:sp>
+      <p:sp>
+        <p:nvSpPr>
+          <p:cNvPr id="17" name="TextBox 16"/>
           <p:cNvSpPr txBox="1"/>
           <p:nvPr/>
         </p:nvSpPr>
         <p:spPr>
           <a:xfrm>
-            <a:off x="457200" y="1965960"/>
+            <a:off x="457200" y="3310128"/>
             <a:ext cx="3657600" cy="228600"/>
           </a:xfrm>
           <a:prstGeom prst="rect">
@@ -4972,13 +5237,13 @@
       </p:sp>
       <p:sp>
         <p:nvSpPr>
-          <p:cNvPr id="11" name="Rectangle 10"/>
+          <p:cNvPr id="18" name="Rectangle 17"/>
           <p:cNvSpPr/>
           <p:nvPr/>
         </p:nvSpPr>
         <p:spPr>
           <a:xfrm>
-            <a:off x="274320" y="2350008"/>
+            <a:off x="274320" y="3694176"/>
             <a:ext cx="8595360" cy="1234440"/>
           </a:xfrm>
           <a:prstGeom prst="rect">
@@ -5015,13 +5280,278 @@
       </p:sp>
       <p:sp>
         <p:nvSpPr>
-          <p:cNvPr id="12" name="Rectangle 11"/>
+          <p:cNvPr id="19" name="Rectangle 18"/>
           <p:cNvSpPr/>
           <p:nvPr/>
         </p:nvSpPr>
         <p:spPr>
           <a:xfrm>
-            <a:off x="274320" y="2350008"/>
+            <a:off x="274320" y="3694176"/>
+            <a:ext cx="54864" cy="1234440"/>
+          </a:xfrm>
+          <a:prstGeom prst="rect">
+            <a:avLst/>
+          </a:prstGeom>
+          <a:solidFill>
+            <a:srgbClr val="2E7D32"/>
+          </a:solidFill>
+          <a:ln>
+            <a:noFill/>
+          </a:ln>
+        </p:spPr>
+        <p:style>
+          <a:lnRef idx="1">
+            <a:schemeClr val="accent1"/>
+          </a:lnRef>
+          <a:fillRef idx="3">
+            <a:schemeClr val="accent1"/>
+          </a:fillRef>
+          <a:effectRef idx="2">
+            <a:schemeClr val="accent1"/>
+          </a:effectRef>
+          <a:fontRef idx="minor">
+            <a:schemeClr val="lt1"/>
+          </a:fontRef>
+        </p:style>
+        <p:txBody>
+          <a:bodyPr rtlCol="0" anchor="ctr"/>
+          <a:lstStyle/>
+          <a:p>
+            <a:pPr algn="ctr"/>
+          </a:p>
+        </p:txBody>
+      </p:sp>
+      <p:sp>
+        <p:nvSpPr>
+          <p:cNvPr id="20" name="Rectangle 19"/>
+          <p:cNvSpPr/>
+          <p:nvPr/>
+        </p:nvSpPr>
+        <p:spPr>
+          <a:xfrm>
+            <a:off x="8138160" y="3785616"/>
+            <a:ext cx="640080" cy="274320"/>
+          </a:xfrm>
+          <a:prstGeom prst="rect">
+            <a:avLst/>
+          </a:prstGeom>
+          <a:solidFill>
+            <a:srgbClr val="2E7D32"/>
+          </a:solidFill>
+          <a:ln>
+            <a:noFill/>
+          </a:ln>
+        </p:spPr>
+        <p:style>
+          <a:lnRef idx="1">
+            <a:schemeClr val="accent1"/>
+          </a:lnRef>
+          <a:fillRef idx="3">
+            <a:schemeClr val="accent1"/>
+          </a:fillRef>
+          <a:effectRef idx="2">
+            <a:schemeClr val="accent1"/>
+          </a:effectRef>
+          <a:fontRef idx="minor">
+            <a:schemeClr val="lt1"/>
+          </a:fontRef>
+        </p:style>
+        <p:txBody>
+          <a:bodyPr rtlCol="0" anchor="ctr"/>
+          <a:lstStyle/>
+          <a:p>
+            <a:pPr algn="ctr"/>
+          </a:p>
+        </p:txBody>
+      </p:sp>
+      <p:sp>
+        <p:nvSpPr>
+          <p:cNvPr id="21" name="TextBox 20"/>
+          <p:cNvSpPr txBox="1"/>
+          <p:nvPr/>
+        </p:nvSpPr>
+        <p:spPr>
+          <a:xfrm>
+            <a:off x="8138160" y="3785616"/>
+            <a:ext cx="640080" cy="274320"/>
+          </a:xfrm>
+          <a:prstGeom prst="rect">
+            <a:avLst/>
+          </a:prstGeom>
+          <a:noFill/>
+        </p:spPr>
+        <p:txBody>
+          <a:bodyPr wrap="square">
+            <a:spAutoFit/>
+          </a:bodyPr>
+          <a:lstStyle/>
+          <a:p>
+            <a:pPr algn="ctr"/>
+            <a:r>
+              <a:rPr sz="900" b="1">
+                <a:solidFill>
+                  <a:srgbClr val="FFFFFF"/>
+                </a:solidFill>
+              </a:rPr>
+              <a:t>5/10</a:t>
+            </a:r>
+          </a:p>
+        </p:txBody>
+      </p:sp>
+      <p:sp>
+        <p:nvSpPr>
+          <p:cNvPr id="22" name="TextBox 21"/>
+          <p:cNvSpPr txBox="1"/>
+          <p:nvPr/>
+        </p:nvSpPr>
+        <p:spPr>
+          <a:xfrm>
+            <a:off x="457200" y="3785616"/>
+            <a:ext cx="7498080" cy="347472"/>
+          </a:xfrm>
+          <a:prstGeom prst="rect">
+            <a:avLst/>
+          </a:prstGeom>
+          <a:noFill/>
+        </p:spPr>
+        <p:txBody>
+          <a:bodyPr wrap="square">
+            <a:spAutoFit/>
+          </a:bodyPr>
+          <a:lstStyle/>
+          <a:p>
+            <a:pPr algn="l"/>
+            <a:r>
+              <a:rPr sz="1100" b="1">
+                <a:solidFill>
+                  <a:srgbClr val="212121"/>
+                </a:solidFill>
+              </a:rPr>
+              <a:t>Iran Says US’s Latest Proposal Has ‘Narrowed the Gaps’</a:t>
+            </a:r>
+          </a:p>
+        </p:txBody>
+      </p:sp>
+      <p:sp>
+        <p:nvSpPr>
+          <p:cNvPr id="23" name="TextBox 22"/>
+          <p:cNvSpPr txBox="1"/>
+          <p:nvPr/>
+        </p:nvSpPr>
+        <p:spPr>
+          <a:xfrm>
+            <a:off x="457200" y="4133088"/>
+            <a:ext cx="8321040" cy="502920"/>
+          </a:xfrm>
+          <a:prstGeom prst="rect">
+            <a:avLst/>
+          </a:prstGeom>
+          <a:noFill/>
+        </p:spPr>
+        <p:txBody>
+          <a:bodyPr wrap="square">
+            <a:spAutoFit/>
+          </a:bodyPr>
+          <a:lstStyle/>
+          <a:p>
+            <a:pPr algn="l"/>
+            <a:r>
+              <a:rPr sz="900" b="0">
+                <a:solidFill>
+                  <a:srgbClr val="757575"/>
+                </a:solidFill>
+              </a:rPr>
+              <a:t>Iran said the latest proposal from the US has partly bridged the gap between the warring sides, as they seek to turn a fragile ceasefire into a peace deal.</a:t>
+            </a:r>
+          </a:p>
+        </p:txBody>
+      </p:sp>
+      <p:sp>
+        <p:nvSpPr>
+          <p:cNvPr id="24" name="TextBox 23"/>
+          <p:cNvSpPr txBox="1"/>
+          <p:nvPr/>
+        </p:nvSpPr>
+        <p:spPr>
+          <a:xfrm>
+            <a:off x="457200" y="4654296"/>
+            <a:ext cx="3657600" cy="228600"/>
+          </a:xfrm>
+          <a:prstGeom prst="rect">
+            <a:avLst/>
+          </a:prstGeom>
+          <a:noFill/>
+        </p:spPr>
+        <p:txBody>
+          <a:bodyPr wrap="square">
+            <a:spAutoFit/>
+          </a:bodyPr>
+          <a:lstStyle/>
+          <a:p>
+            <a:pPr algn="l"/>
+            <a:r>
+              <a:rPr sz="800" b="0">
+                <a:solidFill>
+                  <a:srgbClr val="757575"/>
+                </a:solidFill>
+              </a:rPr>
+              <a:t>📰 feeds.bloomberg.com</a:t>
+            </a:r>
+          </a:p>
+        </p:txBody>
+      </p:sp>
+      <p:sp>
+        <p:nvSpPr>
+          <p:cNvPr id="25" name="Rectangle 24"/>
+          <p:cNvSpPr/>
+          <p:nvPr/>
+        </p:nvSpPr>
+        <p:spPr>
+          <a:xfrm>
+            <a:off x="274320" y="5038344"/>
+            <a:ext cx="8595360" cy="1234440"/>
+          </a:xfrm>
+          <a:prstGeom prst="rect">
+            <a:avLst/>
+          </a:prstGeom>
+          <a:solidFill>
+            <a:srgbClr val="FFFFFF"/>
+          </a:solidFill>
+          <a:ln>
+            <a:noFill/>
+          </a:ln>
+        </p:spPr>
+        <p:style>
+          <a:lnRef idx="1">
+            <a:schemeClr val="accent1"/>
+          </a:lnRef>
+          <a:fillRef idx="3">
+            <a:schemeClr val="accent1"/>
+          </a:fillRef>
+          <a:effectRef idx="2">
+            <a:schemeClr val="accent1"/>
+          </a:effectRef>
+          <a:fontRef idx="minor">
+            <a:schemeClr val="lt1"/>
+          </a:fontRef>
+        </p:style>
+        <p:txBody>
+          <a:bodyPr rtlCol="0" anchor="ctr"/>
+          <a:lstStyle/>
+          <a:p>
+            <a:pPr algn="ctr"/>
+          </a:p>
+        </p:txBody>
+      </p:sp>
+      <p:sp>
+        <p:nvSpPr>
+          <p:cNvPr id="26" name="Rectangle 25"/>
+          <p:cNvSpPr/>
+          <p:nvPr/>
+        </p:nvSpPr>
+        <p:spPr>
+          <a:xfrm>
+            <a:off x="274320" y="5038344"/>
             <a:ext cx="54864" cy="1234440"/>
           </a:xfrm>
           <a:prstGeom prst="rect">
@@ -5058,13 +5588,13 @@
       </p:sp>
       <p:sp>
         <p:nvSpPr>
-          <p:cNvPr id="13" name="Rectangle 12"/>
+          <p:cNvPr id="27" name="Rectangle 26"/>
           <p:cNvSpPr/>
           <p:nvPr/>
         </p:nvSpPr>
         <p:spPr>
           <a:xfrm>
-            <a:off x="8138160" y="2441448"/>
+            <a:off x="8138160" y="5129784"/>
             <a:ext cx="640080" cy="274320"/>
           </a:xfrm>
           <a:prstGeom prst="rect">
@@ -5101,13 +5631,13 @@
       </p:sp>
       <p:sp>
         <p:nvSpPr>
-          <p:cNvPr id="14" name="TextBox 13"/>
+          <p:cNvPr id="28" name="TextBox 27"/>
           <p:cNvSpPr txBox="1"/>
           <p:nvPr/>
         </p:nvSpPr>
         <p:spPr>
           <a:xfrm>
-            <a:off x="8138160" y="2441448"/>
+            <a:off x="8138160" y="5129784"/>
             <a:ext cx="640080" cy="274320"/>
           </a:xfrm>
           <a:prstGeom prst="rect">
@@ -5135,13 +5665,13 @@
       </p:sp>
       <p:sp>
         <p:nvSpPr>
-          <p:cNvPr id="15" name="TextBox 14"/>
+          <p:cNvPr id="29" name="TextBox 28"/>
           <p:cNvSpPr txBox="1"/>
           <p:nvPr/>
         </p:nvSpPr>
         <p:spPr>
           <a:xfrm>
-            <a:off x="457200" y="2441448"/>
+            <a:off x="457200" y="5129784"/>
             <a:ext cx="7498080" cy="347472"/>
           </a:xfrm>
           <a:prstGeom prst="rect">
@@ -5162,20 +5692,20 @@
                   <a:srgbClr val="212121"/>
                 </a:solidFill>
               </a:rPr>
-              <a:t>Trump Tells Warsh to 'Do Your Own Thing' at Fed</a:t>
-            </a:r>
-          </a:p>
-        </p:txBody>
-      </p:sp>
-      <p:sp>
-        <p:nvSpPr>
-          <p:cNvPr id="16" name="TextBox 15"/>
+              <a:t>Trump Tells Warsh to Do ‘Own Thing’ as Fed Chair Sworn In</a:t>
+            </a:r>
+          </a:p>
+        </p:txBody>
+      </p:sp>
+      <p:sp>
+        <p:nvSpPr>
+          <p:cNvPr id="30" name="TextBox 29"/>
           <p:cNvSpPr txBox="1"/>
           <p:nvPr/>
         </p:nvSpPr>
         <p:spPr>
           <a:xfrm>
-            <a:off x="457200" y="2788920"/>
+            <a:off x="457200" y="5477256"/>
             <a:ext cx="8321040" cy="502920"/>
           </a:xfrm>
           <a:prstGeom prst="rect">
@@ -5196,537 +5726,7 @@
                   <a:srgbClr val="757575"/>
                 </a:solidFill>
               </a:rPr>
-              <a:t>President Donald Trump says no one in the US is better prepared to lead the Federal Reserve than Kevin Warsh as he swears Warsh in at the White House as the 17t…</a:t>
-            </a:r>
-          </a:p>
-        </p:txBody>
-      </p:sp>
-      <p:sp>
-        <p:nvSpPr>
-          <p:cNvPr id="17" name="TextBox 16"/>
-          <p:cNvSpPr txBox="1"/>
-          <p:nvPr/>
-        </p:nvSpPr>
-        <p:spPr>
-          <a:xfrm>
-            <a:off x="457200" y="3310128"/>
-            <a:ext cx="3657600" cy="228600"/>
-          </a:xfrm>
-          <a:prstGeom prst="rect">
-            <a:avLst/>
-          </a:prstGeom>
-          <a:noFill/>
-        </p:spPr>
-        <p:txBody>
-          <a:bodyPr wrap="square">
-            <a:spAutoFit/>
-          </a:bodyPr>
-          <a:lstStyle/>
-          <a:p>
-            <a:pPr algn="l"/>
-            <a:r>
-              <a:rPr sz="800" b="0">
-                <a:solidFill>
-                  <a:srgbClr val="757575"/>
-                </a:solidFill>
-              </a:rPr>
-              <a:t>📰 feeds.bloomberg.com</a:t>
-            </a:r>
-          </a:p>
-        </p:txBody>
-      </p:sp>
-      <p:sp>
-        <p:nvSpPr>
-          <p:cNvPr id="18" name="Rectangle 17"/>
-          <p:cNvSpPr/>
-          <p:nvPr/>
-        </p:nvSpPr>
-        <p:spPr>
-          <a:xfrm>
-            <a:off x="274320" y="3694176"/>
-            <a:ext cx="8595360" cy="1234440"/>
-          </a:xfrm>
-          <a:prstGeom prst="rect">
-            <a:avLst/>
-          </a:prstGeom>
-          <a:solidFill>
-            <a:srgbClr val="FFFFFF"/>
-          </a:solidFill>
-          <a:ln>
-            <a:noFill/>
-          </a:ln>
-        </p:spPr>
-        <p:style>
-          <a:lnRef idx="1">
-            <a:schemeClr val="accent1"/>
-          </a:lnRef>
-          <a:fillRef idx="3">
-            <a:schemeClr val="accent1"/>
-          </a:fillRef>
-          <a:effectRef idx="2">
-            <a:schemeClr val="accent1"/>
-          </a:effectRef>
-          <a:fontRef idx="minor">
-            <a:schemeClr val="lt1"/>
-          </a:fontRef>
-        </p:style>
-        <p:txBody>
-          <a:bodyPr rtlCol="0" anchor="ctr"/>
-          <a:lstStyle/>
-          <a:p>
-            <a:pPr algn="ctr"/>
-          </a:p>
-        </p:txBody>
-      </p:sp>
-      <p:sp>
-        <p:nvSpPr>
-          <p:cNvPr id="19" name="Rectangle 18"/>
-          <p:cNvSpPr/>
-          <p:nvPr/>
-        </p:nvSpPr>
-        <p:spPr>
-          <a:xfrm>
-            <a:off x="274320" y="3694176"/>
-            <a:ext cx="54864" cy="1234440"/>
-          </a:xfrm>
-          <a:prstGeom prst="rect">
-            <a:avLst/>
-          </a:prstGeom>
-          <a:solidFill>
-            <a:srgbClr val="2E7D32"/>
-          </a:solidFill>
-          <a:ln>
-            <a:noFill/>
-          </a:ln>
-        </p:spPr>
-        <p:style>
-          <a:lnRef idx="1">
-            <a:schemeClr val="accent1"/>
-          </a:lnRef>
-          <a:fillRef idx="3">
-            <a:schemeClr val="accent1"/>
-          </a:fillRef>
-          <a:effectRef idx="2">
-            <a:schemeClr val="accent1"/>
-          </a:effectRef>
-          <a:fontRef idx="minor">
-            <a:schemeClr val="lt1"/>
-          </a:fontRef>
-        </p:style>
-        <p:txBody>
-          <a:bodyPr rtlCol="0" anchor="ctr"/>
-          <a:lstStyle/>
-          <a:p>
-            <a:pPr algn="ctr"/>
-          </a:p>
-        </p:txBody>
-      </p:sp>
-      <p:sp>
-        <p:nvSpPr>
-          <p:cNvPr id="20" name="Rectangle 19"/>
-          <p:cNvSpPr/>
-          <p:nvPr/>
-        </p:nvSpPr>
-        <p:spPr>
-          <a:xfrm>
-            <a:off x="8138160" y="3785616"/>
-            <a:ext cx="640080" cy="274320"/>
-          </a:xfrm>
-          <a:prstGeom prst="rect">
-            <a:avLst/>
-          </a:prstGeom>
-          <a:solidFill>
-            <a:srgbClr val="2E7D32"/>
-          </a:solidFill>
-          <a:ln>
-            <a:noFill/>
-          </a:ln>
-        </p:spPr>
-        <p:style>
-          <a:lnRef idx="1">
-            <a:schemeClr val="accent1"/>
-          </a:lnRef>
-          <a:fillRef idx="3">
-            <a:schemeClr val="accent1"/>
-          </a:fillRef>
-          <a:effectRef idx="2">
-            <a:schemeClr val="accent1"/>
-          </a:effectRef>
-          <a:fontRef idx="minor">
-            <a:schemeClr val="lt1"/>
-          </a:fontRef>
-        </p:style>
-        <p:txBody>
-          <a:bodyPr rtlCol="0" anchor="ctr"/>
-          <a:lstStyle/>
-          <a:p>
-            <a:pPr algn="ctr"/>
-          </a:p>
-        </p:txBody>
-      </p:sp>
-      <p:sp>
-        <p:nvSpPr>
-          <p:cNvPr id="21" name="TextBox 20"/>
-          <p:cNvSpPr txBox="1"/>
-          <p:nvPr/>
-        </p:nvSpPr>
-        <p:spPr>
-          <a:xfrm>
-            <a:off x="8138160" y="3785616"/>
-            <a:ext cx="640080" cy="274320"/>
-          </a:xfrm>
-          <a:prstGeom prst="rect">
-            <a:avLst/>
-          </a:prstGeom>
-          <a:noFill/>
-        </p:spPr>
-        <p:txBody>
-          <a:bodyPr wrap="square">
-            <a:spAutoFit/>
-          </a:bodyPr>
-          <a:lstStyle/>
-          <a:p>
-            <a:pPr algn="ctr"/>
-            <a:r>
-              <a:rPr sz="900" b="1">
-                <a:solidFill>
-                  <a:srgbClr val="FFFFFF"/>
-                </a:solidFill>
-              </a:rPr>
-              <a:t>5/10</a:t>
-            </a:r>
-          </a:p>
-        </p:txBody>
-      </p:sp>
-      <p:sp>
-        <p:nvSpPr>
-          <p:cNvPr id="22" name="TextBox 21"/>
-          <p:cNvSpPr txBox="1"/>
-          <p:nvPr/>
-        </p:nvSpPr>
-        <p:spPr>
-          <a:xfrm>
-            <a:off x="457200" y="3785616"/>
-            <a:ext cx="7498080" cy="347472"/>
-          </a:xfrm>
-          <a:prstGeom prst="rect">
-            <a:avLst/>
-          </a:prstGeom>
-          <a:noFill/>
-        </p:spPr>
-        <p:txBody>
-          <a:bodyPr wrap="square">
-            <a:spAutoFit/>
-          </a:bodyPr>
-          <a:lstStyle/>
-          <a:p>
-            <a:pPr algn="l"/>
-            <a:r>
-              <a:rPr sz="1100" b="1">
-                <a:solidFill>
-                  <a:srgbClr val="212121"/>
-                </a:solidFill>
-              </a:rPr>
-              <a:t>What Turkey’s PoliticalDrama Means forErdogan and Markets</a:t>
-            </a:r>
-          </a:p>
-        </p:txBody>
-      </p:sp>
-      <p:sp>
-        <p:nvSpPr>
-          <p:cNvPr id="23" name="TextBox 22"/>
-          <p:cNvSpPr txBox="1"/>
-          <p:nvPr/>
-        </p:nvSpPr>
-        <p:spPr>
-          <a:xfrm>
-            <a:off x="457200" y="4133088"/>
-            <a:ext cx="8321040" cy="502920"/>
-          </a:xfrm>
-          <a:prstGeom prst="rect">
-            <a:avLst/>
-          </a:prstGeom>
-          <a:noFill/>
-        </p:spPr>
-        <p:txBody>
-          <a:bodyPr wrap="square">
-            <a:spAutoFit/>
-          </a:bodyPr>
-          <a:lstStyle/>
-          <a:p>
-            <a:pPr algn="l"/>
-            <a:r>
-              <a:rPr sz="900" b="0">
-                <a:solidFill>
-                  <a:srgbClr val="757575"/>
-                </a:solidFill>
-              </a:rPr>
-              <a:t>A Turkish court decision to remove the leadership of the country’s main opposition party caused the main index to tumble to its lowest in six weeks, then revers…</a:t>
-            </a:r>
-          </a:p>
-        </p:txBody>
-      </p:sp>
-      <p:sp>
-        <p:nvSpPr>
-          <p:cNvPr id="24" name="TextBox 23"/>
-          <p:cNvSpPr txBox="1"/>
-          <p:nvPr/>
-        </p:nvSpPr>
-        <p:spPr>
-          <a:xfrm>
-            <a:off x="457200" y="4654296"/>
-            <a:ext cx="3657600" cy="228600"/>
-          </a:xfrm>
-          <a:prstGeom prst="rect">
-            <a:avLst/>
-          </a:prstGeom>
-          <a:noFill/>
-        </p:spPr>
-        <p:txBody>
-          <a:bodyPr wrap="square">
-            <a:spAutoFit/>
-          </a:bodyPr>
-          <a:lstStyle/>
-          <a:p>
-            <a:pPr algn="l"/>
-            <a:r>
-              <a:rPr sz="800" b="0">
-                <a:solidFill>
-                  <a:srgbClr val="757575"/>
-                </a:solidFill>
-              </a:rPr>
-              <a:t>📰 feeds.bloomberg.com</a:t>
-            </a:r>
-          </a:p>
-        </p:txBody>
-      </p:sp>
-      <p:sp>
-        <p:nvSpPr>
-          <p:cNvPr id="25" name="Rectangle 24"/>
-          <p:cNvSpPr/>
-          <p:nvPr/>
-        </p:nvSpPr>
-        <p:spPr>
-          <a:xfrm>
-            <a:off x="274320" y="5038344"/>
-            <a:ext cx="8595360" cy="1234440"/>
-          </a:xfrm>
-          <a:prstGeom prst="rect">
-            <a:avLst/>
-          </a:prstGeom>
-          <a:solidFill>
-            <a:srgbClr val="FFFFFF"/>
-          </a:solidFill>
-          <a:ln>
-            <a:noFill/>
-          </a:ln>
-        </p:spPr>
-        <p:style>
-          <a:lnRef idx="1">
-            <a:schemeClr val="accent1"/>
-          </a:lnRef>
-          <a:fillRef idx="3">
-            <a:schemeClr val="accent1"/>
-          </a:fillRef>
-          <a:effectRef idx="2">
-            <a:schemeClr val="accent1"/>
-          </a:effectRef>
-          <a:fontRef idx="minor">
-            <a:schemeClr val="lt1"/>
-          </a:fontRef>
-        </p:style>
-        <p:txBody>
-          <a:bodyPr rtlCol="0" anchor="ctr"/>
-          <a:lstStyle/>
-          <a:p>
-            <a:pPr algn="ctr"/>
-          </a:p>
-        </p:txBody>
-      </p:sp>
-      <p:sp>
-        <p:nvSpPr>
-          <p:cNvPr id="26" name="Rectangle 25"/>
-          <p:cNvSpPr/>
-          <p:nvPr/>
-        </p:nvSpPr>
-        <p:spPr>
-          <a:xfrm>
-            <a:off x="274320" y="5038344"/>
-            <a:ext cx="54864" cy="1234440"/>
-          </a:xfrm>
-          <a:prstGeom prst="rect">
-            <a:avLst/>
-          </a:prstGeom>
-          <a:solidFill>
-            <a:srgbClr val="E65C00"/>
-          </a:solidFill>
-          <a:ln>
-            <a:noFill/>
-          </a:ln>
-        </p:spPr>
-        <p:style>
-          <a:lnRef idx="1">
-            <a:schemeClr val="accent1"/>
-          </a:lnRef>
-          <a:fillRef idx="3">
-            <a:schemeClr val="accent1"/>
-          </a:fillRef>
-          <a:effectRef idx="2">
-            <a:schemeClr val="accent1"/>
-          </a:effectRef>
-          <a:fontRef idx="minor">
-            <a:schemeClr val="lt1"/>
-          </a:fontRef>
-        </p:style>
-        <p:txBody>
-          <a:bodyPr rtlCol="0" anchor="ctr"/>
-          <a:lstStyle/>
-          <a:p>
-            <a:pPr algn="ctr"/>
-          </a:p>
-        </p:txBody>
-      </p:sp>
-      <p:sp>
-        <p:nvSpPr>
-          <p:cNvPr id="27" name="Rectangle 26"/>
-          <p:cNvSpPr/>
-          <p:nvPr/>
-        </p:nvSpPr>
-        <p:spPr>
-          <a:xfrm>
-            <a:off x="8138160" y="5129784"/>
-            <a:ext cx="640080" cy="274320"/>
-          </a:xfrm>
-          <a:prstGeom prst="rect">
-            <a:avLst/>
-          </a:prstGeom>
-          <a:solidFill>
-            <a:srgbClr val="E65C00"/>
-          </a:solidFill>
-          <a:ln>
-            <a:noFill/>
-          </a:ln>
-        </p:spPr>
-        <p:style>
-          <a:lnRef idx="1">
-            <a:schemeClr val="accent1"/>
-          </a:lnRef>
-          <a:fillRef idx="3">
-            <a:schemeClr val="accent1"/>
-          </a:fillRef>
-          <a:effectRef idx="2">
-            <a:schemeClr val="accent1"/>
-          </a:effectRef>
-          <a:fontRef idx="minor">
-            <a:schemeClr val="lt1"/>
-          </a:fontRef>
-        </p:style>
-        <p:txBody>
-          <a:bodyPr rtlCol="0" anchor="ctr"/>
-          <a:lstStyle/>
-          <a:p>
-            <a:pPr algn="ctr"/>
-          </a:p>
-        </p:txBody>
-      </p:sp>
-      <p:sp>
-        <p:nvSpPr>
-          <p:cNvPr id="28" name="TextBox 27"/>
-          <p:cNvSpPr txBox="1"/>
-          <p:nvPr/>
-        </p:nvSpPr>
-        <p:spPr>
-          <a:xfrm>
-            <a:off x="8138160" y="5129784"/>
-            <a:ext cx="640080" cy="274320"/>
-          </a:xfrm>
-          <a:prstGeom prst="rect">
-            <a:avLst/>
-          </a:prstGeom>
-          <a:noFill/>
-        </p:spPr>
-        <p:txBody>
-          <a:bodyPr wrap="square">
-            <a:spAutoFit/>
-          </a:bodyPr>
-          <a:lstStyle/>
-          <a:p>
-            <a:pPr algn="ctr"/>
-            <a:r>
-              <a:rPr sz="900" b="1">
-                <a:solidFill>
-                  <a:srgbClr val="FFFFFF"/>
-                </a:solidFill>
-              </a:rPr>
-              <a:t>7/10</a:t>
-            </a:r>
-          </a:p>
-        </p:txBody>
-      </p:sp>
-      <p:sp>
-        <p:nvSpPr>
-          <p:cNvPr id="29" name="TextBox 28"/>
-          <p:cNvSpPr txBox="1"/>
-          <p:nvPr/>
-        </p:nvSpPr>
-        <p:spPr>
-          <a:xfrm>
-            <a:off x="457200" y="5129784"/>
-            <a:ext cx="7498080" cy="347472"/>
-          </a:xfrm>
-          <a:prstGeom prst="rect">
-            <a:avLst/>
-          </a:prstGeom>
-          <a:noFill/>
-        </p:spPr>
-        <p:txBody>
-          <a:bodyPr wrap="square">
-            <a:spAutoFit/>
-          </a:bodyPr>
-          <a:lstStyle/>
-          <a:p>
-            <a:pPr algn="l"/>
-            <a:r>
-              <a:rPr sz="1100" b="1">
-                <a:solidFill>
-                  <a:srgbClr val="212121"/>
-                </a:solidFill>
-              </a:rPr>
-              <a:t>Ken Griffin Gives $5 Million to GOP in First Midterm Donation</a:t>
-            </a:r>
-          </a:p>
-        </p:txBody>
-      </p:sp>
-      <p:sp>
-        <p:nvSpPr>
-          <p:cNvPr id="30" name="TextBox 29"/>
-          <p:cNvSpPr txBox="1"/>
-          <p:nvPr/>
-        </p:nvSpPr>
-        <p:spPr>
-          <a:xfrm>
-            <a:off x="457200" y="5477256"/>
-            <a:ext cx="8321040" cy="502920"/>
-          </a:xfrm>
-          <a:prstGeom prst="rect">
-            <a:avLst/>
-          </a:prstGeom>
-          <a:noFill/>
-        </p:spPr>
-        <p:txBody>
-          <a:bodyPr wrap="square">
-            <a:spAutoFit/>
-          </a:bodyPr>
-          <a:lstStyle/>
-          <a:p>
-            <a:pPr algn="l"/>
-            <a:r>
-              <a:rPr sz="900" b="0">
-                <a:solidFill>
-                  <a:srgbClr val="757575"/>
-                </a:solidFill>
-              </a:rPr>
-              <a:t>Ken Griffin, one of the biggest political donors in recent election cycles, has made his first federal contribution for the 2026 midterm races.</a:t>
+              <a:t>President Donald Trump stressed that he wants Kevin Warsh to independently lead the Federal Reserve, as he looked to downplay investor concern that he would pre…</a:t>
             </a:r>
           </a:p>
         </p:txBody>

--- a/newsletter_20260522.pptx
+++ b/newsletter_20260522.pptx
@@ -4033,7 +4033,7 @@
                   <a:srgbClr val="212121"/>
                 </a:solidFill>
               </a:rPr>
-              <a:t>Trump Tells Warsh to Do ‘Own Thing’ as Fed Chair Sworn In</a:t>
+              <a:t>Warsh Says He'll Lead a 'Reform-Oriented' Fed</a:t>
             </a:r>
           </a:p>
         </p:txBody>
@@ -4221,7 +4221,7 @@
                   <a:srgbClr val="212121"/>
                 </a:solidFill>
               </a:rPr>
-              <a:t>Kevin Warsh Sworn In as 17th Federal Reserve Chair</a:t>
+              <a:t>Trump Tells Warsh to Do ‘Own Thing’ as Fed Chair Sworn In</a:t>
             </a:r>
           </a:p>
         </p:txBody>
@@ -4284,7 +4284,7 @@
             <a:avLst/>
           </a:prstGeom>
           <a:solidFill>
-            <a:srgbClr val="2E7D32"/>
+            <a:srgbClr val="E65C00"/>
           </a:solidFill>
           <a:ln>
             <a:noFill/>
@@ -4341,7 +4341,7 @@
                   <a:srgbClr val="FFFFFF"/>
                 </a:solidFill>
               </a:rPr>
-              <a:t>5</a:t>
+              <a:t>7</a:t>
             </a:r>
           </a:p>
         </p:txBody>
@@ -4409,7 +4409,7 @@
                   <a:srgbClr val="212121"/>
                 </a:solidFill>
               </a:rPr>
-              <a:t>Progress in Iran Talks Undercut Over Uranium, Tolls</a:t>
+              <a:t>Kevin Warsh Sworn In as 17th Federal Reserve Chair</a:t>
             </a:r>
           </a:p>
         </p:txBody>
@@ -4597,7 +4597,7 @@
                   <a:srgbClr val="212121"/>
                 </a:solidFill>
               </a:rPr>
-              <a:t>Iran Says US’s Latest Proposal Has ‘Narrowed the Gaps’</a:t>
+              <a:t>Progress in Iran Talks Undercut Over Uranium, Tolls</a:t>
             </a:r>
           </a:p>
         </p:txBody>
@@ -4763,7 +4763,7 @@
             <a:avLst/>
           </a:prstGeom>
           <a:solidFill>
-            <a:srgbClr val="2E7D32"/>
+            <a:srgbClr val="E65C00"/>
           </a:solidFill>
           <a:ln>
             <a:noFill/>
@@ -4801,6 +4801,493 @@
           <a:xfrm>
             <a:off x="8138160" y="1097280"/>
             <a:ext cx="640080" cy="274320"/>
+          </a:xfrm>
+          <a:prstGeom prst="rect">
+            <a:avLst/>
+          </a:prstGeom>
+          <a:solidFill>
+            <a:srgbClr val="E65C00"/>
+          </a:solidFill>
+          <a:ln>
+            <a:noFill/>
+          </a:ln>
+        </p:spPr>
+        <p:style>
+          <a:lnRef idx="1">
+            <a:schemeClr val="accent1"/>
+          </a:lnRef>
+          <a:fillRef idx="3">
+            <a:schemeClr val="accent1"/>
+          </a:fillRef>
+          <a:effectRef idx="2">
+            <a:schemeClr val="accent1"/>
+          </a:effectRef>
+          <a:fontRef idx="minor">
+            <a:schemeClr val="lt1"/>
+          </a:fontRef>
+        </p:style>
+        <p:txBody>
+          <a:bodyPr rtlCol="0" anchor="ctr"/>
+          <a:lstStyle/>
+          <a:p>
+            <a:pPr algn="ctr"/>
+          </a:p>
+        </p:txBody>
+      </p:sp>
+      <p:sp>
+        <p:nvSpPr>
+          <p:cNvPr id="7" name="TextBox 6"/>
+          <p:cNvSpPr txBox="1"/>
+          <p:nvPr/>
+        </p:nvSpPr>
+        <p:spPr>
+          <a:xfrm>
+            <a:off x="8138160" y="1097280"/>
+            <a:ext cx="640080" cy="274320"/>
+          </a:xfrm>
+          <a:prstGeom prst="rect">
+            <a:avLst/>
+          </a:prstGeom>
+          <a:noFill/>
+        </p:spPr>
+        <p:txBody>
+          <a:bodyPr wrap="square">
+            <a:spAutoFit/>
+          </a:bodyPr>
+          <a:lstStyle/>
+          <a:p>
+            <a:pPr algn="ctr"/>
+            <a:r>
+              <a:rPr sz="900" b="1">
+                <a:solidFill>
+                  <a:srgbClr val="FFFFFF"/>
+                </a:solidFill>
+              </a:rPr>
+              <a:t>7/10</a:t>
+            </a:r>
+          </a:p>
+        </p:txBody>
+      </p:sp>
+      <p:sp>
+        <p:nvSpPr>
+          <p:cNvPr id="8" name="TextBox 7"/>
+          <p:cNvSpPr txBox="1"/>
+          <p:nvPr/>
+        </p:nvSpPr>
+        <p:spPr>
+          <a:xfrm>
+            <a:off x="457200" y="1097280"/>
+            <a:ext cx="7498080" cy="347472"/>
+          </a:xfrm>
+          <a:prstGeom prst="rect">
+            <a:avLst/>
+          </a:prstGeom>
+          <a:noFill/>
+        </p:spPr>
+        <p:txBody>
+          <a:bodyPr wrap="square">
+            <a:spAutoFit/>
+          </a:bodyPr>
+          <a:lstStyle/>
+          <a:p>
+            <a:pPr algn="l"/>
+            <a:r>
+              <a:rPr sz="1100" b="1">
+                <a:solidFill>
+                  <a:srgbClr val="212121"/>
+                </a:solidFill>
+              </a:rPr>
+              <a:t>Trump Tells Warsh to Do ‘Own Thing’ as Fed Chair Sworn In</a:t>
+            </a:r>
+          </a:p>
+        </p:txBody>
+      </p:sp>
+      <p:sp>
+        <p:nvSpPr>
+          <p:cNvPr id="9" name="TextBox 8"/>
+          <p:cNvSpPr txBox="1"/>
+          <p:nvPr/>
+        </p:nvSpPr>
+        <p:spPr>
+          <a:xfrm>
+            <a:off x="457200" y="1444752"/>
+            <a:ext cx="8321040" cy="502920"/>
+          </a:xfrm>
+          <a:prstGeom prst="rect">
+            <a:avLst/>
+          </a:prstGeom>
+          <a:noFill/>
+        </p:spPr>
+        <p:txBody>
+          <a:bodyPr wrap="square">
+            <a:spAutoFit/>
+          </a:bodyPr>
+          <a:lstStyle/>
+          <a:p>
+            <a:pPr algn="l"/>
+            <a:r>
+              <a:rPr sz="900" b="0">
+                <a:solidFill>
+                  <a:srgbClr val="757575"/>
+                </a:solidFill>
+              </a:rPr>
+              <a:t>President Donald Trump stressed that he wants Kevin Warsh to independently lead the Federal Reserve, as he looked to downplay investor concern that he would pre…</a:t>
+            </a:r>
+          </a:p>
+        </p:txBody>
+      </p:sp>
+      <p:sp>
+        <p:nvSpPr>
+          <p:cNvPr id="10" name="TextBox 9"/>
+          <p:cNvSpPr txBox="1"/>
+          <p:nvPr/>
+        </p:nvSpPr>
+        <p:spPr>
+          <a:xfrm>
+            <a:off x="457200" y="1965960"/>
+            <a:ext cx="3657600" cy="228600"/>
+          </a:xfrm>
+          <a:prstGeom prst="rect">
+            <a:avLst/>
+          </a:prstGeom>
+          <a:noFill/>
+        </p:spPr>
+        <p:txBody>
+          <a:bodyPr wrap="square">
+            <a:spAutoFit/>
+          </a:bodyPr>
+          <a:lstStyle/>
+          <a:p>
+            <a:pPr algn="l"/>
+            <a:r>
+              <a:rPr sz="800" b="0">
+                <a:solidFill>
+                  <a:srgbClr val="757575"/>
+                </a:solidFill>
+              </a:rPr>
+              <a:t>📰 feeds.bloomberg.com</a:t>
+            </a:r>
+          </a:p>
+        </p:txBody>
+      </p:sp>
+      <p:sp>
+        <p:nvSpPr>
+          <p:cNvPr id="11" name="Rectangle 10"/>
+          <p:cNvSpPr/>
+          <p:nvPr/>
+        </p:nvSpPr>
+        <p:spPr>
+          <a:xfrm>
+            <a:off x="274320" y="2350008"/>
+            <a:ext cx="8595360" cy="1234440"/>
+          </a:xfrm>
+          <a:prstGeom prst="rect">
+            <a:avLst/>
+          </a:prstGeom>
+          <a:solidFill>
+            <a:srgbClr val="FFFFFF"/>
+          </a:solidFill>
+          <a:ln>
+            <a:noFill/>
+          </a:ln>
+        </p:spPr>
+        <p:style>
+          <a:lnRef idx="1">
+            <a:schemeClr val="accent1"/>
+          </a:lnRef>
+          <a:fillRef idx="3">
+            <a:schemeClr val="accent1"/>
+          </a:fillRef>
+          <a:effectRef idx="2">
+            <a:schemeClr val="accent1"/>
+          </a:effectRef>
+          <a:fontRef idx="minor">
+            <a:schemeClr val="lt1"/>
+          </a:fontRef>
+        </p:style>
+        <p:txBody>
+          <a:bodyPr rtlCol="0" anchor="ctr"/>
+          <a:lstStyle/>
+          <a:p>
+            <a:pPr algn="ctr"/>
+          </a:p>
+        </p:txBody>
+      </p:sp>
+      <p:sp>
+        <p:nvSpPr>
+          <p:cNvPr id="12" name="Rectangle 11"/>
+          <p:cNvSpPr/>
+          <p:nvPr/>
+        </p:nvSpPr>
+        <p:spPr>
+          <a:xfrm>
+            <a:off x="274320" y="2350008"/>
+            <a:ext cx="54864" cy="1234440"/>
+          </a:xfrm>
+          <a:prstGeom prst="rect">
+            <a:avLst/>
+          </a:prstGeom>
+          <a:solidFill>
+            <a:srgbClr val="E65C00"/>
+          </a:solidFill>
+          <a:ln>
+            <a:noFill/>
+          </a:ln>
+        </p:spPr>
+        <p:style>
+          <a:lnRef idx="1">
+            <a:schemeClr val="accent1"/>
+          </a:lnRef>
+          <a:fillRef idx="3">
+            <a:schemeClr val="accent1"/>
+          </a:fillRef>
+          <a:effectRef idx="2">
+            <a:schemeClr val="accent1"/>
+          </a:effectRef>
+          <a:fontRef idx="minor">
+            <a:schemeClr val="lt1"/>
+          </a:fontRef>
+        </p:style>
+        <p:txBody>
+          <a:bodyPr rtlCol="0" anchor="ctr"/>
+          <a:lstStyle/>
+          <a:p>
+            <a:pPr algn="ctr"/>
+          </a:p>
+        </p:txBody>
+      </p:sp>
+      <p:sp>
+        <p:nvSpPr>
+          <p:cNvPr id="13" name="Rectangle 12"/>
+          <p:cNvSpPr/>
+          <p:nvPr/>
+        </p:nvSpPr>
+        <p:spPr>
+          <a:xfrm>
+            <a:off x="8138160" y="2441448"/>
+            <a:ext cx="640080" cy="274320"/>
+          </a:xfrm>
+          <a:prstGeom prst="rect">
+            <a:avLst/>
+          </a:prstGeom>
+          <a:solidFill>
+            <a:srgbClr val="E65C00"/>
+          </a:solidFill>
+          <a:ln>
+            <a:noFill/>
+          </a:ln>
+        </p:spPr>
+        <p:style>
+          <a:lnRef idx="1">
+            <a:schemeClr val="accent1"/>
+          </a:lnRef>
+          <a:fillRef idx="3">
+            <a:schemeClr val="accent1"/>
+          </a:fillRef>
+          <a:effectRef idx="2">
+            <a:schemeClr val="accent1"/>
+          </a:effectRef>
+          <a:fontRef idx="minor">
+            <a:schemeClr val="lt1"/>
+          </a:fontRef>
+        </p:style>
+        <p:txBody>
+          <a:bodyPr rtlCol="0" anchor="ctr"/>
+          <a:lstStyle/>
+          <a:p>
+            <a:pPr algn="ctr"/>
+          </a:p>
+        </p:txBody>
+      </p:sp>
+      <p:sp>
+        <p:nvSpPr>
+          <p:cNvPr id="14" name="TextBox 13"/>
+          <p:cNvSpPr txBox="1"/>
+          <p:nvPr/>
+        </p:nvSpPr>
+        <p:spPr>
+          <a:xfrm>
+            <a:off x="8138160" y="2441448"/>
+            <a:ext cx="640080" cy="274320"/>
+          </a:xfrm>
+          <a:prstGeom prst="rect">
+            <a:avLst/>
+          </a:prstGeom>
+          <a:noFill/>
+        </p:spPr>
+        <p:txBody>
+          <a:bodyPr wrap="square">
+            <a:spAutoFit/>
+          </a:bodyPr>
+          <a:lstStyle/>
+          <a:p>
+            <a:pPr algn="ctr"/>
+            <a:r>
+              <a:rPr sz="900" b="1">
+                <a:solidFill>
+                  <a:srgbClr val="FFFFFF"/>
+                </a:solidFill>
+              </a:rPr>
+              <a:t>7/10</a:t>
+            </a:r>
+          </a:p>
+        </p:txBody>
+      </p:sp>
+      <p:sp>
+        <p:nvSpPr>
+          <p:cNvPr id="15" name="TextBox 14"/>
+          <p:cNvSpPr txBox="1"/>
+          <p:nvPr/>
+        </p:nvSpPr>
+        <p:spPr>
+          <a:xfrm>
+            <a:off x="457200" y="2441448"/>
+            <a:ext cx="7498080" cy="347472"/>
+          </a:xfrm>
+          <a:prstGeom prst="rect">
+            <a:avLst/>
+          </a:prstGeom>
+          <a:noFill/>
+        </p:spPr>
+        <p:txBody>
+          <a:bodyPr wrap="square">
+            <a:spAutoFit/>
+          </a:bodyPr>
+          <a:lstStyle/>
+          <a:p>
+            <a:pPr algn="l"/>
+            <a:r>
+              <a:rPr sz="1100" b="1">
+                <a:solidFill>
+                  <a:srgbClr val="212121"/>
+                </a:solidFill>
+              </a:rPr>
+              <a:t>Warsh Says He'll Lead a 'Reform-Oriented' Fed</a:t>
+            </a:r>
+          </a:p>
+        </p:txBody>
+      </p:sp>
+      <p:sp>
+        <p:nvSpPr>
+          <p:cNvPr id="16" name="TextBox 15"/>
+          <p:cNvSpPr txBox="1"/>
+          <p:nvPr/>
+        </p:nvSpPr>
+        <p:spPr>
+          <a:xfrm>
+            <a:off x="457200" y="2788920"/>
+            <a:ext cx="8321040" cy="502920"/>
+          </a:xfrm>
+          <a:prstGeom prst="rect">
+            <a:avLst/>
+          </a:prstGeom>
+          <a:noFill/>
+        </p:spPr>
+        <p:txBody>
+          <a:bodyPr wrap="square">
+            <a:spAutoFit/>
+          </a:bodyPr>
+          <a:lstStyle/>
+          <a:p>
+            <a:pPr algn="l"/>
+            <a:r>
+              <a:rPr sz="900" b="0">
+                <a:solidFill>
+                  <a:srgbClr val="757575"/>
+                </a:solidFill>
+              </a:rPr>
+              <a:t>Kevin Warsh says he'll lead a "reform-oriented" Federal Reserve and goals will be pursued with "independence and resolve." In the months leading up to his nomin…</a:t>
+            </a:r>
+          </a:p>
+        </p:txBody>
+      </p:sp>
+      <p:sp>
+        <p:nvSpPr>
+          <p:cNvPr id="17" name="TextBox 16"/>
+          <p:cNvSpPr txBox="1"/>
+          <p:nvPr/>
+        </p:nvSpPr>
+        <p:spPr>
+          <a:xfrm>
+            <a:off x="457200" y="3310128"/>
+            <a:ext cx="3657600" cy="228600"/>
+          </a:xfrm>
+          <a:prstGeom prst="rect">
+            <a:avLst/>
+          </a:prstGeom>
+          <a:noFill/>
+        </p:spPr>
+        <p:txBody>
+          <a:bodyPr wrap="square">
+            <a:spAutoFit/>
+          </a:bodyPr>
+          <a:lstStyle/>
+          <a:p>
+            <a:pPr algn="l"/>
+            <a:r>
+              <a:rPr sz="800" b="0">
+                <a:solidFill>
+                  <a:srgbClr val="757575"/>
+                </a:solidFill>
+              </a:rPr>
+              <a:t>📰 feeds.bloomberg.com</a:t>
+            </a:r>
+          </a:p>
+        </p:txBody>
+      </p:sp>
+      <p:sp>
+        <p:nvSpPr>
+          <p:cNvPr id="18" name="Rectangle 17"/>
+          <p:cNvSpPr/>
+          <p:nvPr/>
+        </p:nvSpPr>
+        <p:spPr>
+          <a:xfrm>
+            <a:off x="274320" y="3694176"/>
+            <a:ext cx="8595360" cy="1234440"/>
+          </a:xfrm>
+          <a:prstGeom prst="rect">
+            <a:avLst/>
+          </a:prstGeom>
+          <a:solidFill>
+            <a:srgbClr val="FFFFFF"/>
+          </a:solidFill>
+          <a:ln>
+            <a:noFill/>
+          </a:ln>
+        </p:spPr>
+        <p:style>
+          <a:lnRef idx="1">
+            <a:schemeClr val="accent1"/>
+          </a:lnRef>
+          <a:fillRef idx="3">
+            <a:schemeClr val="accent1"/>
+          </a:fillRef>
+          <a:effectRef idx="2">
+            <a:schemeClr val="accent1"/>
+          </a:effectRef>
+          <a:fontRef idx="minor">
+            <a:schemeClr val="lt1"/>
+          </a:fontRef>
+        </p:style>
+        <p:txBody>
+          <a:bodyPr rtlCol="0" anchor="ctr"/>
+          <a:lstStyle/>
+          <a:p>
+            <a:pPr algn="ctr"/>
+          </a:p>
+        </p:txBody>
+      </p:sp>
+      <p:sp>
+        <p:nvSpPr>
+          <p:cNvPr id="19" name="Rectangle 18"/>
+          <p:cNvSpPr/>
+          <p:nvPr/>
+        </p:nvSpPr>
+        <p:spPr>
+          <a:xfrm>
+            <a:off x="274320" y="3694176"/>
+            <a:ext cx="54864" cy="1234440"/>
           </a:xfrm>
           <a:prstGeom prst="rect">
             <a:avLst/>
@@ -4836,13 +5323,56 @@
       </p:sp>
       <p:sp>
         <p:nvSpPr>
-          <p:cNvPr id="7" name="TextBox 6"/>
+          <p:cNvPr id="20" name="Rectangle 19"/>
+          <p:cNvSpPr/>
+          <p:nvPr/>
+        </p:nvSpPr>
+        <p:spPr>
+          <a:xfrm>
+            <a:off x="8138160" y="3785616"/>
+            <a:ext cx="640080" cy="274320"/>
+          </a:xfrm>
+          <a:prstGeom prst="rect">
+            <a:avLst/>
+          </a:prstGeom>
+          <a:solidFill>
+            <a:srgbClr val="2E7D32"/>
+          </a:solidFill>
+          <a:ln>
+            <a:noFill/>
+          </a:ln>
+        </p:spPr>
+        <p:style>
+          <a:lnRef idx="1">
+            <a:schemeClr val="accent1"/>
+          </a:lnRef>
+          <a:fillRef idx="3">
+            <a:schemeClr val="accent1"/>
+          </a:fillRef>
+          <a:effectRef idx="2">
+            <a:schemeClr val="accent1"/>
+          </a:effectRef>
+          <a:fontRef idx="minor">
+            <a:schemeClr val="lt1"/>
+          </a:fontRef>
+        </p:style>
+        <p:txBody>
+          <a:bodyPr rtlCol="0" anchor="ctr"/>
+          <a:lstStyle/>
+          <a:p>
+            <a:pPr algn="ctr"/>
+          </a:p>
+        </p:txBody>
+      </p:sp>
+      <p:sp>
+        <p:nvSpPr>
+          <p:cNvPr id="21" name="TextBox 20"/>
           <p:cNvSpPr txBox="1"/>
           <p:nvPr/>
         </p:nvSpPr>
         <p:spPr>
           <a:xfrm>
-            <a:off x="8138160" y="1097280"/>
+            <a:off x="8138160" y="3785616"/>
             <a:ext cx="640080" cy="274320"/>
           </a:xfrm>
           <a:prstGeom prst="rect">
@@ -4870,13 +5400,13 @@
       </p:sp>
       <p:sp>
         <p:nvSpPr>
-          <p:cNvPr id="8" name="TextBox 7"/>
+          <p:cNvPr id="22" name="TextBox 21"/>
           <p:cNvSpPr txBox="1"/>
           <p:nvPr/>
         </p:nvSpPr>
         <p:spPr>
           <a:xfrm>
-            <a:off x="457200" y="1097280"/>
+            <a:off x="457200" y="3785616"/>
             <a:ext cx="7498080" cy="347472"/>
           </a:xfrm>
           <a:prstGeom prst="rect">
@@ -4904,13 +5434,13 @@
       </p:sp>
       <p:sp>
         <p:nvSpPr>
-          <p:cNvPr id="9" name="TextBox 8"/>
+          <p:cNvPr id="23" name="TextBox 22"/>
           <p:cNvSpPr txBox="1"/>
           <p:nvPr/>
         </p:nvSpPr>
         <p:spPr>
           <a:xfrm>
-            <a:off x="457200" y="1444752"/>
+            <a:off x="457200" y="4133088"/>
             <a:ext cx="8321040" cy="502920"/>
           </a:xfrm>
           <a:prstGeom prst="rect">
@@ -4938,13 +5468,13 @@
       </p:sp>
       <p:sp>
         <p:nvSpPr>
-          <p:cNvPr id="10" name="TextBox 9"/>
+          <p:cNvPr id="24" name="TextBox 23"/>
           <p:cNvSpPr txBox="1"/>
           <p:nvPr/>
         </p:nvSpPr>
         <p:spPr>
           <a:xfrm>
-            <a:off x="457200" y="1965960"/>
+            <a:off x="457200" y="4654296"/>
             <a:ext cx="3657600" cy="228600"/>
           </a:xfrm>
           <a:prstGeom prst="rect">
@@ -4972,13 +5502,13 @@
       </p:sp>
       <p:sp>
         <p:nvSpPr>
-          <p:cNvPr id="11" name="Rectangle 10"/>
+          <p:cNvPr id="25" name="Rectangle 24"/>
           <p:cNvSpPr/>
           <p:nvPr/>
         </p:nvSpPr>
         <p:spPr>
           <a:xfrm>
-            <a:off x="274320" y="2350008"/>
+            <a:off x="274320" y="5038344"/>
             <a:ext cx="8595360" cy="1234440"/>
           </a:xfrm>
           <a:prstGeom prst="rect">
@@ -5015,13 +5545,13 @@
       </p:sp>
       <p:sp>
         <p:nvSpPr>
-          <p:cNvPr id="12" name="Rectangle 11"/>
+          <p:cNvPr id="26" name="Rectangle 25"/>
           <p:cNvSpPr/>
           <p:nvPr/>
         </p:nvSpPr>
         <p:spPr>
           <a:xfrm>
-            <a:off x="274320" y="2350008"/>
+            <a:off x="274320" y="5038344"/>
             <a:ext cx="54864" cy="1234440"/>
           </a:xfrm>
           <a:prstGeom prst="rect">
@@ -5058,13 +5588,13 @@
       </p:sp>
       <p:sp>
         <p:nvSpPr>
-          <p:cNvPr id="13" name="Rectangle 12"/>
+          <p:cNvPr id="27" name="Rectangle 26"/>
           <p:cNvSpPr/>
           <p:nvPr/>
         </p:nvSpPr>
         <p:spPr>
           <a:xfrm>
-            <a:off x="8138160" y="2441448"/>
+            <a:off x="8138160" y="5129784"/>
             <a:ext cx="640080" cy="274320"/>
           </a:xfrm>
           <a:prstGeom prst="rect">
@@ -5101,13 +5631,13 @@
       </p:sp>
       <p:sp>
         <p:nvSpPr>
-          <p:cNvPr id="14" name="TextBox 13"/>
+          <p:cNvPr id="28" name="TextBox 27"/>
           <p:cNvSpPr txBox="1"/>
           <p:nvPr/>
         </p:nvSpPr>
         <p:spPr>
           <a:xfrm>
-            <a:off x="8138160" y="2441448"/>
+            <a:off x="8138160" y="5129784"/>
             <a:ext cx="640080" cy="274320"/>
           </a:xfrm>
           <a:prstGeom prst="rect">
@@ -5135,13 +5665,13 @@
       </p:sp>
       <p:sp>
         <p:nvSpPr>
-          <p:cNvPr id="15" name="TextBox 14"/>
+          <p:cNvPr id="29" name="TextBox 28"/>
           <p:cNvSpPr txBox="1"/>
           <p:nvPr/>
         </p:nvSpPr>
         <p:spPr>
           <a:xfrm>
-            <a:off x="457200" y="2441448"/>
+            <a:off x="457200" y="5129784"/>
             <a:ext cx="7498080" cy="347472"/>
           </a:xfrm>
           <a:prstGeom prst="rect">
@@ -5169,13 +5699,13 @@
       </p:sp>
       <p:sp>
         <p:nvSpPr>
-          <p:cNvPr id="16" name="TextBox 15"/>
+          <p:cNvPr id="30" name="TextBox 29"/>
           <p:cNvSpPr txBox="1"/>
           <p:nvPr/>
         </p:nvSpPr>
         <p:spPr>
           <a:xfrm>
-            <a:off x="457200" y="2788920"/>
+            <a:off x="457200" y="5477256"/>
             <a:ext cx="8321040" cy="502920"/>
           </a:xfrm>
           <a:prstGeom prst="rect">
@@ -5197,536 +5727,6 @@
                 </a:solidFill>
               </a:rPr>
               <a:t>Kevin Warsh was sworn into office as the 17th chair of the Fed, promising the biggest shakeup in decades at the US central bank, and takes over at a tense momen…</a:t>
-            </a:r>
-          </a:p>
-        </p:txBody>
-      </p:sp>
-      <p:sp>
-        <p:nvSpPr>
-          <p:cNvPr id="17" name="TextBox 16"/>
-          <p:cNvSpPr txBox="1"/>
-          <p:nvPr/>
-        </p:nvSpPr>
-        <p:spPr>
-          <a:xfrm>
-            <a:off x="457200" y="3310128"/>
-            <a:ext cx="3657600" cy="228600"/>
-          </a:xfrm>
-          <a:prstGeom prst="rect">
-            <a:avLst/>
-          </a:prstGeom>
-          <a:noFill/>
-        </p:spPr>
-        <p:txBody>
-          <a:bodyPr wrap="square">
-            <a:spAutoFit/>
-          </a:bodyPr>
-          <a:lstStyle/>
-          <a:p>
-            <a:pPr algn="l"/>
-            <a:r>
-              <a:rPr sz="800" b="0">
-                <a:solidFill>
-                  <a:srgbClr val="757575"/>
-                </a:solidFill>
-              </a:rPr>
-              <a:t>📰 feeds.bloomberg.com</a:t>
-            </a:r>
-          </a:p>
-        </p:txBody>
-      </p:sp>
-      <p:sp>
-        <p:nvSpPr>
-          <p:cNvPr id="18" name="Rectangle 17"/>
-          <p:cNvSpPr/>
-          <p:nvPr/>
-        </p:nvSpPr>
-        <p:spPr>
-          <a:xfrm>
-            <a:off x="274320" y="3694176"/>
-            <a:ext cx="8595360" cy="1234440"/>
-          </a:xfrm>
-          <a:prstGeom prst="rect">
-            <a:avLst/>
-          </a:prstGeom>
-          <a:solidFill>
-            <a:srgbClr val="FFFFFF"/>
-          </a:solidFill>
-          <a:ln>
-            <a:noFill/>
-          </a:ln>
-        </p:spPr>
-        <p:style>
-          <a:lnRef idx="1">
-            <a:schemeClr val="accent1"/>
-          </a:lnRef>
-          <a:fillRef idx="3">
-            <a:schemeClr val="accent1"/>
-          </a:fillRef>
-          <a:effectRef idx="2">
-            <a:schemeClr val="accent1"/>
-          </a:effectRef>
-          <a:fontRef idx="minor">
-            <a:schemeClr val="lt1"/>
-          </a:fontRef>
-        </p:style>
-        <p:txBody>
-          <a:bodyPr rtlCol="0" anchor="ctr"/>
-          <a:lstStyle/>
-          <a:p>
-            <a:pPr algn="ctr"/>
-          </a:p>
-        </p:txBody>
-      </p:sp>
-      <p:sp>
-        <p:nvSpPr>
-          <p:cNvPr id="19" name="Rectangle 18"/>
-          <p:cNvSpPr/>
-          <p:nvPr/>
-        </p:nvSpPr>
-        <p:spPr>
-          <a:xfrm>
-            <a:off x="274320" y="3694176"/>
-            <a:ext cx="54864" cy="1234440"/>
-          </a:xfrm>
-          <a:prstGeom prst="rect">
-            <a:avLst/>
-          </a:prstGeom>
-          <a:solidFill>
-            <a:srgbClr val="2E7D32"/>
-          </a:solidFill>
-          <a:ln>
-            <a:noFill/>
-          </a:ln>
-        </p:spPr>
-        <p:style>
-          <a:lnRef idx="1">
-            <a:schemeClr val="accent1"/>
-          </a:lnRef>
-          <a:fillRef idx="3">
-            <a:schemeClr val="accent1"/>
-          </a:fillRef>
-          <a:effectRef idx="2">
-            <a:schemeClr val="accent1"/>
-          </a:effectRef>
-          <a:fontRef idx="minor">
-            <a:schemeClr val="lt1"/>
-          </a:fontRef>
-        </p:style>
-        <p:txBody>
-          <a:bodyPr rtlCol="0" anchor="ctr"/>
-          <a:lstStyle/>
-          <a:p>
-            <a:pPr algn="ctr"/>
-          </a:p>
-        </p:txBody>
-      </p:sp>
-      <p:sp>
-        <p:nvSpPr>
-          <p:cNvPr id="20" name="Rectangle 19"/>
-          <p:cNvSpPr/>
-          <p:nvPr/>
-        </p:nvSpPr>
-        <p:spPr>
-          <a:xfrm>
-            <a:off x="8138160" y="3785616"/>
-            <a:ext cx="640080" cy="274320"/>
-          </a:xfrm>
-          <a:prstGeom prst="rect">
-            <a:avLst/>
-          </a:prstGeom>
-          <a:solidFill>
-            <a:srgbClr val="2E7D32"/>
-          </a:solidFill>
-          <a:ln>
-            <a:noFill/>
-          </a:ln>
-        </p:spPr>
-        <p:style>
-          <a:lnRef idx="1">
-            <a:schemeClr val="accent1"/>
-          </a:lnRef>
-          <a:fillRef idx="3">
-            <a:schemeClr val="accent1"/>
-          </a:fillRef>
-          <a:effectRef idx="2">
-            <a:schemeClr val="accent1"/>
-          </a:effectRef>
-          <a:fontRef idx="minor">
-            <a:schemeClr val="lt1"/>
-          </a:fontRef>
-        </p:style>
-        <p:txBody>
-          <a:bodyPr rtlCol="0" anchor="ctr"/>
-          <a:lstStyle/>
-          <a:p>
-            <a:pPr algn="ctr"/>
-          </a:p>
-        </p:txBody>
-      </p:sp>
-      <p:sp>
-        <p:nvSpPr>
-          <p:cNvPr id="21" name="TextBox 20"/>
-          <p:cNvSpPr txBox="1"/>
-          <p:nvPr/>
-        </p:nvSpPr>
-        <p:spPr>
-          <a:xfrm>
-            <a:off x="8138160" y="3785616"/>
-            <a:ext cx="640080" cy="274320"/>
-          </a:xfrm>
-          <a:prstGeom prst="rect">
-            <a:avLst/>
-          </a:prstGeom>
-          <a:noFill/>
-        </p:spPr>
-        <p:txBody>
-          <a:bodyPr wrap="square">
-            <a:spAutoFit/>
-          </a:bodyPr>
-          <a:lstStyle/>
-          <a:p>
-            <a:pPr algn="ctr"/>
-            <a:r>
-              <a:rPr sz="900" b="1">
-                <a:solidFill>
-                  <a:srgbClr val="FFFFFF"/>
-                </a:solidFill>
-              </a:rPr>
-              <a:t>5/10</a:t>
-            </a:r>
-          </a:p>
-        </p:txBody>
-      </p:sp>
-      <p:sp>
-        <p:nvSpPr>
-          <p:cNvPr id="22" name="TextBox 21"/>
-          <p:cNvSpPr txBox="1"/>
-          <p:nvPr/>
-        </p:nvSpPr>
-        <p:spPr>
-          <a:xfrm>
-            <a:off x="457200" y="3785616"/>
-            <a:ext cx="7498080" cy="347472"/>
-          </a:xfrm>
-          <a:prstGeom prst="rect">
-            <a:avLst/>
-          </a:prstGeom>
-          <a:noFill/>
-        </p:spPr>
-        <p:txBody>
-          <a:bodyPr wrap="square">
-            <a:spAutoFit/>
-          </a:bodyPr>
-          <a:lstStyle/>
-          <a:p>
-            <a:pPr algn="l"/>
-            <a:r>
-              <a:rPr sz="1100" b="1">
-                <a:solidFill>
-                  <a:srgbClr val="212121"/>
-                </a:solidFill>
-              </a:rPr>
-              <a:t>Iran Says US’s Latest Proposal Has ‘Narrowed the Gaps’</a:t>
-            </a:r>
-          </a:p>
-        </p:txBody>
-      </p:sp>
-      <p:sp>
-        <p:nvSpPr>
-          <p:cNvPr id="23" name="TextBox 22"/>
-          <p:cNvSpPr txBox="1"/>
-          <p:nvPr/>
-        </p:nvSpPr>
-        <p:spPr>
-          <a:xfrm>
-            <a:off x="457200" y="4133088"/>
-            <a:ext cx="8321040" cy="502920"/>
-          </a:xfrm>
-          <a:prstGeom prst="rect">
-            <a:avLst/>
-          </a:prstGeom>
-          <a:noFill/>
-        </p:spPr>
-        <p:txBody>
-          <a:bodyPr wrap="square">
-            <a:spAutoFit/>
-          </a:bodyPr>
-          <a:lstStyle/>
-          <a:p>
-            <a:pPr algn="l"/>
-            <a:r>
-              <a:rPr sz="900" b="0">
-                <a:solidFill>
-                  <a:srgbClr val="757575"/>
-                </a:solidFill>
-              </a:rPr>
-              <a:t>Iran said the latest proposal from the US has partly bridged the gap between the warring sides, as they seek to turn a fragile ceasefire into a peace deal.</a:t>
-            </a:r>
-          </a:p>
-        </p:txBody>
-      </p:sp>
-      <p:sp>
-        <p:nvSpPr>
-          <p:cNvPr id="24" name="TextBox 23"/>
-          <p:cNvSpPr txBox="1"/>
-          <p:nvPr/>
-        </p:nvSpPr>
-        <p:spPr>
-          <a:xfrm>
-            <a:off x="457200" y="4654296"/>
-            <a:ext cx="3657600" cy="228600"/>
-          </a:xfrm>
-          <a:prstGeom prst="rect">
-            <a:avLst/>
-          </a:prstGeom>
-          <a:noFill/>
-        </p:spPr>
-        <p:txBody>
-          <a:bodyPr wrap="square">
-            <a:spAutoFit/>
-          </a:bodyPr>
-          <a:lstStyle/>
-          <a:p>
-            <a:pPr algn="l"/>
-            <a:r>
-              <a:rPr sz="800" b="0">
-                <a:solidFill>
-                  <a:srgbClr val="757575"/>
-                </a:solidFill>
-              </a:rPr>
-              <a:t>📰 feeds.bloomberg.com</a:t>
-            </a:r>
-          </a:p>
-        </p:txBody>
-      </p:sp>
-      <p:sp>
-        <p:nvSpPr>
-          <p:cNvPr id="25" name="Rectangle 24"/>
-          <p:cNvSpPr/>
-          <p:nvPr/>
-        </p:nvSpPr>
-        <p:spPr>
-          <a:xfrm>
-            <a:off x="274320" y="5038344"/>
-            <a:ext cx="8595360" cy="1234440"/>
-          </a:xfrm>
-          <a:prstGeom prst="rect">
-            <a:avLst/>
-          </a:prstGeom>
-          <a:solidFill>
-            <a:srgbClr val="FFFFFF"/>
-          </a:solidFill>
-          <a:ln>
-            <a:noFill/>
-          </a:ln>
-        </p:spPr>
-        <p:style>
-          <a:lnRef idx="1">
-            <a:schemeClr val="accent1"/>
-          </a:lnRef>
-          <a:fillRef idx="3">
-            <a:schemeClr val="accent1"/>
-          </a:fillRef>
-          <a:effectRef idx="2">
-            <a:schemeClr val="accent1"/>
-          </a:effectRef>
-          <a:fontRef idx="minor">
-            <a:schemeClr val="lt1"/>
-          </a:fontRef>
-        </p:style>
-        <p:txBody>
-          <a:bodyPr rtlCol="0" anchor="ctr"/>
-          <a:lstStyle/>
-          <a:p>
-            <a:pPr algn="ctr"/>
-          </a:p>
-        </p:txBody>
-      </p:sp>
-      <p:sp>
-        <p:nvSpPr>
-          <p:cNvPr id="26" name="Rectangle 25"/>
-          <p:cNvSpPr/>
-          <p:nvPr/>
-        </p:nvSpPr>
-        <p:spPr>
-          <a:xfrm>
-            <a:off x="274320" y="5038344"/>
-            <a:ext cx="54864" cy="1234440"/>
-          </a:xfrm>
-          <a:prstGeom prst="rect">
-            <a:avLst/>
-          </a:prstGeom>
-          <a:solidFill>
-            <a:srgbClr val="E65C00"/>
-          </a:solidFill>
-          <a:ln>
-            <a:noFill/>
-          </a:ln>
-        </p:spPr>
-        <p:style>
-          <a:lnRef idx="1">
-            <a:schemeClr val="accent1"/>
-          </a:lnRef>
-          <a:fillRef idx="3">
-            <a:schemeClr val="accent1"/>
-          </a:fillRef>
-          <a:effectRef idx="2">
-            <a:schemeClr val="accent1"/>
-          </a:effectRef>
-          <a:fontRef idx="minor">
-            <a:schemeClr val="lt1"/>
-          </a:fontRef>
-        </p:style>
-        <p:txBody>
-          <a:bodyPr rtlCol="0" anchor="ctr"/>
-          <a:lstStyle/>
-          <a:p>
-            <a:pPr algn="ctr"/>
-          </a:p>
-        </p:txBody>
-      </p:sp>
-      <p:sp>
-        <p:nvSpPr>
-          <p:cNvPr id="27" name="Rectangle 26"/>
-          <p:cNvSpPr/>
-          <p:nvPr/>
-        </p:nvSpPr>
-        <p:spPr>
-          <a:xfrm>
-            <a:off x="8138160" y="5129784"/>
-            <a:ext cx="640080" cy="274320"/>
-          </a:xfrm>
-          <a:prstGeom prst="rect">
-            <a:avLst/>
-          </a:prstGeom>
-          <a:solidFill>
-            <a:srgbClr val="E65C00"/>
-          </a:solidFill>
-          <a:ln>
-            <a:noFill/>
-          </a:ln>
-        </p:spPr>
-        <p:style>
-          <a:lnRef idx="1">
-            <a:schemeClr val="accent1"/>
-          </a:lnRef>
-          <a:fillRef idx="3">
-            <a:schemeClr val="accent1"/>
-          </a:fillRef>
-          <a:effectRef idx="2">
-            <a:schemeClr val="accent1"/>
-          </a:effectRef>
-          <a:fontRef idx="minor">
-            <a:schemeClr val="lt1"/>
-          </a:fontRef>
-        </p:style>
-        <p:txBody>
-          <a:bodyPr rtlCol="0" anchor="ctr"/>
-          <a:lstStyle/>
-          <a:p>
-            <a:pPr algn="ctr"/>
-          </a:p>
-        </p:txBody>
-      </p:sp>
-      <p:sp>
-        <p:nvSpPr>
-          <p:cNvPr id="28" name="TextBox 27"/>
-          <p:cNvSpPr txBox="1"/>
-          <p:nvPr/>
-        </p:nvSpPr>
-        <p:spPr>
-          <a:xfrm>
-            <a:off x="8138160" y="5129784"/>
-            <a:ext cx="640080" cy="274320"/>
-          </a:xfrm>
-          <a:prstGeom prst="rect">
-            <a:avLst/>
-          </a:prstGeom>
-          <a:noFill/>
-        </p:spPr>
-        <p:txBody>
-          <a:bodyPr wrap="square">
-            <a:spAutoFit/>
-          </a:bodyPr>
-          <a:lstStyle/>
-          <a:p>
-            <a:pPr algn="ctr"/>
-            <a:r>
-              <a:rPr sz="900" b="1">
-                <a:solidFill>
-                  <a:srgbClr val="FFFFFF"/>
-                </a:solidFill>
-              </a:rPr>
-              <a:t>7/10</a:t>
-            </a:r>
-          </a:p>
-        </p:txBody>
-      </p:sp>
-      <p:sp>
-        <p:nvSpPr>
-          <p:cNvPr id="29" name="TextBox 28"/>
-          <p:cNvSpPr txBox="1"/>
-          <p:nvPr/>
-        </p:nvSpPr>
-        <p:spPr>
-          <a:xfrm>
-            <a:off x="457200" y="5129784"/>
-            <a:ext cx="7498080" cy="347472"/>
-          </a:xfrm>
-          <a:prstGeom prst="rect">
-            <a:avLst/>
-          </a:prstGeom>
-          <a:noFill/>
-        </p:spPr>
-        <p:txBody>
-          <a:bodyPr wrap="square">
-            <a:spAutoFit/>
-          </a:bodyPr>
-          <a:lstStyle/>
-          <a:p>
-            <a:pPr algn="l"/>
-            <a:r>
-              <a:rPr sz="1100" b="1">
-                <a:solidFill>
-                  <a:srgbClr val="212121"/>
-                </a:solidFill>
-              </a:rPr>
-              <a:t>Trump Tells Warsh to Do ‘Own Thing’ as Fed Chair Sworn In</a:t>
-            </a:r>
-          </a:p>
-        </p:txBody>
-      </p:sp>
-      <p:sp>
-        <p:nvSpPr>
-          <p:cNvPr id="30" name="TextBox 29"/>
-          <p:cNvSpPr txBox="1"/>
-          <p:nvPr/>
-        </p:nvSpPr>
-        <p:spPr>
-          <a:xfrm>
-            <a:off x="457200" y="5477256"/>
-            <a:ext cx="8321040" cy="502920"/>
-          </a:xfrm>
-          <a:prstGeom prst="rect">
-            <a:avLst/>
-          </a:prstGeom>
-          <a:noFill/>
-        </p:spPr>
-        <p:txBody>
-          <a:bodyPr wrap="square">
-            <a:spAutoFit/>
-          </a:bodyPr>
-          <a:lstStyle/>
-          <a:p>
-            <a:pPr algn="l"/>
-            <a:r>
-              <a:rPr sz="900" b="0">
-                <a:solidFill>
-                  <a:srgbClr val="757575"/>
-                </a:solidFill>
-              </a:rPr>
-              <a:t>President Donald Trump stressed that he wants Kevin Warsh to independently lead the Federal Reserve, as he looked to downplay investor concern that he would pre…</a:t>
             </a:r>
           </a:p>
         </p:txBody>

--- a/newsletter_20260522.pptx
+++ b/newsletter_20260522.pptx
@@ -3597,7 +3597,7 @@
                   <a:srgbClr val="FFFFFF"/>
                 </a:solidFill>
               </a:rPr>
-              <a:t>4 noticias analizadas</a:t>
+              <a:t>12 noticias analizadas</a:t>
             </a:r>
           </a:p>
         </p:txBody>
@@ -3999,7 +3999,7 @@
                   <a:srgbClr val="1A237E"/>
                 </a:solidFill>
               </a:rPr>
-              <a:t>Geopolítica</a:t>
+              <a:t>Cooperativismo</a:t>
             </a:r>
           </a:p>
         </p:txBody>
@@ -4033,7 +4033,7 @@
                   <a:srgbClr val="212121"/>
                 </a:solidFill>
               </a:rPr>
-              <a:t>Warsh Says He'll Lead a 'Reform-Oriented' Fed</a:t>
+              <a:t>Nuevo aumento confirmado para empleados de comercio: quiénes lo cobran y de cuánto es la suba</a:t>
             </a:r>
           </a:p>
         </p:txBody>
@@ -4096,7 +4096,7 @@
             <a:avLst/>
           </a:prstGeom>
           <a:solidFill>
-            <a:srgbClr val="E65C00"/>
+            <a:srgbClr val="2E7D32"/>
           </a:solidFill>
           <a:ln>
             <a:noFill/>
@@ -4153,7 +4153,7 @@
                   <a:srgbClr val="FFFFFF"/>
                 </a:solidFill>
               </a:rPr>
-              <a:t>7</a:t>
+              <a:t>5</a:t>
             </a:r>
           </a:p>
         </p:txBody>
@@ -4221,7 +4221,7 @@
                   <a:srgbClr val="212121"/>
                 </a:solidFill>
               </a:rPr>
-              <a:t>Trump Tells Warsh to Do ‘Own Thing’ as Fed Chair Sworn In</a:t>
+              <a:t>Sevilla acogerá en 2028 una nueva edición de ADM tras superar las 400 empresas</a:t>
             </a:r>
           </a:p>
         </p:txBody>
@@ -4284,7 +4284,7 @@
             <a:avLst/>
           </a:prstGeom>
           <a:solidFill>
-            <a:srgbClr val="E65C00"/>
+            <a:srgbClr val="2E7D32"/>
           </a:solidFill>
           <a:ln>
             <a:noFill/>
@@ -4341,7 +4341,7 @@
                   <a:srgbClr val="FFFFFF"/>
                 </a:solidFill>
               </a:rPr>
-              <a:t>7</a:t>
+              <a:t>5</a:t>
             </a:r>
           </a:p>
         </p:txBody>
@@ -4409,7 +4409,7 @@
                   <a:srgbClr val="212121"/>
                 </a:solidFill>
               </a:rPr>
-              <a:t>Kevin Warsh Sworn In as 17th Federal Reserve Chair</a:t>
+              <a:t>Resumen del Warhammer Skulls 2026: más Space Marine 2, Helldivers 2, demo de Boltgun II, sorpre…</a:t>
             </a:r>
           </a:p>
         </p:txBody>
@@ -4597,7 +4597,759 @@
                   <a:srgbClr val="212121"/>
                 </a:solidFill>
               </a:rPr>
-              <a:t>Progress in Iran Talks Undercut Over Uranium, Tolls</a:t>
+              <a:t>Petróleo sube más de 3% tras nueva línea roja de Irán sobre el uranio</a:t>
+            </a:r>
+          </a:p>
+        </p:txBody>
+      </p:sp>
+      <p:sp>
+        <p:nvSpPr>
+          <p:cNvPr id="24" name="Rectangle 23"/>
+          <p:cNvSpPr/>
+          <p:nvPr/>
+        </p:nvSpPr>
+        <p:spPr>
+          <a:xfrm>
+            <a:off x="274320" y="3099816"/>
+            <a:ext cx="8595360" cy="475488"/>
+          </a:xfrm>
+          <a:prstGeom prst="rect">
+            <a:avLst/>
+          </a:prstGeom>
+          <a:solidFill>
+            <a:srgbClr val="FFFFFF"/>
+          </a:solidFill>
+          <a:ln>
+            <a:noFill/>
+          </a:ln>
+        </p:spPr>
+        <p:style>
+          <a:lnRef idx="1">
+            <a:schemeClr val="accent1"/>
+          </a:lnRef>
+          <a:fillRef idx="3">
+            <a:schemeClr val="accent1"/>
+          </a:fillRef>
+          <a:effectRef idx="2">
+            <a:schemeClr val="accent1"/>
+          </a:effectRef>
+          <a:fontRef idx="minor">
+            <a:schemeClr val="lt1"/>
+          </a:fontRef>
+        </p:style>
+        <p:txBody>
+          <a:bodyPr rtlCol="0" anchor="ctr"/>
+          <a:lstStyle/>
+          <a:p>
+            <a:pPr algn="ctr"/>
+          </a:p>
+        </p:txBody>
+      </p:sp>
+      <p:sp>
+        <p:nvSpPr>
+          <p:cNvPr id="25" name="Rectangle 24"/>
+          <p:cNvSpPr/>
+          <p:nvPr/>
+        </p:nvSpPr>
+        <p:spPr>
+          <a:xfrm>
+            <a:off x="274320" y="3099816"/>
+            <a:ext cx="502920" cy="475488"/>
+          </a:xfrm>
+          <a:prstGeom prst="rect">
+            <a:avLst/>
+          </a:prstGeom>
+          <a:solidFill>
+            <a:srgbClr val="2E7D32"/>
+          </a:solidFill>
+          <a:ln>
+            <a:noFill/>
+          </a:ln>
+        </p:spPr>
+        <p:style>
+          <a:lnRef idx="1">
+            <a:schemeClr val="accent1"/>
+          </a:lnRef>
+          <a:fillRef idx="3">
+            <a:schemeClr val="accent1"/>
+          </a:fillRef>
+          <a:effectRef idx="2">
+            <a:schemeClr val="accent1"/>
+          </a:effectRef>
+          <a:fontRef idx="minor">
+            <a:schemeClr val="lt1"/>
+          </a:fontRef>
+        </p:style>
+        <p:txBody>
+          <a:bodyPr rtlCol="0" anchor="ctr"/>
+          <a:lstStyle/>
+          <a:p>
+            <a:pPr algn="ctr"/>
+          </a:p>
+        </p:txBody>
+      </p:sp>
+      <p:sp>
+        <p:nvSpPr>
+          <p:cNvPr id="26" name="TextBox 25"/>
+          <p:cNvSpPr txBox="1"/>
+          <p:nvPr/>
+        </p:nvSpPr>
+        <p:spPr>
+          <a:xfrm>
+            <a:off x="274320" y="3176016"/>
+            <a:ext cx="502920" cy="399288"/>
+          </a:xfrm>
+          <a:prstGeom prst="rect">
+            <a:avLst/>
+          </a:prstGeom>
+          <a:noFill/>
+        </p:spPr>
+        <p:txBody>
+          <a:bodyPr wrap="square">
+            <a:spAutoFit/>
+          </a:bodyPr>
+          <a:lstStyle/>
+          <a:p>
+            <a:pPr algn="ctr"/>
+            <a:r>
+              <a:rPr sz="1100" b="1">
+                <a:solidFill>
+                  <a:srgbClr val="FFFFFF"/>
+                </a:solidFill>
+              </a:rPr>
+              <a:t>5</a:t>
+            </a:r>
+          </a:p>
+        </p:txBody>
+      </p:sp>
+      <p:sp>
+        <p:nvSpPr>
+          <p:cNvPr id="27" name="TextBox 26"/>
+          <p:cNvSpPr txBox="1"/>
+          <p:nvPr/>
+        </p:nvSpPr>
+        <p:spPr>
+          <a:xfrm>
+            <a:off x="868680" y="3150616"/>
+            <a:ext cx="1280160" cy="177800"/>
+          </a:xfrm>
+          <a:prstGeom prst="rect">
+            <a:avLst/>
+          </a:prstGeom>
+          <a:noFill/>
+        </p:spPr>
+        <p:txBody>
+          <a:bodyPr wrap="square">
+            <a:spAutoFit/>
+          </a:bodyPr>
+          <a:lstStyle/>
+          <a:p>
+            <a:pPr algn="l"/>
+            <a:r>
+              <a:rPr sz="900" b="1">
+                <a:solidFill>
+                  <a:srgbClr val="1A237E"/>
+                </a:solidFill>
+              </a:rPr>
+              <a:t>Geopolítica</a:t>
+            </a:r>
+          </a:p>
+        </p:txBody>
+      </p:sp>
+      <p:sp>
+        <p:nvSpPr>
+          <p:cNvPr id="28" name="TextBox 27"/>
+          <p:cNvSpPr txBox="1"/>
+          <p:nvPr/>
+        </p:nvSpPr>
+        <p:spPr>
+          <a:xfrm>
+            <a:off x="868680" y="3328416"/>
+            <a:ext cx="6858000" cy="254000"/>
+          </a:xfrm>
+          <a:prstGeom prst="rect">
+            <a:avLst/>
+          </a:prstGeom>
+          <a:noFill/>
+        </p:spPr>
+        <p:txBody>
+          <a:bodyPr wrap="square">
+            <a:spAutoFit/>
+          </a:bodyPr>
+          <a:lstStyle/>
+          <a:p>
+            <a:pPr algn="l"/>
+            <a:r>
+              <a:rPr sz="1000" b="0">
+                <a:solidFill>
+                  <a:srgbClr val="212121"/>
+                </a:solidFill>
+              </a:rPr>
+              <a:t>El cargo a medida del ex príncipe Andrés: comercio, ballet y amigos peligrosos</a:t>
+            </a:r>
+          </a:p>
+        </p:txBody>
+      </p:sp>
+      <p:sp>
+        <p:nvSpPr>
+          <p:cNvPr id="29" name="Rectangle 28"/>
+          <p:cNvSpPr/>
+          <p:nvPr/>
+        </p:nvSpPr>
+        <p:spPr>
+          <a:xfrm>
+            <a:off x="274320" y="3611880"/>
+            <a:ext cx="8595360" cy="475488"/>
+          </a:xfrm>
+          <a:prstGeom prst="rect">
+            <a:avLst/>
+          </a:prstGeom>
+          <a:solidFill>
+            <a:srgbClr val="EEF1FB"/>
+          </a:solidFill>
+          <a:ln>
+            <a:noFill/>
+          </a:ln>
+        </p:spPr>
+        <p:style>
+          <a:lnRef idx="1">
+            <a:schemeClr val="accent1"/>
+          </a:lnRef>
+          <a:fillRef idx="3">
+            <a:schemeClr val="accent1"/>
+          </a:fillRef>
+          <a:effectRef idx="2">
+            <a:schemeClr val="accent1"/>
+          </a:effectRef>
+          <a:fontRef idx="minor">
+            <a:schemeClr val="lt1"/>
+          </a:fontRef>
+        </p:style>
+        <p:txBody>
+          <a:bodyPr rtlCol="0" anchor="ctr"/>
+          <a:lstStyle/>
+          <a:p>
+            <a:pPr algn="ctr"/>
+          </a:p>
+        </p:txBody>
+      </p:sp>
+      <p:sp>
+        <p:nvSpPr>
+          <p:cNvPr id="30" name="Rectangle 29"/>
+          <p:cNvSpPr/>
+          <p:nvPr/>
+        </p:nvSpPr>
+        <p:spPr>
+          <a:xfrm>
+            <a:off x="274320" y="3611880"/>
+            <a:ext cx="502920" cy="475488"/>
+          </a:xfrm>
+          <a:prstGeom prst="rect">
+            <a:avLst/>
+          </a:prstGeom>
+          <a:solidFill>
+            <a:srgbClr val="2E7D32"/>
+          </a:solidFill>
+          <a:ln>
+            <a:noFill/>
+          </a:ln>
+        </p:spPr>
+        <p:style>
+          <a:lnRef idx="1">
+            <a:schemeClr val="accent1"/>
+          </a:lnRef>
+          <a:fillRef idx="3">
+            <a:schemeClr val="accent1"/>
+          </a:fillRef>
+          <a:effectRef idx="2">
+            <a:schemeClr val="accent1"/>
+          </a:effectRef>
+          <a:fontRef idx="minor">
+            <a:schemeClr val="lt1"/>
+          </a:fontRef>
+        </p:style>
+        <p:txBody>
+          <a:bodyPr rtlCol="0" anchor="ctr"/>
+          <a:lstStyle/>
+          <a:p>
+            <a:pPr algn="ctr"/>
+          </a:p>
+        </p:txBody>
+      </p:sp>
+      <p:sp>
+        <p:nvSpPr>
+          <p:cNvPr id="31" name="TextBox 30"/>
+          <p:cNvSpPr txBox="1"/>
+          <p:nvPr/>
+        </p:nvSpPr>
+        <p:spPr>
+          <a:xfrm>
+            <a:off x="274320" y="3688080"/>
+            <a:ext cx="502920" cy="399288"/>
+          </a:xfrm>
+          <a:prstGeom prst="rect">
+            <a:avLst/>
+          </a:prstGeom>
+          <a:noFill/>
+        </p:spPr>
+        <p:txBody>
+          <a:bodyPr wrap="square">
+            <a:spAutoFit/>
+          </a:bodyPr>
+          <a:lstStyle/>
+          <a:p>
+            <a:pPr algn="ctr"/>
+            <a:r>
+              <a:rPr sz="1100" b="1">
+                <a:solidFill>
+                  <a:srgbClr val="FFFFFF"/>
+                </a:solidFill>
+              </a:rPr>
+              <a:t>5</a:t>
+            </a:r>
+          </a:p>
+        </p:txBody>
+      </p:sp>
+      <p:sp>
+        <p:nvSpPr>
+          <p:cNvPr id="32" name="TextBox 31"/>
+          <p:cNvSpPr txBox="1"/>
+          <p:nvPr/>
+        </p:nvSpPr>
+        <p:spPr>
+          <a:xfrm>
+            <a:off x="868680" y="3662680"/>
+            <a:ext cx="1280160" cy="177800"/>
+          </a:xfrm>
+          <a:prstGeom prst="rect">
+            <a:avLst/>
+          </a:prstGeom>
+          <a:noFill/>
+        </p:spPr>
+        <p:txBody>
+          <a:bodyPr wrap="square">
+            <a:spAutoFit/>
+          </a:bodyPr>
+          <a:lstStyle/>
+          <a:p>
+            <a:pPr algn="l"/>
+            <a:r>
+              <a:rPr sz="900" b="1">
+                <a:solidFill>
+                  <a:srgbClr val="1A237E"/>
+                </a:solidFill>
+              </a:rPr>
+              <a:t>Cooperativismo</a:t>
+            </a:r>
+          </a:p>
+        </p:txBody>
+      </p:sp>
+      <p:sp>
+        <p:nvSpPr>
+          <p:cNvPr id="33" name="TextBox 32"/>
+          <p:cNvSpPr txBox="1"/>
+          <p:nvPr/>
+        </p:nvSpPr>
+        <p:spPr>
+          <a:xfrm>
+            <a:off x="868680" y="3840480"/>
+            <a:ext cx="6858000" cy="254000"/>
+          </a:xfrm>
+          <a:prstGeom prst="rect">
+            <a:avLst/>
+          </a:prstGeom>
+          <a:noFill/>
+        </p:spPr>
+        <p:txBody>
+          <a:bodyPr wrap="square">
+            <a:spAutoFit/>
+          </a:bodyPr>
+          <a:lstStyle/>
+          <a:p>
+            <a:pPr algn="l"/>
+            <a:r>
+              <a:rPr sz="1000" b="0">
+                <a:solidFill>
+                  <a:srgbClr val="212121"/>
+                </a:solidFill>
+              </a:rPr>
+              <a:t>La Diputación de Almería y el Ayuntamiento de El Ejido entregan a Down El Ejido el proyecto de …</a:t>
+            </a:r>
+          </a:p>
+        </p:txBody>
+      </p:sp>
+      <p:sp>
+        <p:nvSpPr>
+          <p:cNvPr id="34" name="Rectangle 33"/>
+          <p:cNvSpPr/>
+          <p:nvPr/>
+        </p:nvSpPr>
+        <p:spPr>
+          <a:xfrm>
+            <a:off x="274320" y="4123944"/>
+            <a:ext cx="8595360" cy="475488"/>
+          </a:xfrm>
+          <a:prstGeom prst="rect">
+            <a:avLst/>
+          </a:prstGeom>
+          <a:solidFill>
+            <a:srgbClr val="FFFFFF"/>
+          </a:solidFill>
+          <a:ln>
+            <a:noFill/>
+          </a:ln>
+        </p:spPr>
+        <p:style>
+          <a:lnRef idx="1">
+            <a:schemeClr val="accent1"/>
+          </a:lnRef>
+          <a:fillRef idx="3">
+            <a:schemeClr val="accent1"/>
+          </a:fillRef>
+          <a:effectRef idx="2">
+            <a:schemeClr val="accent1"/>
+          </a:effectRef>
+          <a:fontRef idx="minor">
+            <a:schemeClr val="lt1"/>
+          </a:fontRef>
+        </p:style>
+        <p:txBody>
+          <a:bodyPr rtlCol="0" anchor="ctr"/>
+          <a:lstStyle/>
+          <a:p>
+            <a:pPr algn="ctr"/>
+          </a:p>
+        </p:txBody>
+      </p:sp>
+      <p:sp>
+        <p:nvSpPr>
+          <p:cNvPr id="35" name="Rectangle 34"/>
+          <p:cNvSpPr/>
+          <p:nvPr/>
+        </p:nvSpPr>
+        <p:spPr>
+          <a:xfrm>
+            <a:off x="274320" y="4123944"/>
+            <a:ext cx="502920" cy="475488"/>
+          </a:xfrm>
+          <a:prstGeom prst="rect">
+            <a:avLst/>
+          </a:prstGeom>
+          <a:solidFill>
+            <a:srgbClr val="2E7D32"/>
+          </a:solidFill>
+          <a:ln>
+            <a:noFill/>
+          </a:ln>
+        </p:spPr>
+        <p:style>
+          <a:lnRef idx="1">
+            <a:schemeClr val="accent1"/>
+          </a:lnRef>
+          <a:fillRef idx="3">
+            <a:schemeClr val="accent1"/>
+          </a:fillRef>
+          <a:effectRef idx="2">
+            <a:schemeClr val="accent1"/>
+          </a:effectRef>
+          <a:fontRef idx="minor">
+            <a:schemeClr val="lt1"/>
+          </a:fontRef>
+        </p:style>
+        <p:txBody>
+          <a:bodyPr rtlCol="0" anchor="ctr"/>
+          <a:lstStyle/>
+          <a:p>
+            <a:pPr algn="ctr"/>
+          </a:p>
+        </p:txBody>
+      </p:sp>
+      <p:sp>
+        <p:nvSpPr>
+          <p:cNvPr id="36" name="TextBox 35"/>
+          <p:cNvSpPr txBox="1"/>
+          <p:nvPr/>
+        </p:nvSpPr>
+        <p:spPr>
+          <a:xfrm>
+            <a:off x="274320" y="4200144"/>
+            <a:ext cx="502920" cy="399288"/>
+          </a:xfrm>
+          <a:prstGeom prst="rect">
+            <a:avLst/>
+          </a:prstGeom>
+          <a:noFill/>
+        </p:spPr>
+        <p:txBody>
+          <a:bodyPr wrap="square">
+            <a:spAutoFit/>
+          </a:bodyPr>
+          <a:lstStyle/>
+          <a:p>
+            <a:pPr algn="ctr"/>
+            <a:r>
+              <a:rPr sz="1100" b="1">
+                <a:solidFill>
+                  <a:srgbClr val="FFFFFF"/>
+                </a:solidFill>
+              </a:rPr>
+              <a:t>5</a:t>
+            </a:r>
+          </a:p>
+        </p:txBody>
+      </p:sp>
+      <p:sp>
+        <p:nvSpPr>
+          <p:cNvPr id="37" name="TextBox 36"/>
+          <p:cNvSpPr txBox="1"/>
+          <p:nvPr/>
+        </p:nvSpPr>
+        <p:spPr>
+          <a:xfrm>
+            <a:off x="868680" y="4174744"/>
+            <a:ext cx="1280160" cy="177800"/>
+          </a:xfrm>
+          <a:prstGeom prst="rect">
+            <a:avLst/>
+          </a:prstGeom>
+          <a:noFill/>
+        </p:spPr>
+        <p:txBody>
+          <a:bodyPr wrap="square">
+            <a:spAutoFit/>
+          </a:bodyPr>
+          <a:lstStyle/>
+          <a:p>
+            <a:pPr algn="l"/>
+            <a:r>
+              <a:rPr sz="900" b="1">
+                <a:solidFill>
+                  <a:srgbClr val="1A237E"/>
+                </a:solidFill>
+              </a:rPr>
+              <a:t>Cooperativismo</a:t>
+            </a:r>
+          </a:p>
+        </p:txBody>
+      </p:sp>
+      <p:sp>
+        <p:nvSpPr>
+          <p:cNvPr id="38" name="TextBox 37"/>
+          <p:cNvSpPr txBox="1"/>
+          <p:nvPr/>
+        </p:nvSpPr>
+        <p:spPr>
+          <a:xfrm>
+            <a:off x="868680" y="4352544"/>
+            <a:ext cx="6858000" cy="254000"/>
+          </a:xfrm>
+          <a:prstGeom prst="rect">
+            <a:avLst/>
+          </a:prstGeom>
+          <a:noFill/>
+        </p:spPr>
+        <p:txBody>
+          <a:bodyPr wrap="square">
+            <a:spAutoFit/>
+          </a:bodyPr>
+          <a:lstStyle/>
+          <a:p>
+            <a:pPr algn="l"/>
+            <a:r>
+              <a:rPr sz="1000" b="0">
+                <a:solidFill>
+                  <a:srgbClr val="212121"/>
+                </a:solidFill>
+              </a:rPr>
+              <a:t>Illa pacta con el Tercer Sector condonar la deuda energética a familias vulnerables</a:t>
+            </a:r>
+          </a:p>
+        </p:txBody>
+      </p:sp>
+      <p:sp>
+        <p:nvSpPr>
+          <p:cNvPr id="39" name="Rectangle 38"/>
+          <p:cNvSpPr/>
+          <p:nvPr/>
+        </p:nvSpPr>
+        <p:spPr>
+          <a:xfrm>
+            <a:off x="274320" y="4636008"/>
+            <a:ext cx="8595360" cy="475488"/>
+          </a:xfrm>
+          <a:prstGeom prst="rect">
+            <a:avLst/>
+          </a:prstGeom>
+          <a:solidFill>
+            <a:srgbClr val="EEF1FB"/>
+          </a:solidFill>
+          <a:ln>
+            <a:noFill/>
+          </a:ln>
+        </p:spPr>
+        <p:style>
+          <a:lnRef idx="1">
+            <a:schemeClr val="accent1"/>
+          </a:lnRef>
+          <a:fillRef idx="3">
+            <a:schemeClr val="accent1"/>
+          </a:fillRef>
+          <a:effectRef idx="2">
+            <a:schemeClr val="accent1"/>
+          </a:effectRef>
+          <a:fontRef idx="minor">
+            <a:schemeClr val="lt1"/>
+          </a:fontRef>
+        </p:style>
+        <p:txBody>
+          <a:bodyPr rtlCol="0" anchor="ctr"/>
+          <a:lstStyle/>
+          <a:p>
+            <a:pPr algn="ctr"/>
+          </a:p>
+        </p:txBody>
+      </p:sp>
+      <p:sp>
+        <p:nvSpPr>
+          <p:cNvPr id="40" name="Rectangle 39"/>
+          <p:cNvSpPr/>
+          <p:nvPr/>
+        </p:nvSpPr>
+        <p:spPr>
+          <a:xfrm>
+            <a:off x="274320" y="4636008"/>
+            <a:ext cx="502920" cy="475488"/>
+          </a:xfrm>
+          <a:prstGeom prst="rect">
+            <a:avLst/>
+          </a:prstGeom>
+          <a:solidFill>
+            <a:srgbClr val="2E7D32"/>
+          </a:solidFill>
+          <a:ln>
+            <a:noFill/>
+          </a:ln>
+        </p:spPr>
+        <p:style>
+          <a:lnRef idx="1">
+            <a:schemeClr val="accent1"/>
+          </a:lnRef>
+          <a:fillRef idx="3">
+            <a:schemeClr val="accent1"/>
+          </a:fillRef>
+          <a:effectRef idx="2">
+            <a:schemeClr val="accent1"/>
+          </a:effectRef>
+          <a:fontRef idx="minor">
+            <a:schemeClr val="lt1"/>
+          </a:fontRef>
+        </p:style>
+        <p:txBody>
+          <a:bodyPr rtlCol="0" anchor="ctr"/>
+          <a:lstStyle/>
+          <a:p>
+            <a:pPr algn="ctr"/>
+          </a:p>
+        </p:txBody>
+      </p:sp>
+      <p:sp>
+        <p:nvSpPr>
+          <p:cNvPr id="41" name="TextBox 40"/>
+          <p:cNvSpPr txBox="1"/>
+          <p:nvPr/>
+        </p:nvSpPr>
+        <p:spPr>
+          <a:xfrm>
+            <a:off x="274320" y="4712208"/>
+            <a:ext cx="502920" cy="399288"/>
+          </a:xfrm>
+          <a:prstGeom prst="rect">
+            <a:avLst/>
+          </a:prstGeom>
+          <a:noFill/>
+        </p:spPr>
+        <p:txBody>
+          <a:bodyPr wrap="square">
+            <a:spAutoFit/>
+          </a:bodyPr>
+          <a:lstStyle/>
+          <a:p>
+            <a:pPr algn="ctr"/>
+            <a:r>
+              <a:rPr sz="1100" b="1">
+                <a:solidFill>
+                  <a:srgbClr val="FFFFFF"/>
+                </a:solidFill>
+              </a:rPr>
+              <a:t>5</a:t>
+            </a:r>
+          </a:p>
+        </p:txBody>
+      </p:sp>
+      <p:sp>
+        <p:nvSpPr>
+          <p:cNvPr id="42" name="TextBox 41"/>
+          <p:cNvSpPr txBox="1"/>
+          <p:nvPr/>
+        </p:nvSpPr>
+        <p:spPr>
+          <a:xfrm>
+            <a:off x="868680" y="4686808"/>
+            <a:ext cx="1280160" cy="177800"/>
+          </a:xfrm>
+          <a:prstGeom prst="rect">
+            <a:avLst/>
+          </a:prstGeom>
+          <a:noFill/>
+        </p:spPr>
+        <p:txBody>
+          <a:bodyPr wrap="square">
+            <a:spAutoFit/>
+          </a:bodyPr>
+          <a:lstStyle/>
+          <a:p>
+            <a:pPr algn="l"/>
+            <a:r>
+              <a:rPr sz="900" b="1">
+                <a:solidFill>
+                  <a:srgbClr val="1A237E"/>
+                </a:solidFill>
+              </a:rPr>
+              <a:t>Cooperativismo</a:t>
+            </a:r>
+          </a:p>
+        </p:txBody>
+      </p:sp>
+      <p:sp>
+        <p:nvSpPr>
+          <p:cNvPr id="43" name="TextBox 42"/>
+          <p:cNvSpPr txBox="1"/>
+          <p:nvPr/>
+        </p:nvSpPr>
+        <p:spPr>
+          <a:xfrm>
+            <a:off x="868680" y="4864608"/>
+            <a:ext cx="6858000" cy="254000"/>
+          </a:xfrm>
+          <a:prstGeom prst="rect">
+            <a:avLst/>
+          </a:prstGeom>
+          <a:noFill/>
+        </p:spPr>
+        <p:txBody>
+          <a:bodyPr wrap="square">
+            <a:spAutoFit/>
+          </a:bodyPr>
+          <a:lstStyle/>
+          <a:p>
+            <a:pPr algn="l"/>
+            <a:r>
+              <a:rPr sz="1000" b="0">
+                <a:solidFill>
+                  <a:srgbClr val="212121"/>
+                </a:solidFill>
+              </a:rPr>
+              <a:t>Eva Longoria brilla en la gran noche solidaria del Festival de Cannes: un espectacular look, ba…</a:t>
             </a:r>
           </a:p>
         </p:txBody>
@@ -4763,7 +5515,7 @@
             <a:avLst/>
           </a:prstGeom>
           <a:solidFill>
-            <a:srgbClr val="E65C00"/>
+            <a:srgbClr val="2E7D32"/>
           </a:solidFill>
           <a:ln>
             <a:noFill/>
@@ -4806,7 +5558,7 @@
             <a:avLst/>
           </a:prstGeom>
           <a:solidFill>
-            <a:srgbClr val="E65C00"/>
+            <a:srgbClr val="2E7D32"/>
           </a:solidFill>
           <a:ln>
             <a:noFill/>
@@ -4863,7 +5615,7 @@
                   <a:srgbClr val="FFFFFF"/>
                 </a:solidFill>
               </a:rPr>
-              <a:t>7/10</a:t>
+              <a:t>5/10</a:t>
             </a:r>
           </a:p>
         </p:txBody>
@@ -4897,7 +5649,7 @@
                   <a:srgbClr val="212121"/>
                 </a:solidFill>
               </a:rPr>
-              <a:t>Trump Tells Warsh to Do ‘Own Thing’ as Fed Chair Sworn In</a:t>
+              <a:t>Sevilla acogerá en 2028 una nueva edición de ADM tras superar las 400 empresas</a:t>
             </a:r>
           </a:p>
         </p:txBody>
@@ -4931,7 +5683,7 @@
                   <a:srgbClr val="757575"/>
                 </a:solidFill>
               </a:rPr>
-              <a:t>President Donald Trump stressed that he wants Kevin Warsh to independently lead the Federal Reserve, as he looked to downplay investor concern that he would pre…</a:t>
+              <a:t>El evento Aeroespace &amp; Defense Meetings (ADM) Sevilla 2026 ha cerrado su edición con un balance «enormemente positivo», tras alcanzar la participación de 415 em…</a:t>
             </a:r>
           </a:p>
         </p:txBody>
@@ -4965,7 +5717,7 @@
                   <a:srgbClr val="757575"/>
                 </a:solidFill>
               </a:rPr>
-              <a:t>📰 feeds.bloomberg.com</a:t>
+              <a:t>📰 Www.abc.es</a:t>
             </a:r>
           </a:p>
         </p:txBody>
@@ -5028,7 +5780,7 @@
             <a:avLst/>
           </a:prstGeom>
           <a:solidFill>
-            <a:srgbClr val="E65C00"/>
+            <a:srgbClr val="2E7D32"/>
           </a:solidFill>
           <a:ln>
             <a:noFill/>
@@ -5071,7 +5823,7 @@
             <a:avLst/>
           </a:prstGeom>
           <a:solidFill>
-            <a:srgbClr val="E65C00"/>
+            <a:srgbClr val="2E7D32"/>
           </a:solidFill>
           <a:ln>
             <a:noFill/>
@@ -5128,7 +5880,7 @@
                   <a:srgbClr val="FFFFFF"/>
                 </a:solidFill>
               </a:rPr>
-              <a:t>7/10</a:t>
+              <a:t>5/10</a:t>
             </a:r>
           </a:p>
         </p:txBody>
@@ -5162,7 +5914,7 @@
                   <a:srgbClr val="212121"/>
                 </a:solidFill>
               </a:rPr>
-              <a:t>Warsh Says He'll Lead a 'Reform-Oriented' Fed</a:t>
+              <a:t>Petróleo sube más de 3% tras nueva línea roja de Irán sobre el uranio</a:t>
             </a:r>
           </a:p>
         </p:txBody>
@@ -5196,7 +5948,7 @@
                   <a:srgbClr val="757575"/>
                 </a:solidFill>
               </a:rPr>
-              <a:t>Kevin Warsh says he'll lead a "reform-oriented" Federal Reserve and goals will be pursued with "independence and resolve." In the months leading up to his nomin…</a:t>
+              <a:t>El mercado petrolero reaccionó con fuerza a un nuevo endurecimiento de la postura iraní sobre su uranio enriquecido, en un contexto de negociaciones frágiles co…</a:t>
             </a:r>
           </a:p>
         </p:txBody>
@@ -5230,7 +5982,7 @@
                   <a:srgbClr val="757575"/>
                 </a:solidFill>
               </a:rPr>
-              <a:t>📰 feeds.bloomberg.com</a:t>
+              <a:t>📰 Diariobitcoin.com</a:t>
             </a:r>
           </a:p>
         </p:txBody>
@@ -5427,7 +6179,7 @@
                   <a:srgbClr val="212121"/>
                 </a:solidFill>
               </a:rPr>
-              <a:t>Progress in Iran Talks Undercut Over Uranium, Tolls</a:t>
+              <a:t>Resumen del Warhammer Skulls 2026: más Space Marine 2, Helldivers 2, demo de Boltgun II, s…</a:t>
             </a:r>
           </a:p>
         </p:txBody>
@@ -5461,7 +6213,7 @@
                   <a:srgbClr val="757575"/>
                 </a:solidFill>
               </a:rPr>
-              <a:t>Iran said the latest proposal from the US partly bridged the gap between the warring sides, but comments from the Islamic Republic’s supreme leader about keepin…</a:t>
+              <a:t>Al fin ha llegado uno de los días más importantes del año para los fans de Warhammer 40K. Se acaba de celebrar el Warhammer Skulls 2026, el evento anual de la f…</a:t>
             </a:r>
           </a:p>
         </p:txBody>
@@ -5495,7 +6247,7 @@
                   <a:srgbClr val="757575"/>
                 </a:solidFill>
               </a:rPr>
-              <a:t>📰 feeds.bloomberg.com</a:t>
+              <a:t>📰 Vida Extra</a:t>
             </a:r>
           </a:p>
         </p:txBody>
@@ -5558,7 +6310,7 @@
             <a:avLst/>
           </a:prstGeom>
           <a:solidFill>
-            <a:srgbClr val="E65C00"/>
+            <a:srgbClr val="2E7D32"/>
           </a:solidFill>
           <a:ln>
             <a:noFill/>
@@ -5601,7 +6353,7 @@
             <a:avLst/>
           </a:prstGeom>
           <a:solidFill>
-            <a:srgbClr val="E65C00"/>
+            <a:srgbClr val="2E7D32"/>
           </a:solidFill>
           <a:ln>
             <a:noFill/>
@@ -5658,7 +6410,7 @@
                   <a:srgbClr val="FFFFFF"/>
                 </a:solidFill>
               </a:rPr>
-              <a:t>7/10</a:t>
+              <a:t>5/10</a:t>
             </a:r>
           </a:p>
         </p:txBody>
@@ -5692,7 +6444,7 @@
                   <a:srgbClr val="212121"/>
                 </a:solidFill>
               </a:rPr>
-              <a:t>Kevin Warsh Sworn In as 17th Federal Reserve Chair</a:t>
+              <a:t>El cargo a medida del ex príncipe Andrés: comercio, ballet y amigos peligrosos</a:t>
             </a:r>
           </a:p>
         </p:txBody>
@@ -5726,7 +6478,7 @@
                   <a:srgbClr val="757575"/>
                 </a:solidFill>
               </a:rPr>
-              <a:t>Kevin Warsh was sworn into office as the 17th chair of the Fed, promising the biggest shakeup in decades at the US central bank, and takes over at a tense momen…</a:t>
+              <a:t>Un representante para Comercio e Inversión cuyas condiciones de laborales determinan que "tiene preferencia por los países más sofisticados, preferiblemente aqu…</a:t>
             </a:r>
           </a:p>
         </p:txBody>
@@ -5760,7 +6512,7 @@
                   <a:srgbClr val="757575"/>
                 </a:solidFill>
               </a:rPr>
-              <a:t>📰 feeds.bloomberg.com</a:t>
+              <a:t>📰 El Mundo</a:t>
             </a:r>
           </a:p>
         </p:txBody>
@@ -6144,14 +6896,143 @@
       </p:sp>
       <p:sp>
         <p:nvSpPr>
-          <p:cNvPr id="4" name="TextBox 3"/>
+          <p:cNvPr id="4" name="Rectangle 3"/>
+          <p:cNvSpPr/>
+          <p:nvPr/>
+        </p:nvSpPr>
+        <p:spPr>
+          <a:xfrm>
+            <a:off x="274320" y="1005840"/>
+            <a:ext cx="8595360" cy="1234440"/>
+          </a:xfrm>
+          <a:prstGeom prst="rect">
+            <a:avLst/>
+          </a:prstGeom>
+          <a:solidFill>
+            <a:srgbClr val="FFFFFF"/>
+          </a:solidFill>
+          <a:ln>
+            <a:noFill/>
+          </a:ln>
+        </p:spPr>
+        <p:style>
+          <a:lnRef idx="1">
+            <a:schemeClr val="accent1"/>
+          </a:lnRef>
+          <a:fillRef idx="3">
+            <a:schemeClr val="accent1"/>
+          </a:fillRef>
+          <a:effectRef idx="2">
+            <a:schemeClr val="accent1"/>
+          </a:effectRef>
+          <a:fontRef idx="minor">
+            <a:schemeClr val="lt1"/>
+          </a:fontRef>
+        </p:style>
+        <p:txBody>
+          <a:bodyPr rtlCol="0" anchor="ctr"/>
+          <a:lstStyle/>
+          <a:p>
+            <a:pPr algn="ctr"/>
+          </a:p>
+        </p:txBody>
+      </p:sp>
+      <p:sp>
+        <p:nvSpPr>
+          <p:cNvPr id="5" name="Rectangle 4"/>
+          <p:cNvSpPr/>
+          <p:nvPr/>
+        </p:nvSpPr>
+        <p:spPr>
+          <a:xfrm>
+            <a:off x="274320" y="1005840"/>
+            <a:ext cx="54864" cy="1234440"/>
+          </a:xfrm>
+          <a:prstGeom prst="rect">
+            <a:avLst/>
+          </a:prstGeom>
+          <a:solidFill>
+            <a:srgbClr val="E65C00"/>
+          </a:solidFill>
+          <a:ln>
+            <a:noFill/>
+          </a:ln>
+        </p:spPr>
+        <p:style>
+          <a:lnRef idx="1">
+            <a:schemeClr val="accent1"/>
+          </a:lnRef>
+          <a:fillRef idx="3">
+            <a:schemeClr val="accent1"/>
+          </a:fillRef>
+          <a:effectRef idx="2">
+            <a:schemeClr val="accent1"/>
+          </a:effectRef>
+          <a:fontRef idx="minor">
+            <a:schemeClr val="lt1"/>
+          </a:fontRef>
+        </p:style>
+        <p:txBody>
+          <a:bodyPr rtlCol="0" anchor="ctr"/>
+          <a:lstStyle/>
+          <a:p>
+            <a:pPr algn="ctr"/>
+          </a:p>
+        </p:txBody>
+      </p:sp>
+      <p:sp>
+        <p:nvSpPr>
+          <p:cNvPr id="6" name="Rectangle 5"/>
+          <p:cNvSpPr/>
+          <p:nvPr/>
+        </p:nvSpPr>
+        <p:spPr>
+          <a:xfrm>
+            <a:off x="8138160" y="1097280"/>
+            <a:ext cx="640080" cy="274320"/>
+          </a:xfrm>
+          <a:prstGeom prst="rect">
+            <a:avLst/>
+          </a:prstGeom>
+          <a:solidFill>
+            <a:srgbClr val="E65C00"/>
+          </a:solidFill>
+          <a:ln>
+            <a:noFill/>
+          </a:ln>
+        </p:spPr>
+        <p:style>
+          <a:lnRef idx="1">
+            <a:schemeClr val="accent1"/>
+          </a:lnRef>
+          <a:fillRef idx="3">
+            <a:schemeClr val="accent1"/>
+          </a:fillRef>
+          <a:effectRef idx="2">
+            <a:schemeClr val="accent1"/>
+          </a:effectRef>
+          <a:fontRef idx="minor">
+            <a:schemeClr val="lt1"/>
+          </a:fontRef>
+        </p:style>
+        <p:txBody>
+          <a:bodyPr rtlCol="0" anchor="ctr"/>
+          <a:lstStyle/>
+          <a:p>
+            <a:pPr algn="ctr"/>
+          </a:p>
+        </p:txBody>
+      </p:sp>
+      <p:sp>
+        <p:nvSpPr>
+          <p:cNvPr id="7" name="TextBox 6"/>
           <p:cNvSpPr txBox="1"/>
           <p:nvPr/>
         </p:nvSpPr>
         <p:spPr>
           <a:xfrm>
-            <a:off x="457200" y="1371600"/>
-            <a:ext cx="8229600" cy="914400"/>
+            <a:off x="8138160" y="1097280"/>
+            <a:ext cx="640080" cy="274320"/>
           </a:xfrm>
           <a:prstGeom prst="rect">
             <a:avLst/>
@@ -6164,14 +7045,911 @@
           </a:bodyPr>
           <a:lstStyle/>
           <a:p>
+            <a:pPr algn="ctr"/>
+            <a:r>
+              <a:rPr sz="900" b="1">
+                <a:solidFill>
+                  <a:srgbClr val="FFFFFF"/>
+                </a:solidFill>
+              </a:rPr>
+              <a:t>7/10</a:t>
+            </a:r>
+          </a:p>
+        </p:txBody>
+      </p:sp>
+      <p:sp>
+        <p:nvSpPr>
+          <p:cNvPr id="8" name="TextBox 7"/>
+          <p:cNvSpPr txBox="1"/>
+          <p:nvPr/>
+        </p:nvSpPr>
+        <p:spPr>
+          <a:xfrm>
+            <a:off x="457200" y="1097280"/>
+            <a:ext cx="7498080" cy="347472"/>
+          </a:xfrm>
+          <a:prstGeom prst="rect">
+            <a:avLst/>
+          </a:prstGeom>
+          <a:noFill/>
+        </p:spPr>
+        <p:txBody>
+          <a:bodyPr wrap="square">
+            <a:spAutoFit/>
+          </a:bodyPr>
+          <a:lstStyle/>
+          <a:p>
             <a:pPr algn="l"/>
             <a:r>
-              <a:rPr sz="1300" b="0">
+              <a:rPr sz="1100" b="1">
+                <a:solidFill>
+                  <a:srgbClr val="212121"/>
+                </a:solidFill>
+              </a:rPr>
+              <a:t>Nuevo aumento confirmado para empleados de comercio: quiénes lo cobran y de cuánto es la s…</a:t>
+            </a:r>
+          </a:p>
+        </p:txBody>
+      </p:sp>
+      <p:sp>
+        <p:nvSpPr>
+          <p:cNvPr id="9" name="TextBox 8"/>
+          <p:cNvSpPr txBox="1"/>
+          <p:nvPr/>
+        </p:nvSpPr>
+        <p:spPr>
+          <a:xfrm>
+            <a:off x="457200" y="1444752"/>
+            <a:ext cx="8321040" cy="502920"/>
+          </a:xfrm>
+          <a:prstGeom prst="rect">
+            <a:avLst/>
+          </a:prstGeom>
+          <a:noFill/>
+        </p:spPr>
+        <p:txBody>
+          <a:bodyPr wrap="square">
+            <a:spAutoFit/>
+          </a:bodyPr>
+          <a:lstStyle/>
+          <a:p>
+            <a:pPr algn="l"/>
+            <a:r>
+              <a:rPr sz="900" b="0">
                 <a:solidFill>
                   <a:srgbClr val="757575"/>
                 </a:solidFill>
               </a:rPr>
-              <a:t>Sin noticias disponibles para esta categoría.</a:t>
+              <a:t>La Federación Argentina de Empleados de Comercio y Servicios (FAECYS) cerró otro acuerdo paritario para una de sus ramas. Los detalles.</a:t>
+            </a:r>
+          </a:p>
+        </p:txBody>
+      </p:sp>
+      <p:sp>
+        <p:nvSpPr>
+          <p:cNvPr id="10" name="TextBox 9"/>
+          <p:cNvSpPr txBox="1"/>
+          <p:nvPr/>
+        </p:nvSpPr>
+        <p:spPr>
+          <a:xfrm>
+            <a:off x="457200" y="1965960"/>
+            <a:ext cx="3657600" cy="228600"/>
+          </a:xfrm>
+          <a:prstGeom prst="rect">
+            <a:avLst/>
+          </a:prstGeom>
+          <a:noFill/>
+        </p:spPr>
+        <p:txBody>
+          <a:bodyPr wrap="square">
+            <a:spAutoFit/>
+          </a:bodyPr>
+          <a:lstStyle/>
+          <a:p>
+            <a:pPr algn="l"/>
+            <a:r>
+              <a:rPr sz="800" b="0">
+                <a:solidFill>
+                  <a:srgbClr val="757575"/>
+                </a:solidFill>
+              </a:rPr>
+              <a:t>📰 El Cronista Comercial</a:t>
+            </a:r>
+          </a:p>
+        </p:txBody>
+      </p:sp>
+      <p:sp>
+        <p:nvSpPr>
+          <p:cNvPr id="11" name="Rectangle 10"/>
+          <p:cNvSpPr/>
+          <p:nvPr/>
+        </p:nvSpPr>
+        <p:spPr>
+          <a:xfrm>
+            <a:off x="274320" y="2350008"/>
+            <a:ext cx="8595360" cy="1234440"/>
+          </a:xfrm>
+          <a:prstGeom prst="rect">
+            <a:avLst/>
+          </a:prstGeom>
+          <a:solidFill>
+            <a:srgbClr val="FFFFFF"/>
+          </a:solidFill>
+          <a:ln>
+            <a:noFill/>
+          </a:ln>
+        </p:spPr>
+        <p:style>
+          <a:lnRef idx="1">
+            <a:schemeClr val="accent1"/>
+          </a:lnRef>
+          <a:fillRef idx="3">
+            <a:schemeClr val="accent1"/>
+          </a:fillRef>
+          <a:effectRef idx="2">
+            <a:schemeClr val="accent1"/>
+          </a:effectRef>
+          <a:fontRef idx="minor">
+            <a:schemeClr val="lt1"/>
+          </a:fontRef>
+        </p:style>
+        <p:txBody>
+          <a:bodyPr rtlCol="0" anchor="ctr"/>
+          <a:lstStyle/>
+          <a:p>
+            <a:pPr algn="ctr"/>
+          </a:p>
+        </p:txBody>
+      </p:sp>
+      <p:sp>
+        <p:nvSpPr>
+          <p:cNvPr id="12" name="Rectangle 11"/>
+          <p:cNvSpPr/>
+          <p:nvPr/>
+        </p:nvSpPr>
+        <p:spPr>
+          <a:xfrm>
+            <a:off x="274320" y="2350008"/>
+            <a:ext cx="54864" cy="1234440"/>
+          </a:xfrm>
+          <a:prstGeom prst="rect">
+            <a:avLst/>
+          </a:prstGeom>
+          <a:solidFill>
+            <a:srgbClr val="2E7D32"/>
+          </a:solidFill>
+          <a:ln>
+            <a:noFill/>
+          </a:ln>
+        </p:spPr>
+        <p:style>
+          <a:lnRef idx="1">
+            <a:schemeClr val="accent1"/>
+          </a:lnRef>
+          <a:fillRef idx="3">
+            <a:schemeClr val="accent1"/>
+          </a:fillRef>
+          <a:effectRef idx="2">
+            <a:schemeClr val="accent1"/>
+          </a:effectRef>
+          <a:fontRef idx="minor">
+            <a:schemeClr val="lt1"/>
+          </a:fontRef>
+        </p:style>
+        <p:txBody>
+          <a:bodyPr rtlCol="0" anchor="ctr"/>
+          <a:lstStyle/>
+          <a:p>
+            <a:pPr algn="ctr"/>
+          </a:p>
+        </p:txBody>
+      </p:sp>
+      <p:sp>
+        <p:nvSpPr>
+          <p:cNvPr id="13" name="Rectangle 12"/>
+          <p:cNvSpPr/>
+          <p:nvPr/>
+        </p:nvSpPr>
+        <p:spPr>
+          <a:xfrm>
+            <a:off x="8138160" y="2441448"/>
+            <a:ext cx="640080" cy="274320"/>
+          </a:xfrm>
+          <a:prstGeom prst="rect">
+            <a:avLst/>
+          </a:prstGeom>
+          <a:solidFill>
+            <a:srgbClr val="2E7D32"/>
+          </a:solidFill>
+          <a:ln>
+            <a:noFill/>
+          </a:ln>
+        </p:spPr>
+        <p:style>
+          <a:lnRef idx="1">
+            <a:schemeClr val="accent1"/>
+          </a:lnRef>
+          <a:fillRef idx="3">
+            <a:schemeClr val="accent1"/>
+          </a:fillRef>
+          <a:effectRef idx="2">
+            <a:schemeClr val="accent1"/>
+          </a:effectRef>
+          <a:fontRef idx="minor">
+            <a:schemeClr val="lt1"/>
+          </a:fontRef>
+        </p:style>
+        <p:txBody>
+          <a:bodyPr rtlCol="0" anchor="ctr"/>
+          <a:lstStyle/>
+          <a:p>
+            <a:pPr algn="ctr"/>
+          </a:p>
+        </p:txBody>
+      </p:sp>
+      <p:sp>
+        <p:nvSpPr>
+          <p:cNvPr id="14" name="TextBox 13"/>
+          <p:cNvSpPr txBox="1"/>
+          <p:nvPr/>
+        </p:nvSpPr>
+        <p:spPr>
+          <a:xfrm>
+            <a:off x="8138160" y="2441448"/>
+            <a:ext cx="640080" cy="274320"/>
+          </a:xfrm>
+          <a:prstGeom prst="rect">
+            <a:avLst/>
+          </a:prstGeom>
+          <a:noFill/>
+        </p:spPr>
+        <p:txBody>
+          <a:bodyPr wrap="square">
+            <a:spAutoFit/>
+          </a:bodyPr>
+          <a:lstStyle/>
+          <a:p>
+            <a:pPr algn="ctr"/>
+            <a:r>
+              <a:rPr sz="900" b="1">
+                <a:solidFill>
+                  <a:srgbClr val="FFFFFF"/>
+                </a:solidFill>
+              </a:rPr>
+              <a:t>5/10</a:t>
+            </a:r>
+          </a:p>
+        </p:txBody>
+      </p:sp>
+      <p:sp>
+        <p:nvSpPr>
+          <p:cNvPr id="15" name="TextBox 14"/>
+          <p:cNvSpPr txBox="1"/>
+          <p:nvPr/>
+        </p:nvSpPr>
+        <p:spPr>
+          <a:xfrm>
+            <a:off x="457200" y="2441448"/>
+            <a:ext cx="7498080" cy="347472"/>
+          </a:xfrm>
+          <a:prstGeom prst="rect">
+            <a:avLst/>
+          </a:prstGeom>
+          <a:noFill/>
+        </p:spPr>
+        <p:txBody>
+          <a:bodyPr wrap="square">
+            <a:spAutoFit/>
+          </a:bodyPr>
+          <a:lstStyle/>
+          <a:p>
+            <a:pPr algn="l"/>
+            <a:r>
+              <a:rPr sz="1100" b="1">
+                <a:solidFill>
+                  <a:srgbClr val="212121"/>
+                </a:solidFill>
+              </a:rPr>
+              <a:t>Eva Longoria brilla en la gran noche solidaria del Festival de Cannes: un espectacular loo…</a:t>
+            </a:r>
+          </a:p>
+        </p:txBody>
+      </p:sp>
+      <p:sp>
+        <p:nvSpPr>
+          <p:cNvPr id="16" name="TextBox 15"/>
+          <p:cNvSpPr txBox="1"/>
+          <p:nvPr/>
+        </p:nvSpPr>
+        <p:spPr>
+          <a:xfrm>
+            <a:off x="457200" y="2788920"/>
+            <a:ext cx="8321040" cy="502920"/>
+          </a:xfrm>
+          <a:prstGeom prst="rect">
+            <a:avLst/>
+          </a:prstGeom>
+          <a:noFill/>
+        </p:spPr>
+        <p:txBody>
+          <a:bodyPr wrap="square">
+            <a:spAutoFit/>
+          </a:bodyPr>
+          <a:lstStyle/>
+          <a:p>
+            <a:pPr algn="l"/>
+            <a:r>
+              <a:rPr sz="900" b="0">
+                <a:solidFill>
+                  <a:srgbClr val="757575"/>
+                </a:solidFill>
+              </a:rPr>
+              <a:t>El evento ha reunido a figuras internacionales del cine, la música y el activismo social</a:t>
+            </a:r>
+          </a:p>
+        </p:txBody>
+      </p:sp>
+      <p:sp>
+        <p:nvSpPr>
+          <p:cNvPr id="17" name="TextBox 16"/>
+          <p:cNvSpPr txBox="1"/>
+          <p:nvPr/>
+        </p:nvSpPr>
+        <p:spPr>
+          <a:xfrm>
+            <a:off x="457200" y="3310128"/>
+            <a:ext cx="3657600" cy="228600"/>
+          </a:xfrm>
+          <a:prstGeom prst="rect">
+            <a:avLst/>
+          </a:prstGeom>
+          <a:noFill/>
+        </p:spPr>
+        <p:txBody>
+          <a:bodyPr wrap="square">
+            <a:spAutoFit/>
+          </a:bodyPr>
+          <a:lstStyle/>
+          <a:p>
+            <a:pPr algn="l"/>
+            <a:r>
+              <a:rPr sz="800" b="0">
+                <a:solidFill>
+                  <a:srgbClr val="757575"/>
+                </a:solidFill>
+              </a:rPr>
+              <a:t>📰 Hola</a:t>
+            </a:r>
+          </a:p>
+        </p:txBody>
+      </p:sp>
+      <p:sp>
+        <p:nvSpPr>
+          <p:cNvPr id="18" name="Rectangle 17"/>
+          <p:cNvSpPr/>
+          <p:nvPr/>
+        </p:nvSpPr>
+        <p:spPr>
+          <a:xfrm>
+            <a:off x="274320" y="3694176"/>
+            <a:ext cx="8595360" cy="1234440"/>
+          </a:xfrm>
+          <a:prstGeom prst="rect">
+            <a:avLst/>
+          </a:prstGeom>
+          <a:solidFill>
+            <a:srgbClr val="FFFFFF"/>
+          </a:solidFill>
+          <a:ln>
+            <a:noFill/>
+          </a:ln>
+        </p:spPr>
+        <p:style>
+          <a:lnRef idx="1">
+            <a:schemeClr val="accent1"/>
+          </a:lnRef>
+          <a:fillRef idx="3">
+            <a:schemeClr val="accent1"/>
+          </a:fillRef>
+          <a:effectRef idx="2">
+            <a:schemeClr val="accent1"/>
+          </a:effectRef>
+          <a:fontRef idx="minor">
+            <a:schemeClr val="lt1"/>
+          </a:fontRef>
+        </p:style>
+        <p:txBody>
+          <a:bodyPr rtlCol="0" anchor="ctr"/>
+          <a:lstStyle/>
+          <a:p>
+            <a:pPr algn="ctr"/>
+          </a:p>
+        </p:txBody>
+      </p:sp>
+      <p:sp>
+        <p:nvSpPr>
+          <p:cNvPr id="19" name="Rectangle 18"/>
+          <p:cNvSpPr/>
+          <p:nvPr/>
+        </p:nvSpPr>
+        <p:spPr>
+          <a:xfrm>
+            <a:off x="274320" y="3694176"/>
+            <a:ext cx="54864" cy="1234440"/>
+          </a:xfrm>
+          <a:prstGeom prst="rect">
+            <a:avLst/>
+          </a:prstGeom>
+          <a:solidFill>
+            <a:srgbClr val="2E7D32"/>
+          </a:solidFill>
+          <a:ln>
+            <a:noFill/>
+          </a:ln>
+        </p:spPr>
+        <p:style>
+          <a:lnRef idx="1">
+            <a:schemeClr val="accent1"/>
+          </a:lnRef>
+          <a:fillRef idx="3">
+            <a:schemeClr val="accent1"/>
+          </a:fillRef>
+          <a:effectRef idx="2">
+            <a:schemeClr val="accent1"/>
+          </a:effectRef>
+          <a:fontRef idx="minor">
+            <a:schemeClr val="lt1"/>
+          </a:fontRef>
+        </p:style>
+        <p:txBody>
+          <a:bodyPr rtlCol="0" anchor="ctr"/>
+          <a:lstStyle/>
+          <a:p>
+            <a:pPr algn="ctr"/>
+          </a:p>
+        </p:txBody>
+      </p:sp>
+      <p:sp>
+        <p:nvSpPr>
+          <p:cNvPr id="20" name="Rectangle 19"/>
+          <p:cNvSpPr/>
+          <p:nvPr/>
+        </p:nvSpPr>
+        <p:spPr>
+          <a:xfrm>
+            <a:off x="8138160" y="3785616"/>
+            <a:ext cx="640080" cy="274320"/>
+          </a:xfrm>
+          <a:prstGeom prst="rect">
+            <a:avLst/>
+          </a:prstGeom>
+          <a:solidFill>
+            <a:srgbClr val="2E7D32"/>
+          </a:solidFill>
+          <a:ln>
+            <a:noFill/>
+          </a:ln>
+        </p:spPr>
+        <p:style>
+          <a:lnRef idx="1">
+            <a:schemeClr val="accent1"/>
+          </a:lnRef>
+          <a:fillRef idx="3">
+            <a:schemeClr val="accent1"/>
+          </a:fillRef>
+          <a:effectRef idx="2">
+            <a:schemeClr val="accent1"/>
+          </a:effectRef>
+          <a:fontRef idx="minor">
+            <a:schemeClr val="lt1"/>
+          </a:fontRef>
+        </p:style>
+        <p:txBody>
+          <a:bodyPr rtlCol="0" anchor="ctr"/>
+          <a:lstStyle/>
+          <a:p>
+            <a:pPr algn="ctr"/>
+          </a:p>
+        </p:txBody>
+      </p:sp>
+      <p:sp>
+        <p:nvSpPr>
+          <p:cNvPr id="21" name="TextBox 20"/>
+          <p:cNvSpPr txBox="1"/>
+          <p:nvPr/>
+        </p:nvSpPr>
+        <p:spPr>
+          <a:xfrm>
+            <a:off x="8138160" y="3785616"/>
+            <a:ext cx="640080" cy="274320"/>
+          </a:xfrm>
+          <a:prstGeom prst="rect">
+            <a:avLst/>
+          </a:prstGeom>
+          <a:noFill/>
+        </p:spPr>
+        <p:txBody>
+          <a:bodyPr wrap="square">
+            <a:spAutoFit/>
+          </a:bodyPr>
+          <a:lstStyle/>
+          <a:p>
+            <a:pPr algn="ctr"/>
+            <a:r>
+              <a:rPr sz="900" b="1">
+                <a:solidFill>
+                  <a:srgbClr val="FFFFFF"/>
+                </a:solidFill>
+              </a:rPr>
+              <a:t>5/10</a:t>
+            </a:r>
+          </a:p>
+        </p:txBody>
+      </p:sp>
+      <p:sp>
+        <p:nvSpPr>
+          <p:cNvPr id="22" name="TextBox 21"/>
+          <p:cNvSpPr txBox="1"/>
+          <p:nvPr/>
+        </p:nvSpPr>
+        <p:spPr>
+          <a:xfrm>
+            <a:off x="457200" y="3785616"/>
+            <a:ext cx="7498080" cy="347472"/>
+          </a:xfrm>
+          <a:prstGeom prst="rect">
+            <a:avLst/>
+          </a:prstGeom>
+          <a:noFill/>
+        </p:spPr>
+        <p:txBody>
+          <a:bodyPr wrap="square">
+            <a:spAutoFit/>
+          </a:bodyPr>
+          <a:lstStyle/>
+          <a:p>
+            <a:pPr algn="l"/>
+            <a:r>
+              <a:rPr sz="1100" b="1">
+                <a:solidFill>
+                  <a:srgbClr val="212121"/>
+                </a:solidFill>
+              </a:rPr>
+              <a:t>Illa pacta con el Tercer Sector condonar la deuda energética a familias vulnerables</a:t>
+            </a:r>
+          </a:p>
+        </p:txBody>
+      </p:sp>
+      <p:sp>
+        <p:nvSpPr>
+          <p:cNvPr id="23" name="TextBox 22"/>
+          <p:cNvSpPr txBox="1"/>
+          <p:nvPr/>
+        </p:nvSpPr>
+        <p:spPr>
+          <a:xfrm>
+            <a:off x="457200" y="4133088"/>
+            <a:ext cx="8321040" cy="502920"/>
+          </a:xfrm>
+          <a:prstGeom prst="rect">
+            <a:avLst/>
+          </a:prstGeom>
+          <a:noFill/>
+        </p:spPr>
+        <p:txBody>
+          <a:bodyPr wrap="square">
+            <a:spAutoFit/>
+          </a:bodyPr>
+          <a:lstStyle/>
+          <a:p>
+            <a:pPr algn="l"/>
+            <a:r>
+              <a:rPr sz="900" b="0">
+                <a:solidFill>
+                  <a:srgbClr val="757575"/>
+                </a:solidFill>
+              </a:rPr>
+              <a:t>El presidente de la Generalitat, Salvador Illa, y el de la Taula del Tercer Sector Social de Catalunya, Xavier Trabado, han firmado este jueves un acuerdo que c…</a:t>
+            </a:r>
+          </a:p>
+        </p:txBody>
+      </p:sp>
+      <p:sp>
+        <p:nvSpPr>
+          <p:cNvPr id="24" name="TextBox 23"/>
+          <p:cNvSpPr txBox="1"/>
+          <p:nvPr/>
+        </p:nvSpPr>
+        <p:spPr>
+          <a:xfrm>
+            <a:off x="457200" y="4654296"/>
+            <a:ext cx="3657600" cy="228600"/>
+          </a:xfrm>
+          <a:prstGeom prst="rect">
+            <a:avLst/>
+          </a:prstGeom>
+          <a:noFill/>
+        </p:spPr>
+        <p:txBody>
+          <a:bodyPr wrap="square">
+            <a:spAutoFit/>
+          </a:bodyPr>
+          <a:lstStyle/>
+          <a:p>
+            <a:pPr algn="l"/>
+            <a:r>
+              <a:rPr sz="800" b="0">
+                <a:solidFill>
+                  <a:srgbClr val="757575"/>
+                </a:solidFill>
+              </a:rPr>
+              <a:t>📰 Europapress.es</a:t>
+            </a:r>
+          </a:p>
+        </p:txBody>
+      </p:sp>
+      <p:sp>
+        <p:nvSpPr>
+          <p:cNvPr id="25" name="Rectangle 24"/>
+          <p:cNvSpPr/>
+          <p:nvPr/>
+        </p:nvSpPr>
+        <p:spPr>
+          <a:xfrm>
+            <a:off x="274320" y="5038344"/>
+            <a:ext cx="8595360" cy="1234440"/>
+          </a:xfrm>
+          <a:prstGeom prst="rect">
+            <a:avLst/>
+          </a:prstGeom>
+          <a:solidFill>
+            <a:srgbClr val="FFFFFF"/>
+          </a:solidFill>
+          <a:ln>
+            <a:noFill/>
+          </a:ln>
+        </p:spPr>
+        <p:style>
+          <a:lnRef idx="1">
+            <a:schemeClr val="accent1"/>
+          </a:lnRef>
+          <a:fillRef idx="3">
+            <a:schemeClr val="accent1"/>
+          </a:fillRef>
+          <a:effectRef idx="2">
+            <a:schemeClr val="accent1"/>
+          </a:effectRef>
+          <a:fontRef idx="minor">
+            <a:schemeClr val="lt1"/>
+          </a:fontRef>
+        </p:style>
+        <p:txBody>
+          <a:bodyPr rtlCol="0" anchor="ctr"/>
+          <a:lstStyle/>
+          <a:p>
+            <a:pPr algn="ctr"/>
+          </a:p>
+        </p:txBody>
+      </p:sp>
+      <p:sp>
+        <p:nvSpPr>
+          <p:cNvPr id="26" name="Rectangle 25"/>
+          <p:cNvSpPr/>
+          <p:nvPr/>
+        </p:nvSpPr>
+        <p:spPr>
+          <a:xfrm>
+            <a:off x="274320" y="5038344"/>
+            <a:ext cx="54864" cy="1234440"/>
+          </a:xfrm>
+          <a:prstGeom prst="rect">
+            <a:avLst/>
+          </a:prstGeom>
+          <a:solidFill>
+            <a:srgbClr val="2E7D32"/>
+          </a:solidFill>
+          <a:ln>
+            <a:noFill/>
+          </a:ln>
+        </p:spPr>
+        <p:style>
+          <a:lnRef idx="1">
+            <a:schemeClr val="accent1"/>
+          </a:lnRef>
+          <a:fillRef idx="3">
+            <a:schemeClr val="accent1"/>
+          </a:fillRef>
+          <a:effectRef idx="2">
+            <a:schemeClr val="accent1"/>
+          </a:effectRef>
+          <a:fontRef idx="minor">
+            <a:schemeClr val="lt1"/>
+          </a:fontRef>
+        </p:style>
+        <p:txBody>
+          <a:bodyPr rtlCol="0" anchor="ctr"/>
+          <a:lstStyle/>
+          <a:p>
+            <a:pPr algn="ctr"/>
+          </a:p>
+        </p:txBody>
+      </p:sp>
+      <p:sp>
+        <p:nvSpPr>
+          <p:cNvPr id="27" name="Rectangle 26"/>
+          <p:cNvSpPr/>
+          <p:nvPr/>
+        </p:nvSpPr>
+        <p:spPr>
+          <a:xfrm>
+            <a:off x="8138160" y="5129784"/>
+            <a:ext cx="640080" cy="274320"/>
+          </a:xfrm>
+          <a:prstGeom prst="rect">
+            <a:avLst/>
+          </a:prstGeom>
+          <a:solidFill>
+            <a:srgbClr val="2E7D32"/>
+          </a:solidFill>
+          <a:ln>
+            <a:noFill/>
+          </a:ln>
+        </p:spPr>
+        <p:style>
+          <a:lnRef idx="1">
+            <a:schemeClr val="accent1"/>
+          </a:lnRef>
+          <a:fillRef idx="3">
+            <a:schemeClr val="accent1"/>
+          </a:fillRef>
+          <a:effectRef idx="2">
+            <a:schemeClr val="accent1"/>
+          </a:effectRef>
+          <a:fontRef idx="minor">
+            <a:schemeClr val="lt1"/>
+          </a:fontRef>
+        </p:style>
+        <p:txBody>
+          <a:bodyPr rtlCol="0" anchor="ctr"/>
+          <a:lstStyle/>
+          <a:p>
+            <a:pPr algn="ctr"/>
+          </a:p>
+        </p:txBody>
+      </p:sp>
+      <p:sp>
+        <p:nvSpPr>
+          <p:cNvPr id="28" name="TextBox 27"/>
+          <p:cNvSpPr txBox="1"/>
+          <p:nvPr/>
+        </p:nvSpPr>
+        <p:spPr>
+          <a:xfrm>
+            <a:off x="8138160" y="5129784"/>
+            <a:ext cx="640080" cy="274320"/>
+          </a:xfrm>
+          <a:prstGeom prst="rect">
+            <a:avLst/>
+          </a:prstGeom>
+          <a:noFill/>
+        </p:spPr>
+        <p:txBody>
+          <a:bodyPr wrap="square">
+            <a:spAutoFit/>
+          </a:bodyPr>
+          <a:lstStyle/>
+          <a:p>
+            <a:pPr algn="ctr"/>
+            <a:r>
+              <a:rPr sz="900" b="1">
+                <a:solidFill>
+                  <a:srgbClr val="FFFFFF"/>
+                </a:solidFill>
+              </a:rPr>
+              <a:t>5/10</a:t>
+            </a:r>
+          </a:p>
+        </p:txBody>
+      </p:sp>
+      <p:sp>
+        <p:nvSpPr>
+          <p:cNvPr id="29" name="TextBox 28"/>
+          <p:cNvSpPr txBox="1"/>
+          <p:nvPr/>
+        </p:nvSpPr>
+        <p:spPr>
+          <a:xfrm>
+            <a:off x="457200" y="5129784"/>
+            <a:ext cx="7498080" cy="347472"/>
+          </a:xfrm>
+          <a:prstGeom prst="rect">
+            <a:avLst/>
+          </a:prstGeom>
+          <a:noFill/>
+        </p:spPr>
+        <p:txBody>
+          <a:bodyPr wrap="square">
+            <a:spAutoFit/>
+          </a:bodyPr>
+          <a:lstStyle/>
+          <a:p>
+            <a:pPr algn="l"/>
+            <a:r>
+              <a:rPr sz="1100" b="1">
+                <a:solidFill>
+                  <a:srgbClr val="212121"/>
+                </a:solidFill>
+              </a:rPr>
+              <a:t>La Diputación de Almería y el Ayuntamiento de El Ejido entregan a Down El Ejido el proyect…</a:t>
+            </a:r>
+          </a:p>
+        </p:txBody>
+      </p:sp>
+      <p:sp>
+        <p:nvSpPr>
+          <p:cNvPr id="30" name="TextBox 29"/>
+          <p:cNvSpPr txBox="1"/>
+          <p:nvPr/>
+        </p:nvSpPr>
+        <p:spPr>
+          <a:xfrm>
+            <a:off x="457200" y="5477256"/>
+            <a:ext cx="8321040" cy="502920"/>
+          </a:xfrm>
+          <a:prstGeom prst="rect">
+            <a:avLst/>
+          </a:prstGeom>
+          <a:noFill/>
+        </p:spPr>
+        <p:txBody>
+          <a:bodyPr wrap="square">
+            <a:spAutoFit/>
+          </a:bodyPr>
+          <a:lstStyle/>
+          <a:p>
+            <a:pPr algn="l"/>
+            <a:r>
+              <a:rPr sz="900" b="0">
+                <a:solidFill>
+                  <a:srgbClr val="757575"/>
+                </a:solidFill>
+              </a:rPr>
+              <a:t>La Asociación Down El Ejido ha recibido de la Diputación de Almería y del Ayuntamiento ejidense el proyecto finalizado de su futura sede, un edificio "moderno y…</a:t>
+            </a:r>
+          </a:p>
+        </p:txBody>
+      </p:sp>
+      <p:sp>
+        <p:nvSpPr>
+          <p:cNvPr id="31" name="TextBox 30"/>
+          <p:cNvSpPr txBox="1"/>
+          <p:nvPr/>
+        </p:nvSpPr>
+        <p:spPr>
+          <a:xfrm>
+            <a:off x="457200" y="5998464"/>
+            <a:ext cx="3657600" cy="228600"/>
+          </a:xfrm>
+          <a:prstGeom prst="rect">
+            <a:avLst/>
+          </a:prstGeom>
+          <a:noFill/>
+        </p:spPr>
+        <p:txBody>
+          <a:bodyPr wrap="square">
+            <a:spAutoFit/>
+          </a:bodyPr>
+          <a:lstStyle/>
+          <a:p>
+            <a:pPr algn="l"/>
+            <a:r>
+              <a:rPr sz="800" b="0">
+                <a:solidFill>
+                  <a:srgbClr val="757575"/>
+                </a:solidFill>
+              </a:rPr>
+              <a:t>📰 Europapress.es</a:t>
             </a:r>
           </a:p>
         </p:txBody>
@@ -6281,14 +8059,143 @@
       </p:sp>
       <p:sp>
         <p:nvSpPr>
-          <p:cNvPr id="4" name="TextBox 3"/>
+          <p:cNvPr id="4" name="Rectangle 3"/>
+          <p:cNvSpPr/>
+          <p:nvPr/>
+        </p:nvSpPr>
+        <p:spPr>
+          <a:xfrm>
+            <a:off x="274320" y="1005840"/>
+            <a:ext cx="8595360" cy="1234440"/>
+          </a:xfrm>
+          <a:prstGeom prst="rect">
+            <a:avLst/>
+          </a:prstGeom>
+          <a:solidFill>
+            <a:srgbClr val="FFFFFF"/>
+          </a:solidFill>
+          <a:ln>
+            <a:noFill/>
+          </a:ln>
+        </p:spPr>
+        <p:style>
+          <a:lnRef idx="1">
+            <a:schemeClr val="accent1"/>
+          </a:lnRef>
+          <a:fillRef idx="3">
+            <a:schemeClr val="accent1"/>
+          </a:fillRef>
+          <a:effectRef idx="2">
+            <a:schemeClr val="accent1"/>
+          </a:effectRef>
+          <a:fontRef idx="minor">
+            <a:schemeClr val="lt1"/>
+          </a:fontRef>
+        </p:style>
+        <p:txBody>
+          <a:bodyPr rtlCol="0" anchor="ctr"/>
+          <a:lstStyle/>
+          <a:p>
+            <a:pPr algn="ctr"/>
+          </a:p>
+        </p:txBody>
+      </p:sp>
+      <p:sp>
+        <p:nvSpPr>
+          <p:cNvPr id="5" name="Rectangle 4"/>
+          <p:cNvSpPr/>
+          <p:nvPr/>
+        </p:nvSpPr>
+        <p:spPr>
+          <a:xfrm>
+            <a:off x="274320" y="1005840"/>
+            <a:ext cx="54864" cy="1234440"/>
+          </a:xfrm>
+          <a:prstGeom prst="rect">
+            <a:avLst/>
+          </a:prstGeom>
+          <a:solidFill>
+            <a:srgbClr val="2E7D32"/>
+          </a:solidFill>
+          <a:ln>
+            <a:noFill/>
+          </a:ln>
+        </p:spPr>
+        <p:style>
+          <a:lnRef idx="1">
+            <a:schemeClr val="accent1"/>
+          </a:lnRef>
+          <a:fillRef idx="3">
+            <a:schemeClr val="accent1"/>
+          </a:fillRef>
+          <a:effectRef idx="2">
+            <a:schemeClr val="accent1"/>
+          </a:effectRef>
+          <a:fontRef idx="minor">
+            <a:schemeClr val="lt1"/>
+          </a:fontRef>
+        </p:style>
+        <p:txBody>
+          <a:bodyPr rtlCol="0" anchor="ctr"/>
+          <a:lstStyle/>
+          <a:p>
+            <a:pPr algn="ctr"/>
+          </a:p>
+        </p:txBody>
+      </p:sp>
+      <p:sp>
+        <p:nvSpPr>
+          <p:cNvPr id="6" name="Rectangle 5"/>
+          <p:cNvSpPr/>
+          <p:nvPr/>
+        </p:nvSpPr>
+        <p:spPr>
+          <a:xfrm>
+            <a:off x="8138160" y="1097280"/>
+            <a:ext cx="640080" cy="274320"/>
+          </a:xfrm>
+          <a:prstGeom prst="rect">
+            <a:avLst/>
+          </a:prstGeom>
+          <a:solidFill>
+            <a:srgbClr val="2E7D32"/>
+          </a:solidFill>
+          <a:ln>
+            <a:noFill/>
+          </a:ln>
+        </p:spPr>
+        <p:style>
+          <a:lnRef idx="1">
+            <a:schemeClr val="accent1"/>
+          </a:lnRef>
+          <a:fillRef idx="3">
+            <a:schemeClr val="accent1"/>
+          </a:fillRef>
+          <a:effectRef idx="2">
+            <a:schemeClr val="accent1"/>
+          </a:effectRef>
+          <a:fontRef idx="minor">
+            <a:schemeClr val="lt1"/>
+          </a:fontRef>
+        </p:style>
+        <p:txBody>
+          <a:bodyPr rtlCol="0" anchor="ctr"/>
+          <a:lstStyle/>
+          <a:p>
+            <a:pPr algn="ctr"/>
+          </a:p>
+        </p:txBody>
+      </p:sp>
+      <p:sp>
+        <p:nvSpPr>
+          <p:cNvPr id="7" name="TextBox 6"/>
           <p:cNvSpPr txBox="1"/>
           <p:nvPr/>
         </p:nvSpPr>
         <p:spPr>
           <a:xfrm>
-            <a:off x="457200" y="1371600"/>
-            <a:ext cx="8229600" cy="914400"/>
+            <a:off x="8138160" y="1097280"/>
+            <a:ext cx="640080" cy="274320"/>
           </a:xfrm>
           <a:prstGeom prst="rect">
             <a:avLst/>
@@ -6301,14 +8208,911 @@
           </a:bodyPr>
           <a:lstStyle/>
           <a:p>
+            <a:pPr algn="ctr"/>
+            <a:r>
+              <a:rPr sz="900" b="1">
+                <a:solidFill>
+                  <a:srgbClr val="FFFFFF"/>
+                </a:solidFill>
+              </a:rPr>
+              <a:t>5/10</a:t>
+            </a:r>
+          </a:p>
+        </p:txBody>
+      </p:sp>
+      <p:sp>
+        <p:nvSpPr>
+          <p:cNvPr id="8" name="TextBox 7"/>
+          <p:cNvSpPr txBox="1"/>
+          <p:nvPr/>
+        </p:nvSpPr>
+        <p:spPr>
+          <a:xfrm>
+            <a:off x="457200" y="1097280"/>
+            <a:ext cx="7498080" cy="347472"/>
+          </a:xfrm>
+          <a:prstGeom prst="rect">
+            <a:avLst/>
+          </a:prstGeom>
+          <a:noFill/>
+        </p:spPr>
+        <p:txBody>
+          <a:bodyPr wrap="square">
+            <a:spAutoFit/>
+          </a:bodyPr>
+          <a:lstStyle/>
+          <a:p>
             <a:pPr algn="l"/>
             <a:r>
-              <a:rPr sz="1300" b="0">
+              <a:rPr sz="1100" b="1">
+                <a:solidFill>
+                  <a:srgbClr val="212121"/>
+                </a:solidFill>
+              </a:rPr>
+              <a:t>José Antonio Gaspar, director general jurídico removido de la CMF: “Siendo honesto, no me …</a:t>
+            </a:r>
+          </a:p>
+        </p:txBody>
+      </p:sp>
+      <p:sp>
+        <p:nvSpPr>
+          <p:cNvPr id="9" name="TextBox 8"/>
+          <p:cNvSpPr txBox="1"/>
+          <p:nvPr/>
+        </p:nvSpPr>
+        <p:spPr>
+          <a:xfrm>
+            <a:off x="457200" y="1444752"/>
+            <a:ext cx="8321040" cy="502920"/>
+          </a:xfrm>
+          <a:prstGeom prst="rect">
+            <a:avLst/>
+          </a:prstGeom>
+          <a:noFill/>
+        </p:spPr>
+        <p:txBody>
+          <a:bodyPr wrap="square">
+            <a:spAutoFit/>
+          </a:bodyPr>
+          <a:lstStyle/>
+          <a:p>
+            <a:pPr algn="l"/>
+            <a:r>
+              <a:rPr sz="900" b="0">
                 <a:solidFill>
                   <a:srgbClr val="757575"/>
                 </a:solidFill>
               </a:rPr>
-              <a:t>Sin noticias disponibles para esta categoría.</a:t>
+              <a:t>El exdirectivo de la CMF, que fue desvinculado por su nueva presidenta, Catherine Tornel, hace un balance sobre los doce años que estuvo en el organismo regulad…</a:t>
+            </a:r>
+          </a:p>
+        </p:txBody>
+      </p:sp>
+      <p:sp>
+        <p:nvSpPr>
+          <p:cNvPr id="10" name="TextBox 9"/>
+          <p:cNvSpPr txBox="1"/>
+          <p:nvPr/>
+        </p:nvSpPr>
+        <p:spPr>
+          <a:xfrm>
+            <a:off x="457200" y="1965960"/>
+            <a:ext cx="3657600" cy="228600"/>
+          </a:xfrm>
+          <a:prstGeom prst="rect">
+            <a:avLst/>
+          </a:prstGeom>
+          <a:noFill/>
+        </p:spPr>
+        <p:txBody>
+          <a:bodyPr wrap="square">
+            <a:spAutoFit/>
+          </a:bodyPr>
+          <a:lstStyle/>
+          <a:p>
+            <a:pPr algn="l"/>
+            <a:r>
+              <a:rPr sz="800" b="0">
+                <a:solidFill>
+                  <a:srgbClr val="757575"/>
+                </a:solidFill>
+              </a:rPr>
+              <a:t>📰 Latercera.com</a:t>
+            </a:r>
+          </a:p>
+        </p:txBody>
+      </p:sp>
+      <p:sp>
+        <p:nvSpPr>
+          <p:cNvPr id="11" name="Rectangle 10"/>
+          <p:cNvSpPr/>
+          <p:nvPr/>
+        </p:nvSpPr>
+        <p:spPr>
+          <a:xfrm>
+            <a:off x="274320" y="2350008"/>
+            <a:ext cx="8595360" cy="1234440"/>
+          </a:xfrm>
+          <a:prstGeom prst="rect">
+            <a:avLst/>
+          </a:prstGeom>
+          <a:solidFill>
+            <a:srgbClr val="FFFFFF"/>
+          </a:solidFill>
+          <a:ln>
+            <a:noFill/>
+          </a:ln>
+        </p:spPr>
+        <p:style>
+          <a:lnRef idx="1">
+            <a:schemeClr val="accent1"/>
+          </a:lnRef>
+          <a:fillRef idx="3">
+            <a:schemeClr val="accent1"/>
+          </a:fillRef>
+          <a:effectRef idx="2">
+            <a:schemeClr val="accent1"/>
+          </a:effectRef>
+          <a:fontRef idx="minor">
+            <a:schemeClr val="lt1"/>
+          </a:fontRef>
+        </p:style>
+        <p:txBody>
+          <a:bodyPr rtlCol="0" anchor="ctr"/>
+          <a:lstStyle/>
+          <a:p>
+            <a:pPr algn="ctr"/>
+          </a:p>
+        </p:txBody>
+      </p:sp>
+      <p:sp>
+        <p:nvSpPr>
+          <p:cNvPr id="12" name="Rectangle 11"/>
+          <p:cNvSpPr/>
+          <p:nvPr/>
+        </p:nvSpPr>
+        <p:spPr>
+          <a:xfrm>
+            <a:off x="274320" y="2350008"/>
+            <a:ext cx="54864" cy="1234440"/>
+          </a:xfrm>
+          <a:prstGeom prst="rect">
+            <a:avLst/>
+          </a:prstGeom>
+          <a:solidFill>
+            <a:srgbClr val="2E7D32"/>
+          </a:solidFill>
+          <a:ln>
+            <a:noFill/>
+          </a:ln>
+        </p:spPr>
+        <p:style>
+          <a:lnRef idx="1">
+            <a:schemeClr val="accent1"/>
+          </a:lnRef>
+          <a:fillRef idx="3">
+            <a:schemeClr val="accent1"/>
+          </a:fillRef>
+          <a:effectRef idx="2">
+            <a:schemeClr val="accent1"/>
+          </a:effectRef>
+          <a:fontRef idx="minor">
+            <a:schemeClr val="lt1"/>
+          </a:fontRef>
+        </p:style>
+        <p:txBody>
+          <a:bodyPr rtlCol="0" anchor="ctr"/>
+          <a:lstStyle/>
+          <a:p>
+            <a:pPr algn="ctr"/>
+          </a:p>
+        </p:txBody>
+      </p:sp>
+      <p:sp>
+        <p:nvSpPr>
+          <p:cNvPr id="13" name="Rectangle 12"/>
+          <p:cNvSpPr/>
+          <p:nvPr/>
+        </p:nvSpPr>
+        <p:spPr>
+          <a:xfrm>
+            <a:off x="8138160" y="2441448"/>
+            <a:ext cx="640080" cy="274320"/>
+          </a:xfrm>
+          <a:prstGeom prst="rect">
+            <a:avLst/>
+          </a:prstGeom>
+          <a:solidFill>
+            <a:srgbClr val="2E7D32"/>
+          </a:solidFill>
+          <a:ln>
+            <a:noFill/>
+          </a:ln>
+        </p:spPr>
+        <p:style>
+          <a:lnRef idx="1">
+            <a:schemeClr val="accent1"/>
+          </a:lnRef>
+          <a:fillRef idx="3">
+            <a:schemeClr val="accent1"/>
+          </a:fillRef>
+          <a:effectRef idx="2">
+            <a:schemeClr val="accent1"/>
+          </a:effectRef>
+          <a:fontRef idx="minor">
+            <a:schemeClr val="lt1"/>
+          </a:fontRef>
+        </p:style>
+        <p:txBody>
+          <a:bodyPr rtlCol="0" anchor="ctr"/>
+          <a:lstStyle/>
+          <a:p>
+            <a:pPr algn="ctr"/>
+          </a:p>
+        </p:txBody>
+      </p:sp>
+      <p:sp>
+        <p:nvSpPr>
+          <p:cNvPr id="14" name="TextBox 13"/>
+          <p:cNvSpPr txBox="1"/>
+          <p:nvPr/>
+        </p:nvSpPr>
+        <p:spPr>
+          <a:xfrm>
+            <a:off x="8138160" y="2441448"/>
+            <a:ext cx="640080" cy="274320"/>
+          </a:xfrm>
+          <a:prstGeom prst="rect">
+            <a:avLst/>
+          </a:prstGeom>
+          <a:noFill/>
+        </p:spPr>
+        <p:txBody>
+          <a:bodyPr wrap="square">
+            <a:spAutoFit/>
+          </a:bodyPr>
+          <a:lstStyle/>
+          <a:p>
+            <a:pPr algn="ctr"/>
+            <a:r>
+              <a:rPr sz="900" b="1">
+                <a:solidFill>
+                  <a:srgbClr val="FFFFFF"/>
+                </a:solidFill>
+              </a:rPr>
+              <a:t>5/10</a:t>
+            </a:r>
+          </a:p>
+        </p:txBody>
+      </p:sp>
+      <p:sp>
+        <p:nvSpPr>
+          <p:cNvPr id="15" name="TextBox 14"/>
+          <p:cNvSpPr txBox="1"/>
+          <p:nvPr/>
+        </p:nvSpPr>
+        <p:spPr>
+          <a:xfrm>
+            <a:off x="457200" y="2441448"/>
+            <a:ext cx="7498080" cy="347472"/>
+          </a:xfrm>
+          <a:prstGeom prst="rect">
+            <a:avLst/>
+          </a:prstGeom>
+          <a:noFill/>
+        </p:spPr>
+        <p:txBody>
+          <a:bodyPr wrap="square">
+            <a:spAutoFit/>
+          </a:bodyPr>
+          <a:lstStyle/>
+          <a:p>
+            <a:pPr algn="l"/>
+            <a:r>
+              <a:rPr sz="1100" b="1">
+                <a:solidFill>
+                  <a:srgbClr val="212121"/>
+                </a:solidFill>
+              </a:rPr>
+              <a:t>Actas de directorio, computadores requisados y gerentes declarando hace meses: el allanami…</a:t>
+            </a:r>
+          </a:p>
+        </p:txBody>
+      </p:sp>
+      <p:sp>
+        <p:nvSpPr>
+          <p:cNvPr id="16" name="TextBox 15"/>
+          <p:cNvSpPr txBox="1"/>
+          <p:nvPr/>
+        </p:nvSpPr>
+        <p:spPr>
+          <a:xfrm>
+            <a:off x="457200" y="2788920"/>
+            <a:ext cx="8321040" cy="502920"/>
+          </a:xfrm>
+          <a:prstGeom prst="rect">
+            <a:avLst/>
+          </a:prstGeom>
+          <a:noFill/>
+        </p:spPr>
+        <p:txBody>
+          <a:bodyPr wrap="square">
+            <a:spAutoFit/>
+          </a:bodyPr>
+          <a:lstStyle/>
+          <a:p>
+            <a:pPr algn="l"/>
+            <a:r>
+              <a:rPr sz="900" b="0">
+                <a:solidFill>
+                  <a:srgbClr val="757575"/>
+                </a:solidFill>
+              </a:rPr>
+              <a:t>El operativo se extendió por cerca de tres horas e incluyó todo tipo de documentos relacionados al expresidente Michael Clark. Cecilia Pérez no estaba en La Cis…</a:t>
+            </a:r>
+          </a:p>
+        </p:txBody>
+      </p:sp>
+      <p:sp>
+        <p:nvSpPr>
+          <p:cNvPr id="17" name="TextBox 16"/>
+          <p:cNvSpPr txBox="1"/>
+          <p:nvPr/>
+        </p:nvSpPr>
+        <p:spPr>
+          <a:xfrm>
+            <a:off x="457200" y="3310128"/>
+            <a:ext cx="3657600" cy="228600"/>
+          </a:xfrm>
+          <a:prstGeom prst="rect">
+            <a:avLst/>
+          </a:prstGeom>
+          <a:noFill/>
+        </p:spPr>
+        <p:txBody>
+          <a:bodyPr wrap="square">
+            <a:spAutoFit/>
+          </a:bodyPr>
+          <a:lstStyle/>
+          <a:p>
+            <a:pPr algn="l"/>
+            <a:r>
+              <a:rPr sz="800" b="0">
+                <a:solidFill>
+                  <a:srgbClr val="757575"/>
+                </a:solidFill>
+              </a:rPr>
+              <a:t>📰 Latercera.com</a:t>
+            </a:r>
+          </a:p>
+        </p:txBody>
+      </p:sp>
+      <p:sp>
+        <p:nvSpPr>
+          <p:cNvPr id="18" name="Rectangle 17"/>
+          <p:cNvSpPr/>
+          <p:nvPr/>
+        </p:nvSpPr>
+        <p:spPr>
+          <a:xfrm>
+            <a:off x="274320" y="3694176"/>
+            <a:ext cx="8595360" cy="1234440"/>
+          </a:xfrm>
+          <a:prstGeom prst="rect">
+            <a:avLst/>
+          </a:prstGeom>
+          <a:solidFill>
+            <a:srgbClr val="FFFFFF"/>
+          </a:solidFill>
+          <a:ln>
+            <a:noFill/>
+          </a:ln>
+        </p:spPr>
+        <p:style>
+          <a:lnRef idx="1">
+            <a:schemeClr val="accent1"/>
+          </a:lnRef>
+          <a:fillRef idx="3">
+            <a:schemeClr val="accent1"/>
+          </a:fillRef>
+          <a:effectRef idx="2">
+            <a:schemeClr val="accent1"/>
+          </a:effectRef>
+          <a:fontRef idx="minor">
+            <a:schemeClr val="lt1"/>
+          </a:fontRef>
+        </p:style>
+        <p:txBody>
+          <a:bodyPr rtlCol="0" anchor="ctr"/>
+          <a:lstStyle/>
+          <a:p>
+            <a:pPr algn="ctr"/>
+          </a:p>
+        </p:txBody>
+      </p:sp>
+      <p:sp>
+        <p:nvSpPr>
+          <p:cNvPr id="19" name="Rectangle 18"/>
+          <p:cNvSpPr/>
+          <p:nvPr/>
+        </p:nvSpPr>
+        <p:spPr>
+          <a:xfrm>
+            <a:off x="274320" y="3694176"/>
+            <a:ext cx="54864" cy="1234440"/>
+          </a:xfrm>
+          <a:prstGeom prst="rect">
+            <a:avLst/>
+          </a:prstGeom>
+          <a:solidFill>
+            <a:srgbClr val="2E7D32"/>
+          </a:solidFill>
+          <a:ln>
+            <a:noFill/>
+          </a:ln>
+        </p:spPr>
+        <p:style>
+          <a:lnRef idx="1">
+            <a:schemeClr val="accent1"/>
+          </a:lnRef>
+          <a:fillRef idx="3">
+            <a:schemeClr val="accent1"/>
+          </a:fillRef>
+          <a:effectRef idx="2">
+            <a:schemeClr val="accent1"/>
+          </a:effectRef>
+          <a:fontRef idx="minor">
+            <a:schemeClr val="lt1"/>
+          </a:fontRef>
+        </p:style>
+        <p:txBody>
+          <a:bodyPr rtlCol="0" anchor="ctr"/>
+          <a:lstStyle/>
+          <a:p>
+            <a:pPr algn="ctr"/>
+          </a:p>
+        </p:txBody>
+      </p:sp>
+      <p:sp>
+        <p:nvSpPr>
+          <p:cNvPr id="20" name="Rectangle 19"/>
+          <p:cNvSpPr/>
+          <p:nvPr/>
+        </p:nvSpPr>
+        <p:spPr>
+          <a:xfrm>
+            <a:off x="8138160" y="3785616"/>
+            <a:ext cx="640080" cy="274320"/>
+          </a:xfrm>
+          <a:prstGeom prst="rect">
+            <a:avLst/>
+          </a:prstGeom>
+          <a:solidFill>
+            <a:srgbClr val="2E7D32"/>
+          </a:solidFill>
+          <a:ln>
+            <a:noFill/>
+          </a:ln>
+        </p:spPr>
+        <p:style>
+          <a:lnRef idx="1">
+            <a:schemeClr val="accent1"/>
+          </a:lnRef>
+          <a:fillRef idx="3">
+            <a:schemeClr val="accent1"/>
+          </a:fillRef>
+          <a:effectRef idx="2">
+            <a:schemeClr val="accent1"/>
+          </a:effectRef>
+          <a:fontRef idx="minor">
+            <a:schemeClr val="lt1"/>
+          </a:fontRef>
+        </p:style>
+        <p:txBody>
+          <a:bodyPr rtlCol="0" anchor="ctr"/>
+          <a:lstStyle/>
+          <a:p>
+            <a:pPr algn="ctr"/>
+          </a:p>
+        </p:txBody>
+      </p:sp>
+      <p:sp>
+        <p:nvSpPr>
+          <p:cNvPr id="21" name="TextBox 20"/>
+          <p:cNvSpPr txBox="1"/>
+          <p:nvPr/>
+        </p:nvSpPr>
+        <p:spPr>
+          <a:xfrm>
+            <a:off x="8138160" y="3785616"/>
+            <a:ext cx="640080" cy="274320"/>
+          </a:xfrm>
+          <a:prstGeom prst="rect">
+            <a:avLst/>
+          </a:prstGeom>
+          <a:noFill/>
+        </p:spPr>
+        <p:txBody>
+          <a:bodyPr wrap="square">
+            <a:spAutoFit/>
+          </a:bodyPr>
+          <a:lstStyle/>
+          <a:p>
+            <a:pPr algn="ctr"/>
+            <a:r>
+              <a:rPr sz="900" b="1">
+                <a:solidFill>
+                  <a:srgbClr val="FFFFFF"/>
+                </a:solidFill>
+              </a:rPr>
+              <a:t>5/10</a:t>
+            </a:r>
+          </a:p>
+        </p:txBody>
+      </p:sp>
+      <p:sp>
+        <p:nvSpPr>
+          <p:cNvPr id="22" name="TextBox 21"/>
+          <p:cNvSpPr txBox="1"/>
+          <p:nvPr/>
+        </p:nvSpPr>
+        <p:spPr>
+          <a:xfrm>
+            <a:off x="457200" y="3785616"/>
+            <a:ext cx="7498080" cy="347472"/>
+          </a:xfrm>
+          <a:prstGeom prst="rect">
+            <a:avLst/>
+          </a:prstGeom>
+          <a:noFill/>
+        </p:spPr>
+        <p:txBody>
+          <a:bodyPr wrap="square">
+            <a:spAutoFit/>
+          </a:bodyPr>
+          <a:lstStyle/>
+          <a:p>
+            <a:pPr algn="l"/>
+            <a:r>
+              <a:rPr sz="1100" b="1">
+                <a:solidFill>
+                  <a:srgbClr val="212121"/>
+                </a:solidFill>
+              </a:rPr>
+              <a:t>Caso Sartor: Fiscalía allana el centro deportivo de la Universidad de Chile y domicilio de…</a:t>
+            </a:r>
+          </a:p>
+        </p:txBody>
+      </p:sp>
+      <p:sp>
+        <p:nvSpPr>
+          <p:cNvPr id="23" name="TextBox 22"/>
+          <p:cNvSpPr txBox="1"/>
+          <p:nvPr/>
+        </p:nvSpPr>
+        <p:spPr>
+          <a:xfrm>
+            <a:off x="457200" y="4133088"/>
+            <a:ext cx="8321040" cy="502920"/>
+          </a:xfrm>
+          <a:prstGeom prst="rect">
+            <a:avLst/>
+          </a:prstGeom>
+          <a:noFill/>
+        </p:spPr>
+        <p:txBody>
+          <a:bodyPr wrap="square">
+            <a:spAutoFit/>
+          </a:bodyPr>
+          <a:lstStyle/>
+          <a:p>
+            <a:pPr algn="l"/>
+            <a:r>
+              <a:rPr sz="900" b="0">
+                <a:solidFill>
+                  <a:srgbClr val="757575"/>
+                </a:solidFill>
+              </a:rPr>
+              <a:t>El Ministerio Público investiga irregularidades financieras como negociación incompatible, fraude a Ley de Mercado de Valores y omisión de oferta pública de adq…</a:t>
+            </a:r>
+          </a:p>
+        </p:txBody>
+      </p:sp>
+      <p:sp>
+        <p:nvSpPr>
+          <p:cNvPr id="24" name="TextBox 23"/>
+          <p:cNvSpPr txBox="1"/>
+          <p:nvPr/>
+        </p:nvSpPr>
+        <p:spPr>
+          <a:xfrm>
+            <a:off x="457200" y="4654296"/>
+            <a:ext cx="3657600" cy="228600"/>
+          </a:xfrm>
+          <a:prstGeom prst="rect">
+            <a:avLst/>
+          </a:prstGeom>
+          <a:noFill/>
+        </p:spPr>
+        <p:txBody>
+          <a:bodyPr wrap="square">
+            <a:spAutoFit/>
+          </a:bodyPr>
+          <a:lstStyle/>
+          <a:p>
+            <a:pPr algn="l"/>
+            <a:r>
+              <a:rPr sz="800" b="0">
+                <a:solidFill>
+                  <a:srgbClr val="757575"/>
+                </a:solidFill>
+              </a:rPr>
+              <a:t>📰 Latercera.com</a:t>
+            </a:r>
+          </a:p>
+        </p:txBody>
+      </p:sp>
+      <p:sp>
+        <p:nvSpPr>
+          <p:cNvPr id="25" name="Rectangle 24"/>
+          <p:cNvSpPr/>
+          <p:nvPr/>
+        </p:nvSpPr>
+        <p:spPr>
+          <a:xfrm>
+            <a:off x="274320" y="5038344"/>
+            <a:ext cx="8595360" cy="1234440"/>
+          </a:xfrm>
+          <a:prstGeom prst="rect">
+            <a:avLst/>
+          </a:prstGeom>
+          <a:solidFill>
+            <a:srgbClr val="FFFFFF"/>
+          </a:solidFill>
+          <a:ln>
+            <a:noFill/>
+          </a:ln>
+        </p:spPr>
+        <p:style>
+          <a:lnRef idx="1">
+            <a:schemeClr val="accent1"/>
+          </a:lnRef>
+          <a:fillRef idx="3">
+            <a:schemeClr val="accent1"/>
+          </a:fillRef>
+          <a:effectRef idx="2">
+            <a:schemeClr val="accent1"/>
+          </a:effectRef>
+          <a:fontRef idx="minor">
+            <a:schemeClr val="lt1"/>
+          </a:fontRef>
+        </p:style>
+        <p:txBody>
+          <a:bodyPr rtlCol="0" anchor="ctr"/>
+          <a:lstStyle/>
+          <a:p>
+            <a:pPr algn="ctr"/>
+          </a:p>
+        </p:txBody>
+      </p:sp>
+      <p:sp>
+        <p:nvSpPr>
+          <p:cNvPr id="26" name="Rectangle 25"/>
+          <p:cNvSpPr/>
+          <p:nvPr/>
+        </p:nvSpPr>
+        <p:spPr>
+          <a:xfrm>
+            <a:off x="274320" y="5038344"/>
+            <a:ext cx="54864" cy="1234440"/>
+          </a:xfrm>
+          <a:prstGeom prst="rect">
+            <a:avLst/>
+          </a:prstGeom>
+          <a:solidFill>
+            <a:srgbClr val="2E7D32"/>
+          </a:solidFill>
+          <a:ln>
+            <a:noFill/>
+          </a:ln>
+        </p:spPr>
+        <p:style>
+          <a:lnRef idx="1">
+            <a:schemeClr val="accent1"/>
+          </a:lnRef>
+          <a:fillRef idx="3">
+            <a:schemeClr val="accent1"/>
+          </a:fillRef>
+          <a:effectRef idx="2">
+            <a:schemeClr val="accent1"/>
+          </a:effectRef>
+          <a:fontRef idx="minor">
+            <a:schemeClr val="lt1"/>
+          </a:fontRef>
+        </p:style>
+        <p:txBody>
+          <a:bodyPr rtlCol="0" anchor="ctr"/>
+          <a:lstStyle/>
+          <a:p>
+            <a:pPr algn="ctr"/>
+          </a:p>
+        </p:txBody>
+      </p:sp>
+      <p:sp>
+        <p:nvSpPr>
+          <p:cNvPr id="27" name="Rectangle 26"/>
+          <p:cNvSpPr/>
+          <p:nvPr/>
+        </p:nvSpPr>
+        <p:spPr>
+          <a:xfrm>
+            <a:off x="8138160" y="5129784"/>
+            <a:ext cx="640080" cy="274320"/>
+          </a:xfrm>
+          <a:prstGeom prst="rect">
+            <a:avLst/>
+          </a:prstGeom>
+          <a:solidFill>
+            <a:srgbClr val="2E7D32"/>
+          </a:solidFill>
+          <a:ln>
+            <a:noFill/>
+          </a:ln>
+        </p:spPr>
+        <p:style>
+          <a:lnRef idx="1">
+            <a:schemeClr val="accent1"/>
+          </a:lnRef>
+          <a:fillRef idx="3">
+            <a:schemeClr val="accent1"/>
+          </a:fillRef>
+          <a:effectRef idx="2">
+            <a:schemeClr val="accent1"/>
+          </a:effectRef>
+          <a:fontRef idx="minor">
+            <a:schemeClr val="lt1"/>
+          </a:fontRef>
+        </p:style>
+        <p:txBody>
+          <a:bodyPr rtlCol="0" anchor="ctr"/>
+          <a:lstStyle/>
+          <a:p>
+            <a:pPr algn="ctr"/>
+          </a:p>
+        </p:txBody>
+      </p:sp>
+      <p:sp>
+        <p:nvSpPr>
+          <p:cNvPr id="28" name="TextBox 27"/>
+          <p:cNvSpPr txBox="1"/>
+          <p:nvPr/>
+        </p:nvSpPr>
+        <p:spPr>
+          <a:xfrm>
+            <a:off x="8138160" y="5129784"/>
+            <a:ext cx="640080" cy="274320"/>
+          </a:xfrm>
+          <a:prstGeom prst="rect">
+            <a:avLst/>
+          </a:prstGeom>
+          <a:noFill/>
+        </p:spPr>
+        <p:txBody>
+          <a:bodyPr wrap="square">
+            <a:spAutoFit/>
+          </a:bodyPr>
+          <a:lstStyle/>
+          <a:p>
+            <a:pPr algn="ctr"/>
+            <a:r>
+              <a:rPr sz="900" b="1">
+                <a:solidFill>
+                  <a:srgbClr val="FFFFFF"/>
+                </a:solidFill>
+              </a:rPr>
+              <a:t>5/10</a:t>
+            </a:r>
+          </a:p>
+        </p:txBody>
+      </p:sp>
+      <p:sp>
+        <p:nvSpPr>
+          <p:cNvPr id="29" name="TextBox 28"/>
+          <p:cNvSpPr txBox="1"/>
+          <p:nvPr/>
+        </p:nvSpPr>
+        <p:spPr>
+          <a:xfrm>
+            <a:off x="457200" y="5129784"/>
+            <a:ext cx="7498080" cy="347472"/>
+          </a:xfrm>
+          <a:prstGeom prst="rect">
+            <a:avLst/>
+          </a:prstGeom>
+          <a:noFill/>
+        </p:spPr>
+        <p:txBody>
+          <a:bodyPr wrap="square">
+            <a:spAutoFit/>
+          </a:bodyPr>
+          <a:lstStyle/>
+          <a:p>
+            <a:pPr algn="l"/>
+            <a:r>
+              <a:rPr sz="1100" b="1">
+                <a:solidFill>
+                  <a:srgbClr val="212121"/>
+                </a:solidFill>
+              </a:rPr>
+              <a:t>Caso Primus: Deloitte y su socio Roberto Leiva arremeten contra la CMF en tribunales por m…</a:t>
+            </a:r>
+          </a:p>
+        </p:txBody>
+      </p:sp>
+      <p:sp>
+        <p:nvSpPr>
+          <p:cNvPr id="30" name="TextBox 29"/>
+          <p:cNvSpPr txBox="1"/>
+          <p:nvPr/>
+        </p:nvSpPr>
+        <p:spPr>
+          <a:xfrm>
+            <a:off x="457200" y="5477256"/>
+            <a:ext cx="8321040" cy="502920"/>
+          </a:xfrm>
+          <a:prstGeom prst="rect">
+            <a:avLst/>
+          </a:prstGeom>
+          <a:noFill/>
+        </p:spPr>
+        <p:txBody>
+          <a:bodyPr wrap="square">
+            <a:spAutoFit/>
+          </a:bodyPr>
+          <a:lstStyle/>
+          <a:p>
+            <a:pPr algn="l"/>
+            <a:r>
+              <a:rPr sz="900" b="0">
+                <a:solidFill>
+                  <a:srgbClr val="757575"/>
+                </a:solidFill>
+              </a:rPr>
+              <a:t>Deloitte y su socio Roberto Leiva presentaron reclamos de ilegalidad contra las multas de la CMF, argumentando que el regulador impuso exigencias que exceden la…</a:t>
+            </a:r>
+          </a:p>
+        </p:txBody>
+      </p:sp>
+      <p:sp>
+        <p:nvSpPr>
+          <p:cNvPr id="31" name="TextBox 30"/>
+          <p:cNvSpPr txBox="1"/>
+          <p:nvPr/>
+        </p:nvSpPr>
+        <p:spPr>
+          <a:xfrm>
+            <a:off x="457200" y="5998464"/>
+            <a:ext cx="3657600" cy="228600"/>
+          </a:xfrm>
+          <a:prstGeom prst="rect">
+            <a:avLst/>
+          </a:prstGeom>
+          <a:noFill/>
+        </p:spPr>
+        <p:txBody>
+          <a:bodyPr wrap="square">
+            <a:spAutoFit/>
+          </a:bodyPr>
+          <a:lstStyle/>
+          <a:p>
+            <a:pPr algn="l"/>
+            <a:r>
+              <a:rPr sz="800" b="0">
+                <a:solidFill>
+                  <a:srgbClr val="757575"/>
+                </a:solidFill>
+              </a:rPr>
+              <a:t>📰 Latercera.com</a:t>
             </a:r>
           </a:p>
         </p:txBody>

--- a/newsletter_20260522.pptx
+++ b/newsletter_20260522.pptx
@@ -3999,7 +3999,7 @@
                   <a:srgbClr val="1A237E"/>
                 </a:solidFill>
               </a:rPr>
-              <a:t>Cooperativismo</a:t>
+              <a:t>Geopolítica</a:t>
             </a:r>
           </a:p>
         </p:txBody>
@@ -4033,7 +4033,7 @@
                   <a:srgbClr val="212121"/>
                 </a:solidFill>
               </a:rPr>
-              <a:t>Nuevo aumento confirmado para empleados de comercio: quiénes lo cobran y de cuánto es la suba</a:t>
+              <a:t>El Omnissiah ha respondido a la llamada de auxilio de Tertium: el Adeptus Mechanicus se une a l…</a:t>
             </a:r>
           </a:p>
         </p:txBody>
@@ -4096,7 +4096,7 @@
             <a:avLst/>
           </a:prstGeom>
           <a:solidFill>
-            <a:srgbClr val="2E7D32"/>
+            <a:srgbClr val="E65C00"/>
           </a:solidFill>
           <a:ln>
             <a:noFill/>
@@ -4153,7 +4153,7 @@
                   <a:srgbClr val="FFFFFF"/>
                 </a:solidFill>
               </a:rPr>
-              <a:t>5</a:t>
+              <a:t>7</a:t>
             </a:r>
           </a:p>
         </p:txBody>
@@ -4187,7 +4187,7 @@
                   <a:srgbClr val="1A237E"/>
                 </a:solidFill>
               </a:rPr>
-              <a:t>Geopolítica</a:t>
+              <a:t>Cooperativismo</a:t>
             </a:r>
           </a:p>
         </p:txBody>
@@ -4221,7 +4221,7 @@
                   <a:srgbClr val="212121"/>
                 </a:solidFill>
               </a:rPr>
-              <a:t>Sevilla acogerá en 2028 una nueva edición de ADM tras superar las 400 empresas</a:t>
+              <a:t>Nuevo aumento confirmado para empleados de comercio: quiénes lo cobran y de cuánto es la suba</a:t>
             </a:r>
           </a:p>
         </p:txBody>
@@ -4409,7 +4409,7 @@
                   <a:srgbClr val="212121"/>
                 </a:solidFill>
               </a:rPr>
-              <a:t>Resumen del Warhammer Skulls 2026: más Space Marine 2, Helldivers 2, demo de Boltgun II, sorpre…</a:t>
+              <a:t>VIDEO: Turistas rompen reglas y suben a la pirámide de Chichén Itzá</a:t>
             </a:r>
           </a:p>
         </p:txBody>
@@ -4597,7 +4597,7 @@
                   <a:srgbClr val="212121"/>
                 </a:solidFill>
               </a:rPr>
-              <a:t>Petróleo sube más de 3% tras nueva línea roja de Irán sobre el uranio</a:t>
+              <a:t>Objetivo Gaesa: el multimillonario emporio del régimen cubano</a:t>
             </a:r>
           </a:p>
         </p:txBody>
@@ -4785,7 +4785,7 @@
                   <a:srgbClr val="212121"/>
                 </a:solidFill>
               </a:rPr>
-              <a:t>El cargo a medida del ex príncipe Andrés: comercio, ballet y amigos peligrosos</a:t>
+              <a:t>MANTÉN LA VIGILIA FRENTE A TU ENEMIGO: Warhammer 40,000: Chaos Gate – Deathwatch anunciado para…</a:t>
             </a:r>
           </a:p>
         </p:txBody>
@@ -4973,7 +4973,7 @@
                   <a:srgbClr val="212121"/>
                 </a:solidFill>
               </a:rPr>
-              <a:t>La Diputación de Almería y el Ayuntamiento de El Ejido entregan a Down El Ejido el proyecto de …</a:t>
+              <a:t>Illa pacta con el Tercer Sector condonar la deuda energética a familias vulnerables</a:t>
             </a:r>
           </a:p>
         </p:txBody>
@@ -5161,7 +5161,7 @@
                   <a:srgbClr val="212121"/>
                 </a:solidFill>
               </a:rPr>
-              <a:t>Illa pacta con el Tercer Sector condonar la deuda energética a familias vulnerables</a:t>
+              <a:t>Eva Longoria brilla en la gran noche solidaria del Festival de Cannes: un espectacular look, ba…</a:t>
             </a:r>
           </a:p>
         </p:txBody>
@@ -5349,7 +5349,7 @@
                   <a:srgbClr val="212121"/>
                 </a:solidFill>
               </a:rPr>
-              <a:t>Eva Longoria brilla en la gran noche solidaria del Festival de Cannes: un espectacular look, ba…</a:t>
+              <a:t>Cruz Roja atendió en 2025 a casi 30.000 personas en La Rioja</a:t>
             </a:r>
           </a:p>
         </p:txBody>
@@ -5649,7 +5649,7 @@
                   <a:srgbClr val="212121"/>
                 </a:solidFill>
               </a:rPr>
-              <a:t>Sevilla acogerá en 2028 una nueva edición de ADM tras superar las 400 empresas</a:t>
+              <a:t>El Omnissiah ha respondido a la llamada de auxilio de Tertium: el Adeptus Mechanicus se un…</a:t>
             </a:r>
           </a:p>
         </p:txBody>
@@ -5683,7 +5683,7 @@
                   <a:srgbClr val="757575"/>
                 </a:solidFill>
               </a:rPr>
-              <a:t>El evento Aeroespace &amp; Defense Meetings (ADM) Sevilla 2026 ha cerrado su edición con un balance «enormemente positivo», tras alcanzar la participación de 415 em…</a:t>
+              <a:t>El Adeptus Mechanicus ha llegado a Hive Tertium. Los temidos y frenéticos siervos del Omnissiah, los Skitarii Alpha Primus, pronto se unirán a la lucha contra l…</a:t>
             </a:r>
           </a:p>
         </p:txBody>
@@ -5717,7 +5717,7 @@
                   <a:srgbClr val="757575"/>
                 </a:solidFill>
               </a:rPr>
-              <a:t>📰 Www.abc.es</a:t>
+              <a:t>📰 Zonammorpg.com</a:t>
             </a:r>
           </a:p>
         </p:txBody>
@@ -5914,7 +5914,7 @@
                   <a:srgbClr val="212121"/>
                 </a:solidFill>
               </a:rPr>
-              <a:t>Petróleo sube más de 3% tras nueva línea roja de Irán sobre el uranio</a:t>
+              <a:t>Objetivo Gaesa: el multimillonario emporio del régimen cubano</a:t>
             </a:r>
           </a:p>
         </p:txBody>
@@ -5948,7 +5948,7 @@
                   <a:srgbClr val="757575"/>
                 </a:solidFill>
               </a:rPr>
-              <a:t>El mercado petrolero reaccionó con fuerza a un nuevo endurecimiento de la postura iraní sobre su uranio enriquecido, en un contexto de negociaciones frágiles co…</a:t>
+              <a:t>En Cuba se registran cortes de electricidad hasta tres días consecutivos en algunas localidades, el abasto de agua potable es cada vez más escaso, pacientes fal…</a:t>
             </a:r>
           </a:p>
         </p:txBody>
@@ -5982,7 +5982,7 @@
                   <a:srgbClr val="757575"/>
                 </a:solidFill>
               </a:rPr>
-              <a:t>📰 Diariobitcoin.com</a:t>
+              <a:t>📰 Www.abc.es</a:t>
             </a:r>
           </a:p>
         </p:txBody>
@@ -6179,7 +6179,7 @@
                   <a:srgbClr val="212121"/>
                 </a:solidFill>
               </a:rPr>
-              <a:t>Resumen del Warhammer Skulls 2026: más Space Marine 2, Helldivers 2, demo de Boltgun II, s…</a:t>
+              <a:t>VIDEO: Turistas rompen reglas y suben a la pirámide de Chichén Itzá</a:t>
             </a:r>
           </a:p>
         </p:txBody>
@@ -6213,7 +6213,7 @@
                   <a:srgbClr val="757575"/>
                 </a:solidFill>
               </a:rPr>
-              <a:t>Al fin ha llegado uno de los días más importantes del año para los fans de Warhammer 40K. Se acaba de celebrar el Warhammer Skulls 2026, el evento anual de la f…</a:t>
+              <a:t>Visitantes fueron captados escalando la pirámide de Kukulkán en Chichén Itzá pese a la prohibición vigente desde 2008 para proteger el patrimonio arqueológico.</a:t>
             </a:r>
           </a:p>
         </p:txBody>
@@ -6247,7 +6247,7 @@
                   <a:srgbClr val="757575"/>
                 </a:solidFill>
               </a:rPr>
-              <a:t>📰 Vida Extra</a:t>
+              <a:t>📰 Record.com.mx</a:t>
             </a:r>
           </a:p>
         </p:txBody>
@@ -6444,7 +6444,7 @@
                   <a:srgbClr val="212121"/>
                 </a:solidFill>
               </a:rPr>
-              <a:t>El cargo a medida del ex príncipe Andrés: comercio, ballet y amigos peligrosos</a:t>
+              <a:t>MANTÉN LA VIGILIA FRENTE A TU ENEMIGO: Warhammer 40,000: Chaos Gate – Deathwatch anunciado…</a:t>
             </a:r>
           </a:p>
         </p:txBody>
@@ -6478,7 +6478,7 @@
                   <a:srgbClr val="757575"/>
                 </a:solidFill>
               </a:rPr>
-              <a:t>Un representante para Comercio e Inversión cuyas condiciones de laborales determinan que "tiene preferencia por los países más sofisticados, preferiblemente aqu…</a:t>
+              <a:t>Frontier Developments plc (AIM: FDEV) y Complex Games, en colaboración con Warhammer, se complacen en anunciar Warhammer 40,000: Chaos Gate – Deathwatch. Secuel…</a:t>
             </a:r>
           </a:p>
         </p:txBody>
@@ -6512,7 +6512,7 @@
                   <a:srgbClr val="757575"/>
                 </a:solidFill>
               </a:rPr>
-              <a:t>📰 El Mundo</a:t>
+              <a:t>📰 Zonammorpg.com</a:t>
             </a:r>
           </a:p>
         </p:txBody>
@@ -6952,7 +6952,7 @@
             <a:avLst/>
           </a:prstGeom>
           <a:solidFill>
-            <a:srgbClr val="E65C00"/>
+            <a:srgbClr val="2E7D32"/>
           </a:solidFill>
           <a:ln>
             <a:noFill/>
@@ -6990,6 +6990,228 @@
           <a:xfrm>
             <a:off x="8138160" y="1097280"/>
             <a:ext cx="640080" cy="274320"/>
+          </a:xfrm>
+          <a:prstGeom prst="rect">
+            <a:avLst/>
+          </a:prstGeom>
+          <a:solidFill>
+            <a:srgbClr val="2E7D32"/>
+          </a:solidFill>
+          <a:ln>
+            <a:noFill/>
+          </a:ln>
+        </p:spPr>
+        <p:style>
+          <a:lnRef idx="1">
+            <a:schemeClr val="accent1"/>
+          </a:lnRef>
+          <a:fillRef idx="3">
+            <a:schemeClr val="accent1"/>
+          </a:fillRef>
+          <a:effectRef idx="2">
+            <a:schemeClr val="accent1"/>
+          </a:effectRef>
+          <a:fontRef idx="minor">
+            <a:schemeClr val="lt1"/>
+          </a:fontRef>
+        </p:style>
+        <p:txBody>
+          <a:bodyPr rtlCol="0" anchor="ctr"/>
+          <a:lstStyle/>
+          <a:p>
+            <a:pPr algn="ctr"/>
+          </a:p>
+        </p:txBody>
+      </p:sp>
+      <p:sp>
+        <p:nvSpPr>
+          <p:cNvPr id="7" name="TextBox 6"/>
+          <p:cNvSpPr txBox="1"/>
+          <p:nvPr/>
+        </p:nvSpPr>
+        <p:spPr>
+          <a:xfrm>
+            <a:off x="8138160" y="1097280"/>
+            <a:ext cx="640080" cy="274320"/>
+          </a:xfrm>
+          <a:prstGeom prst="rect">
+            <a:avLst/>
+          </a:prstGeom>
+          <a:noFill/>
+        </p:spPr>
+        <p:txBody>
+          <a:bodyPr wrap="square">
+            <a:spAutoFit/>
+          </a:bodyPr>
+          <a:lstStyle/>
+          <a:p>
+            <a:pPr algn="ctr"/>
+            <a:r>
+              <a:rPr sz="900" b="1">
+                <a:solidFill>
+                  <a:srgbClr val="FFFFFF"/>
+                </a:solidFill>
+              </a:rPr>
+              <a:t>5/10</a:t>
+            </a:r>
+          </a:p>
+        </p:txBody>
+      </p:sp>
+      <p:sp>
+        <p:nvSpPr>
+          <p:cNvPr id="8" name="TextBox 7"/>
+          <p:cNvSpPr txBox="1"/>
+          <p:nvPr/>
+        </p:nvSpPr>
+        <p:spPr>
+          <a:xfrm>
+            <a:off x="457200" y="1097280"/>
+            <a:ext cx="7498080" cy="347472"/>
+          </a:xfrm>
+          <a:prstGeom prst="rect">
+            <a:avLst/>
+          </a:prstGeom>
+          <a:noFill/>
+        </p:spPr>
+        <p:txBody>
+          <a:bodyPr wrap="square">
+            <a:spAutoFit/>
+          </a:bodyPr>
+          <a:lstStyle/>
+          <a:p>
+            <a:pPr algn="l"/>
+            <a:r>
+              <a:rPr sz="1100" b="1">
+                <a:solidFill>
+                  <a:srgbClr val="212121"/>
+                </a:solidFill>
+              </a:rPr>
+              <a:t>Cruz Roja atendió en 2025 a casi 30.000 personas en La Rioja</a:t>
+            </a:r>
+          </a:p>
+        </p:txBody>
+      </p:sp>
+      <p:sp>
+        <p:nvSpPr>
+          <p:cNvPr id="9" name="TextBox 8"/>
+          <p:cNvSpPr txBox="1"/>
+          <p:nvPr/>
+        </p:nvSpPr>
+        <p:spPr>
+          <a:xfrm>
+            <a:off x="457200" y="1444752"/>
+            <a:ext cx="8321040" cy="502920"/>
+          </a:xfrm>
+          <a:prstGeom prst="rect">
+            <a:avLst/>
+          </a:prstGeom>
+          <a:noFill/>
+        </p:spPr>
+        <p:txBody>
+          <a:bodyPr wrap="square">
+            <a:spAutoFit/>
+          </a:bodyPr>
+          <a:lstStyle/>
+          <a:p>
+            <a:pPr algn="l"/>
+            <a:r>
+              <a:rPr sz="900" b="0">
+                <a:solidFill>
+                  <a:srgbClr val="757575"/>
+                </a:solidFill>
+              </a:rPr>
+              <a:t>Cruz Roja en La Rioja ha presentado este jueves su Memoria Anual 2025 en un acto celebrado en el patio del Colegio Oficial de Aparejadores y Arquitectos Técnico…</a:t>
+            </a:r>
+          </a:p>
+        </p:txBody>
+      </p:sp>
+      <p:sp>
+        <p:nvSpPr>
+          <p:cNvPr id="10" name="TextBox 9"/>
+          <p:cNvSpPr txBox="1"/>
+          <p:nvPr/>
+        </p:nvSpPr>
+        <p:spPr>
+          <a:xfrm>
+            <a:off x="457200" y="1965960"/>
+            <a:ext cx="3657600" cy="228600"/>
+          </a:xfrm>
+          <a:prstGeom prst="rect">
+            <a:avLst/>
+          </a:prstGeom>
+          <a:noFill/>
+        </p:spPr>
+        <p:txBody>
+          <a:bodyPr wrap="square">
+            <a:spAutoFit/>
+          </a:bodyPr>
+          <a:lstStyle/>
+          <a:p>
+            <a:pPr algn="l"/>
+            <a:r>
+              <a:rPr sz="800" b="0">
+                <a:solidFill>
+                  <a:srgbClr val="757575"/>
+                </a:solidFill>
+              </a:rPr>
+              <a:t>📰 Europapress.es</a:t>
+            </a:r>
+          </a:p>
+        </p:txBody>
+      </p:sp>
+      <p:sp>
+        <p:nvSpPr>
+          <p:cNvPr id="11" name="Rectangle 10"/>
+          <p:cNvSpPr/>
+          <p:nvPr/>
+        </p:nvSpPr>
+        <p:spPr>
+          <a:xfrm>
+            <a:off x="274320" y="2350008"/>
+            <a:ext cx="8595360" cy="1234440"/>
+          </a:xfrm>
+          <a:prstGeom prst="rect">
+            <a:avLst/>
+          </a:prstGeom>
+          <a:solidFill>
+            <a:srgbClr val="FFFFFF"/>
+          </a:solidFill>
+          <a:ln>
+            <a:noFill/>
+          </a:ln>
+        </p:spPr>
+        <p:style>
+          <a:lnRef idx="1">
+            <a:schemeClr val="accent1"/>
+          </a:lnRef>
+          <a:fillRef idx="3">
+            <a:schemeClr val="accent1"/>
+          </a:fillRef>
+          <a:effectRef idx="2">
+            <a:schemeClr val="accent1"/>
+          </a:effectRef>
+          <a:fontRef idx="minor">
+            <a:schemeClr val="lt1"/>
+          </a:fontRef>
+        </p:style>
+        <p:txBody>
+          <a:bodyPr rtlCol="0" anchor="ctr"/>
+          <a:lstStyle/>
+          <a:p>
+            <a:pPr algn="ctr"/>
+          </a:p>
+        </p:txBody>
+      </p:sp>
+      <p:sp>
+        <p:nvSpPr>
+          <p:cNvPr id="12" name="Rectangle 11"/>
+          <p:cNvSpPr/>
+          <p:nvPr/>
+        </p:nvSpPr>
+        <p:spPr>
+          <a:xfrm>
+            <a:off x="274320" y="2350008"/>
+            <a:ext cx="54864" cy="1234440"/>
           </a:xfrm>
           <a:prstGeom prst="rect">
             <a:avLst/>
@@ -7025,13 +7247,56 @@
       </p:sp>
       <p:sp>
         <p:nvSpPr>
-          <p:cNvPr id="7" name="TextBox 6"/>
+          <p:cNvPr id="13" name="Rectangle 12"/>
+          <p:cNvSpPr/>
+          <p:nvPr/>
+        </p:nvSpPr>
+        <p:spPr>
+          <a:xfrm>
+            <a:off x="8138160" y="2441448"/>
+            <a:ext cx="640080" cy="274320"/>
+          </a:xfrm>
+          <a:prstGeom prst="rect">
+            <a:avLst/>
+          </a:prstGeom>
+          <a:solidFill>
+            <a:srgbClr val="E65C00"/>
+          </a:solidFill>
+          <a:ln>
+            <a:noFill/>
+          </a:ln>
+        </p:spPr>
+        <p:style>
+          <a:lnRef idx="1">
+            <a:schemeClr val="accent1"/>
+          </a:lnRef>
+          <a:fillRef idx="3">
+            <a:schemeClr val="accent1"/>
+          </a:fillRef>
+          <a:effectRef idx="2">
+            <a:schemeClr val="accent1"/>
+          </a:effectRef>
+          <a:fontRef idx="minor">
+            <a:schemeClr val="lt1"/>
+          </a:fontRef>
+        </p:style>
+        <p:txBody>
+          <a:bodyPr rtlCol="0" anchor="ctr"/>
+          <a:lstStyle/>
+          <a:p>
+            <a:pPr algn="ctr"/>
+          </a:p>
+        </p:txBody>
+      </p:sp>
+      <p:sp>
+        <p:nvSpPr>
+          <p:cNvPr id="14" name="TextBox 13"/>
           <p:cNvSpPr txBox="1"/>
           <p:nvPr/>
         </p:nvSpPr>
         <p:spPr>
           <a:xfrm>
-            <a:off x="8138160" y="1097280"/>
+            <a:off x="8138160" y="2441448"/>
             <a:ext cx="640080" cy="274320"/>
           </a:xfrm>
           <a:prstGeom prst="rect">
@@ -7059,13 +7324,13 @@
       </p:sp>
       <p:sp>
         <p:nvSpPr>
-          <p:cNvPr id="8" name="TextBox 7"/>
+          <p:cNvPr id="15" name="TextBox 14"/>
           <p:cNvSpPr txBox="1"/>
           <p:nvPr/>
         </p:nvSpPr>
         <p:spPr>
           <a:xfrm>
-            <a:off x="457200" y="1097280"/>
+            <a:off x="457200" y="2441448"/>
             <a:ext cx="7498080" cy="347472"/>
           </a:xfrm>
           <a:prstGeom prst="rect">
@@ -7093,13 +7358,13 @@
       </p:sp>
       <p:sp>
         <p:nvSpPr>
-          <p:cNvPr id="9" name="TextBox 8"/>
+          <p:cNvPr id="16" name="TextBox 15"/>
           <p:cNvSpPr txBox="1"/>
           <p:nvPr/>
         </p:nvSpPr>
         <p:spPr>
           <a:xfrm>
-            <a:off x="457200" y="1444752"/>
+            <a:off x="457200" y="2788920"/>
             <a:ext cx="8321040" cy="502920"/>
           </a:xfrm>
           <a:prstGeom prst="rect">
@@ -7127,13 +7392,13 @@
       </p:sp>
       <p:sp>
         <p:nvSpPr>
-          <p:cNvPr id="10" name="TextBox 9"/>
+          <p:cNvPr id="17" name="TextBox 16"/>
           <p:cNvSpPr txBox="1"/>
           <p:nvPr/>
         </p:nvSpPr>
         <p:spPr>
           <a:xfrm>
-            <a:off x="457200" y="1965960"/>
+            <a:off x="457200" y="3310128"/>
             <a:ext cx="3657600" cy="228600"/>
           </a:xfrm>
           <a:prstGeom prst="rect">
@@ -7161,13 +7426,13 @@
       </p:sp>
       <p:sp>
         <p:nvSpPr>
-          <p:cNvPr id="11" name="Rectangle 10"/>
+          <p:cNvPr id="18" name="Rectangle 17"/>
           <p:cNvSpPr/>
           <p:nvPr/>
         </p:nvSpPr>
         <p:spPr>
           <a:xfrm>
-            <a:off x="274320" y="2350008"/>
+            <a:off x="274320" y="3694176"/>
             <a:ext cx="8595360" cy="1234440"/>
           </a:xfrm>
           <a:prstGeom prst="rect">
@@ -7204,13 +7469,13 @@
       </p:sp>
       <p:sp>
         <p:nvSpPr>
-          <p:cNvPr id="12" name="Rectangle 11"/>
+          <p:cNvPr id="19" name="Rectangle 18"/>
           <p:cNvSpPr/>
           <p:nvPr/>
         </p:nvSpPr>
         <p:spPr>
           <a:xfrm>
-            <a:off x="274320" y="2350008"/>
+            <a:off x="274320" y="3694176"/>
             <a:ext cx="54864" cy="1234440"/>
           </a:xfrm>
           <a:prstGeom prst="rect">
@@ -7247,13 +7512,13 @@
       </p:sp>
       <p:sp>
         <p:nvSpPr>
-          <p:cNvPr id="13" name="Rectangle 12"/>
+          <p:cNvPr id="20" name="Rectangle 19"/>
           <p:cNvSpPr/>
           <p:nvPr/>
         </p:nvSpPr>
         <p:spPr>
           <a:xfrm>
-            <a:off x="8138160" y="2441448"/>
+            <a:off x="8138160" y="3785616"/>
             <a:ext cx="640080" cy="274320"/>
           </a:xfrm>
           <a:prstGeom prst="rect">
@@ -7290,13 +7555,13 @@
       </p:sp>
       <p:sp>
         <p:nvSpPr>
-          <p:cNvPr id="14" name="TextBox 13"/>
+          <p:cNvPr id="21" name="TextBox 20"/>
           <p:cNvSpPr txBox="1"/>
           <p:nvPr/>
         </p:nvSpPr>
         <p:spPr>
           <a:xfrm>
-            <a:off x="8138160" y="2441448"/>
+            <a:off x="8138160" y="3785616"/>
             <a:ext cx="640080" cy="274320"/>
           </a:xfrm>
           <a:prstGeom prst="rect">
@@ -7324,13 +7589,13 @@
       </p:sp>
       <p:sp>
         <p:nvSpPr>
-          <p:cNvPr id="15" name="TextBox 14"/>
+          <p:cNvPr id="22" name="TextBox 21"/>
           <p:cNvSpPr txBox="1"/>
           <p:nvPr/>
         </p:nvSpPr>
         <p:spPr>
           <a:xfrm>
-            <a:off x="457200" y="2441448"/>
+            <a:off x="457200" y="3785616"/>
             <a:ext cx="7498080" cy="347472"/>
           </a:xfrm>
           <a:prstGeom prst="rect">
@@ -7358,13 +7623,13 @@
       </p:sp>
       <p:sp>
         <p:nvSpPr>
-          <p:cNvPr id="16" name="TextBox 15"/>
+          <p:cNvPr id="23" name="TextBox 22"/>
           <p:cNvSpPr txBox="1"/>
           <p:nvPr/>
         </p:nvSpPr>
         <p:spPr>
           <a:xfrm>
-            <a:off x="457200" y="2788920"/>
+            <a:off x="457200" y="4133088"/>
             <a:ext cx="8321040" cy="502920"/>
           </a:xfrm>
           <a:prstGeom prst="rect">
@@ -7392,13 +7657,13 @@
       </p:sp>
       <p:sp>
         <p:nvSpPr>
-          <p:cNvPr id="17" name="TextBox 16"/>
+          <p:cNvPr id="24" name="TextBox 23"/>
           <p:cNvSpPr txBox="1"/>
           <p:nvPr/>
         </p:nvSpPr>
         <p:spPr>
           <a:xfrm>
-            <a:off x="457200" y="3310128"/>
+            <a:off x="457200" y="4654296"/>
             <a:ext cx="3657600" cy="228600"/>
           </a:xfrm>
           <a:prstGeom prst="rect">
@@ -7426,13 +7691,13 @@
       </p:sp>
       <p:sp>
         <p:nvSpPr>
-          <p:cNvPr id="18" name="Rectangle 17"/>
+          <p:cNvPr id="25" name="Rectangle 24"/>
           <p:cNvSpPr/>
           <p:nvPr/>
         </p:nvSpPr>
         <p:spPr>
           <a:xfrm>
-            <a:off x="274320" y="3694176"/>
+            <a:off x="274320" y="5038344"/>
             <a:ext cx="8595360" cy="1234440"/>
           </a:xfrm>
           <a:prstGeom prst="rect">
@@ -7469,13 +7734,13 @@
       </p:sp>
       <p:sp>
         <p:nvSpPr>
-          <p:cNvPr id="19" name="Rectangle 18"/>
+          <p:cNvPr id="26" name="Rectangle 25"/>
           <p:cNvSpPr/>
           <p:nvPr/>
         </p:nvSpPr>
         <p:spPr>
           <a:xfrm>
-            <a:off x="274320" y="3694176"/>
+            <a:off x="274320" y="5038344"/>
             <a:ext cx="54864" cy="1234440"/>
           </a:xfrm>
           <a:prstGeom prst="rect">
@@ -7512,13 +7777,13 @@
       </p:sp>
       <p:sp>
         <p:nvSpPr>
-          <p:cNvPr id="20" name="Rectangle 19"/>
+          <p:cNvPr id="27" name="Rectangle 26"/>
           <p:cNvSpPr/>
           <p:nvPr/>
         </p:nvSpPr>
         <p:spPr>
           <a:xfrm>
-            <a:off x="8138160" y="3785616"/>
+            <a:off x="8138160" y="5129784"/>
             <a:ext cx="640080" cy="274320"/>
           </a:xfrm>
           <a:prstGeom prst="rect">
@@ -7555,13 +7820,13 @@
       </p:sp>
       <p:sp>
         <p:nvSpPr>
-          <p:cNvPr id="21" name="TextBox 20"/>
+          <p:cNvPr id="28" name="TextBox 27"/>
           <p:cNvSpPr txBox="1"/>
           <p:nvPr/>
         </p:nvSpPr>
         <p:spPr>
           <a:xfrm>
-            <a:off x="8138160" y="3785616"/>
+            <a:off x="8138160" y="5129784"/>
             <a:ext cx="640080" cy="274320"/>
           </a:xfrm>
           <a:prstGeom prst="rect">
@@ -7589,13 +7854,13 @@
       </p:sp>
       <p:sp>
         <p:nvSpPr>
-          <p:cNvPr id="22" name="TextBox 21"/>
+          <p:cNvPr id="29" name="TextBox 28"/>
           <p:cNvSpPr txBox="1"/>
           <p:nvPr/>
         </p:nvSpPr>
         <p:spPr>
           <a:xfrm>
-            <a:off x="457200" y="3785616"/>
+            <a:off x="457200" y="5129784"/>
             <a:ext cx="7498080" cy="347472"/>
           </a:xfrm>
           <a:prstGeom prst="rect">
@@ -7623,13 +7888,13 @@
       </p:sp>
       <p:sp>
         <p:nvSpPr>
-          <p:cNvPr id="23" name="TextBox 22"/>
+          <p:cNvPr id="30" name="TextBox 29"/>
           <p:cNvSpPr txBox="1"/>
           <p:nvPr/>
         </p:nvSpPr>
         <p:spPr>
           <a:xfrm>
-            <a:off x="457200" y="4133088"/>
+            <a:off x="457200" y="5477256"/>
             <a:ext cx="8321040" cy="502920"/>
           </a:xfrm>
           <a:prstGeom prst="rect">
@@ -7651,271 +7916,6 @@
                 </a:solidFill>
               </a:rPr>
               <a:t>El presidente de la Generalitat, Salvador Illa, y el de la Taula del Tercer Sector Social de Catalunya, Xavier Trabado, han firmado este jueves un acuerdo que c…</a:t>
-            </a:r>
-          </a:p>
-        </p:txBody>
-      </p:sp>
-      <p:sp>
-        <p:nvSpPr>
-          <p:cNvPr id="24" name="TextBox 23"/>
-          <p:cNvSpPr txBox="1"/>
-          <p:nvPr/>
-        </p:nvSpPr>
-        <p:spPr>
-          <a:xfrm>
-            <a:off x="457200" y="4654296"/>
-            <a:ext cx="3657600" cy="228600"/>
-          </a:xfrm>
-          <a:prstGeom prst="rect">
-            <a:avLst/>
-          </a:prstGeom>
-          <a:noFill/>
-        </p:spPr>
-        <p:txBody>
-          <a:bodyPr wrap="square">
-            <a:spAutoFit/>
-          </a:bodyPr>
-          <a:lstStyle/>
-          <a:p>
-            <a:pPr algn="l"/>
-            <a:r>
-              <a:rPr sz="800" b="0">
-                <a:solidFill>
-                  <a:srgbClr val="757575"/>
-                </a:solidFill>
-              </a:rPr>
-              <a:t>📰 Europapress.es</a:t>
-            </a:r>
-          </a:p>
-        </p:txBody>
-      </p:sp>
-      <p:sp>
-        <p:nvSpPr>
-          <p:cNvPr id="25" name="Rectangle 24"/>
-          <p:cNvSpPr/>
-          <p:nvPr/>
-        </p:nvSpPr>
-        <p:spPr>
-          <a:xfrm>
-            <a:off x="274320" y="5038344"/>
-            <a:ext cx="8595360" cy="1234440"/>
-          </a:xfrm>
-          <a:prstGeom prst="rect">
-            <a:avLst/>
-          </a:prstGeom>
-          <a:solidFill>
-            <a:srgbClr val="FFFFFF"/>
-          </a:solidFill>
-          <a:ln>
-            <a:noFill/>
-          </a:ln>
-        </p:spPr>
-        <p:style>
-          <a:lnRef idx="1">
-            <a:schemeClr val="accent1"/>
-          </a:lnRef>
-          <a:fillRef idx="3">
-            <a:schemeClr val="accent1"/>
-          </a:fillRef>
-          <a:effectRef idx="2">
-            <a:schemeClr val="accent1"/>
-          </a:effectRef>
-          <a:fontRef idx="minor">
-            <a:schemeClr val="lt1"/>
-          </a:fontRef>
-        </p:style>
-        <p:txBody>
-          <a:bodyPr rtlCol="0" anchor="ctr"/>
-          <a:lstStyle/>
-          <a:p>
-            <a:pPr algn="ctr"/>
-          </a:p>
-        </p:txBody>
-      </p:sp>
-      <p:sp>
-        <p:nvSpPr>
-          <p:cNvPr id="26" name="Rectangle 25"/>
-          <p:cNvSpPr/>
-          <p:nvPr/>
-        </p:nvSpPr>
-        <p:spPr>
-          <a:xfrm>
-            <a:off x="274320" y="5038344"/>
-            <a:ext cx="54864" cy="1234440"/>
-          </a:xfrm>
-          <a:prstGeom prst="rect">
-            <a:avLst/>
-          </a:prstGeom>
-          <a:solidFill>
-            <a:srgbClr val="2E7D32"/>
-          </a:solidFill>
-          <a:ln>
-            <a:noFill/>
-          </a:ln>
-        </p:spPr>
-        <p:style>
-          <a:lnRef idx="1">
-            <a:schemeClr val="accent1"/>
-          </a:lnRef>
-          <a:fillRef idx="3">
-            <a:schemeClr val="accent1"/>
-          </a:fillRef>
-          <a:effectRef idx="2">
-            <a:schemeClr val="accent1"/>
-          </a:effectRef>
-          <a:fontRef idx="minor">
-            <a:schemeClr val="lt1"/>
-          </a:fontRef>
-        </p:style>
-        <p:txBody>
-          <a:bodyPr rtlCol="0" anchor="ctr"/>
-          <a:lstStyle/>
-          <a:p>
-            <a:pPr algn="ctr"/>
-          </a:p>
-        </p:txBody>
-      </p:sp>
-      <p:sp>
-        <p:nvSpPr>
-          <p:cNvPr id="27" name="Rectangle 26"/>
-          <p:cNvSpPr/>
-          <p:nvPr/>
-        </p:nvSpPr>
-        <p:spPr>
-          <a:xfrm>
-            <a:off x="8138160" y="5129784"/>
-            <a:ext cx="640080" cy="274320"/>
-          </a:xfrm>
-          <a:prstGeom prst="rect">
-            <a:avLst/>
-          </a:prstGeom>
-          <a:solidFill>
-            <a:srgbClr val="2E7D32"/>
-          </a:solidFill>
-          <a:ln>
-            <a:noFill/>
-          </a:ln>
-        </p:spPr>
-        <p:style>
-          <a:lnRef idx="1">
-            <a:schemeClr val="accent1"/>
-          </a:lnRef>
-          <a:fillRef idx="3">
-            <a:schemeClr val="accent1"/>
-          </a:fillRef>
-          <a:effectRef idx="2">
-            <a:schemeClr val="accent1"/>
-          </a:effectRef>
-          <a:fontRef idx="minor">
-            <a:schemeClr val="lt1"/>
-          </a:fontRef>
-        </p:style>
-        <p:txBody>
-          <a:bodyPr rtlCol="0" anchor="ctr"/>
-          <a:lstStyle/>
-          <a:p>
-            <a:pPr algn="ctr"/>
-          </a:p>
-        </p:txBody>
-      </p:sp>
-      <p:sp>
-        <p:nvSpPr>
-          <p:cNvPr id="28" name="TextBox 27"/>
-          <p:cNvSpPr txBox="1"/>
-          <p:nvPr/>
-        </p:nvSpPr>
-        <p:spPr>
-          <a:xfrm>
-            <a:off x="8138160" y="5129784"/>
-            <a:ext cx="640080" cy="274320"/>
-          </a:xfrm>
-          <a:prstGeom prst="rect">
-            <a:avLst/>
-          </a:prstGeom>
-          <a:noFill/>
-        </p:spPr>
-        <p:txBody>
-          <a:bodyPr wrap="square">
-            <a:spAutoFit/>
-          </a:bodyPr>
-          <a:lstStyle/>
-          <a:p>
-            <a:pPr algn="ctr"/>
-            <a:r>
-              <a:rPr sz="900" b="1">
-                <a:solidFill>
-                  <a:srgbClr val="FFFFFF"/>
-                </a:solidFill>
-              </a:rPr>
-              <a:t>5/10</a:t>
-            </a:r>
-          </a:p>
-        </p:txBody>
-      </p:sp>
-      <p:sp>
-        <p:nvSpPr>
-          <p:cNvPr id="29" name="TextBox 28"/>
-          <p:cNvSpPr txBox="1"/>
-          <p:nvPr/>
-        </p:nvSpPr>
-        <p:spPr>
-          <a:xfrm>
-            <a:off x="457200" y="5129784"/>
-            <a:ext cx="7498080" cy="347472"/>
-          </a:xfrm>
-          <a:prstGeom prst="rect">
-            <a:avLst/>
-          </a:prstGeom>
-          <a:noFill/>
-        </p:spPr>
-        <p:txBody>
-          <a:bodyPr wrap="square">
-            <a:spAutoFit/>
-          </a:bodyPr>
-          <a:lstStyle/>
-          <a:p>
-            <a:pPr algn="l"/>
-            <a:r>
-              <a:rPr sz="1100" b="1">
-                <a:solidFill>
-                  <a:srgbClr val="212121"/>
-                </a:solidFill>
-              </a:rPr>
-              <a:t>La Diputación de Almería y el Ayuntamiento de El Ejido entregan a Down El Ejido el proyect…</a:t>
-            </a:r>
-          </a:p>
-        </p:txBody>
-      </p:sp>
-      <p:sp>
-        <p:nvSpPr>
-          <p:cNvPr id="30" name="TextBox 29"/>
-          <p:cNvSpPr txBox="1"/>
-          <p:nvPr/>
-        </p:nvSpPr>
-        <p:spPr>
-          <a:xfrm>
-            <a:off x="457200" y="5477256"/>
-            <a:ext cx="8321040" cy="502920"/>
-          </a:xfrm>
-          <a:prstGeom prst="rect">
-            <a:avLst/>
-          </a:prstGeom>
-          <a:noFill/>
-        </p:spPr>
-        <p:txBody>
-          <a:bodyPr wrap="square">
-            <a:spAutoFit/>
-          </a:bodyPr>
-          <a:lstStyle/>
-          <a:p>
-            <a:pPr algn="l"/>
-            <a:r>
-              <a:rPr sz="900" b="0">
-                <a:solidFill>
-                  <a:srgbClr val="757575"/>
-                </a:solidFill>
-              </a:rPr>
-              <a:t>La Asociación Down El Ejido ha recibido de la Diputación de Almería y del Ayuntamiento ejidense el proyecto finalizado de su futura sede, un edificio "moderno y…</a:t>
             </a:r>
           </a:p>
         </p:txBody>

--- a/newsletter_20260522.pptx
+++ b/newsletter_20260522.pptx
@@ -4033,7 +4033,7 @@
                   <a:srgbClr val="212121"/>
                 </a:solidFill>
               </a:rPr>
-              <a:t>El Omnissiah ha respondido a la llamada de auxilio de Tertium: el Adeptus Mechanicus se une a l…</a:t>
+              <a:t>Rusia exhibe su poder nuclear mientras crecen las fricciones con Estados Unidos por Cuba</a:t>
             </a:r>
           </a:p>
         </p:txBody>
@@ -4187,7 +4187,7 @@
                   <a:srgbClr val="1A237E"/>
                 </a:solidFill>
               </a:rPr>
-              <a:t>Cooperativismo</a:t>
+              <a:t>Geopolítica</a:t>
             </a:r>
           </a:p>
         </p:txBody>
@@ -4221,7 +4221,7 @@
                   <a:srgbClr val="212121"/>
                 </a:solidFill>
               </a:rPr>
-              <a:t>Nuevo aumento confirmado para empleados de comercio: quiénes lo cobran y de cuánto es la suba</a:t>
+              <a:t>El Senado simula limitar los poderes de guerra de Donald Trump contra Irán</a:t>
             </a:r>
           </a:p>
         </p:txBody>
@@ -4284,7 +4284,7 @@
             <a:avLst/>
           </a:prstGeom>
           <a:solidFill>
-            <a:srgbClr val="2E7D32"/>
+            <a:srgbClr val="E65C00"/>
           </a:solidFill>
           <a:ln>
             <a:noFill/>
@@ -4341,7 +4341,7 @@
                   <a:srgbClr val="FFFFFF"/>
                 </a:solidFill>
               </a:rPr>
-              <a:t>5</a:t>
+              <a:t>7</a:t>
             </a:r>
           </a:p>
         </p:txBody>
@@ -4375,7 +4375,7 @@
                   <a:srgbClr val="1A237E"/>
                 </a:solidFill>
               </a:rPr>
-              <a:t>Geopolítica</a:t>
+              <a:t>Cooperativismo</a:t>
             </a:r>
           </a:p>
         </p:txBody>
@@ -4409,7 +4409,7 @@
                   <a:srgbClr val="212121"/>
                 </a:solidFill>
               </a:rPr>
-              <a:t>VIDEO: Turistas rompen reglas y suben a la pirámide de Chichén Itzá</a:t>
+              <a:t>El rayismo se moviliza para ayudar a unos hinchas estafados</a:t>
             </a:r>
           </a:p>
         </p:txBody>
@@ -4597,7 +4597,7 @@
                   <a:srgbClr val="212121"/>
                 </a:solidFill>
               </a:rPr>
-              <a:t>Objetivo Gaesa: el multimillonario emporio del régimen cubano</a:t>
+              <a:t>Mercado del petróleo podría entrar en "zona roja" pronto, advierte la AIE</a:t>
             </a:r>
           </a:p>
         </p:txBody>
@@ -4785,7 +4785,7 @@
                   <a:srgbClr val="212121"/>
                 </a:solidFill>
               </a:rPr>
-              <a:t>MANTÉN LA VIGILIA FRENTE A TU ENEMIGO: Warhammer 40,000: Chaos Gate – Deathwatch anunciado para…</a:t>
+              <a:t>Importar un coche de Alemania puede salirte más barato que comprarlo aquí, pero no con cualquie…</a:t>
             </a:r>
           </a:p>
         </p:txBody>
@@ -4973,7 +4973,7 @@
                   <a:srgbClr val="212121"/>
                 </a:solidFill>
               </a:rPr>
-              <a:t>Illa pacta con el Tercer Sector condonar la deuda energética a familias vulnerables</a:t>
+              <a:t>Los mejores looks de la gala amfAR, la noche más glamurosa de Cannes que ha reunido a Eva Longo…</a:t>
             </a:r>
           </a:p>
         </p:txBody>
@@ -5161,7 +5161,7 @@
                   <a:srgbClr val="212121"/>
                 </a:solidFill>
               </a:rPr>
-              <a:t>Eva Longoria brilla en la gran noche solidaria del Festival de Cannes: un espectacular look, ba…</a:t>
+              <a:t>Grande-Marlaska: «La delincuencia actual opera en un ecosistema dinámico y tecnológico»</a:t>
             </a:r>
           </a:p>
         </p:txBody>
@@ -5649,7 +5649,7 @@
                   <a:srgbClr val="212121"/>
                 </a:solidFill>
               </a:rPr>
-              <a:t>El Omnissiah ha respondido a la llamada de auxilio de Tertium: el Adeptus Mechanicus se un…</a:t>
+              <a:t>Mercado del petróleo podría entrar en "zona roja" pronto, advierte la AIE</a:t>
             </a:r>
           </a:p>
         </p:txBody>
@@ -5683,7 +5683,7 @@
                   <a:srgbClr val="757575"/>
                 </a:solidFill>
               </a:rPr>
-              <a:t>El Adeptus Mechanicus ha llegado a Hive Tertium. Los temidos y frenéticos siervos del Omnissiah, los Skitarii Alpha Primus, pronto se unirán a la lucha contra l…</a:t>
+              <a:t>A pesar de la liberación de más de 400 millones de crudo de reserva, la paralización del tráfico en el estrecho de Ormuz supone una gran amenaza para el sector,…</a:t>
             </a:r>
           </a:p>
         </p:txBody>
@@ -5717,7 +5717,7 @@
                   <a:srgbClr val="757575"/>
                 </a:solidFill>
               </a:rPr>
-              <a:t>📰 Zonammorpg.com</a:t>
+              <a:t>📰 DW (English)</a:t>
             </a:r>
           </a:p>
         </p:txBody>
@@ -5780,7 +5780,7 @@
             <a:avLst/>
           </a:prstGeom>
           <a:solidFill>
-            <a:srgbClr val="2E7D32"/>
+            <a:srgbClr val="E65C00"/>
           </a:solidFill>
           <a:ln>
             <a:noFill/>
@@ -5818,6 +5818,493 @@
           <a:xfrm>
             <a:off x="8138160" y="2441448"/>
             <a:ext cx="640080" cy="274320"/>
+          </a:xfrm>
+          <a:prstGeom prst="rect">
+            <a:avLst/>
+          </a:prstGeom>
+          <a:solidFill>
+            <a:srgbClr val="E65C00"/>
+          </a:solidFill>
+          <a:ln>
+            <a:noFill/>
+          </a:ln>
+        </p:spPr>
+        <p:style>
+          <a:lnRef idx="1">
+            <a:schemeClr val="accent1"/>
+          </a:lnRef>
+          <a:fillRef idx="3">
+            <a:schemeClr val="accent1"/>
+          </a:fillRef>
+          <a:effectRef idx="2">
+            <a:schemeClr val="accent1"/>
+          </a:effectRef>
+          <a:fontRef idx="minor">
+            <a:schemeClr val="lt1"/>
+          </a:fontRef>
+        </p:style>
+        <p:txBody>
+          <a:bodyPr rtlCol="0" anchor="ctr"/>
+          <a:lstStyle/>
+          <a:p>
+            <a:pPr algn="ctr"/>
+          </a:p>
+        </p:txBody>
+      </p:sp>
+      <p:sp>
+        <p:nvSpPr>
+          <p:cNvPr id="14" name="TextBox 13"/>
+          <p:cNvSpPr txBox="1"/>
+          <p:nvPr/>
+        </p:nvSpPr>
+        <p:spPr>
+          <a:xfrm>
+            <a:off x="8138160" y="2441448"/>
+            <a:ext cx="640080" cy="274320"/>
+          </a:xfrm>
+          <a:prstGeom prst="rect">
+            <a:avLst/>
+          </a:prstGeom>
+          <a:noFill/>
+        </p:spPr>
+        <p:txBody>
+          <a:bodyPr wrap="square">
+            <a:spAutoFit/>
+          </a:bodyPr>
+          <a:lstStyle/>
+          <a:p>
+            <a:pPr algn="ctr"/>
+            <a:r>
+              <a:rPr sz="900" b="1">
+                <a:solidFill>
+                  <a:srgbClr val="FFFFFF"/>
+                </a:solidFill>
+              </a:rPr>
+              <a:t>7/10</a:t>
+            </a:r>
+          </a:p>
+        </p:txBody>
+      </p:sp>
+      <p:sp>
+        <p:nvSpPr>
+          <p:cNvPr id="15" name="TextBox 14"/>
+          <p:cNvSpPr txBox="1"/>
+          <p:nvPr/>
+        </p:nvSpPr>
+        <p:spPr>
+          <a:xfrm>
+            <a:off x="457200" y="2441448"/>
+            <a:ext cx="7498080" cy="347472"/>
+          </a:xfrm>
+          <a:prstGeom prst="rect">
+            <a:avLst/>
+          </a:prstGeom>
+          <a:noFill/>
+        </p:spPr>
+        <p:txBody>
+          <a:bodyPr wrap="square">
+            <a:spAutoFit/>
+          </a:bodyPr>
+          <a:lstStyle/>
+          <a:p>
+            <a:pPr algn="l"/>
+            <a:r>
+              <a:rPr sz="1100" b="1">
+                <a:solidFill>
+                  <a:srgbClr val="212121"/>
+                </a:solidFill>
+              </a:rPr>
+              <a:t>El Senado simula limitar los poderes de guerra de Donald Trump contra Irán</a:t>
+            </a:r>
+          </a:p>
+        </p:txBody>
+      </p:sp>
+      <p:sp>
+        <p:nvSpPr>
+          <p:cNvPr id="16" name="TextBox 15"/>
+          <p:cNvSpPr txBox="1"/>
+          <p:nvPr/>
+        </p:nvSpPr>
+        <p:spPr>
+          <a:xfrm>
+            <a:off x="457200" y="2788920"/>
+            <a:ext cx="8321040" cy="502920"/>
+          </a:xfrm>
+          <a:prstGeom prst="rect">
+            <a:avLst/>
+          </a:prstGeom>
+          <a:noFill/>
+        </p:spPr>
+        <p:txBody>
+          <a:bodyPr wrap="square">
+            <a:spAutoFit/>
+          </a:bodyPr>
+          <a:lstStyle/>
+          <a:p>
+            <a:pPr algn="l"/>
+            <a:r>
+              <a:rPr sz="900" b="0">
+                <a:solidFill>
+                  <a:srgbClr val="757575"/>
+                </a:solidFill>
+              </a:rPr>
+              <a:t>La Cámara Alta aprueba una resolución bipartidista para restringir las acciones militares del presidente, un texto que previsiblemente será vetado</a:t>
+            </a:r>
+          </a:p>
+        </p:txBody>
+      </p:sp>
+      <p:sp>
+        <p:nvSpPr>
+          <p:cNvPr id="17" name="TextBox 16"/>
+          <p:cNvSpPr txBox="1"/>
+          <p:nvPr/>
+        </p:nvSpPr>
+        <p:spPr>
+          <a:xfrm>
+            <a:off x="457200" y="3310128"/>
+            <a:ext cx="3657600" cy="228600"/>
+          </a:xfrm>
+          <a:prstGeom prst="rect">
+            <a:avLst/>
+          </a:prstGeom>
+          <a:noFill/>
+        </p:spPr>
+        <p:txBody>
+          <a:bodyPr wrap="square">
+            <a:spAutoFit/>
+          </a:bodyPr>
+          <a:lstStyle/>
+          <a:p>
+            <a:pPr algn="l"/>
+            <a:r>
+              <a:rPr sz="800" b="0">
+                <a:solidFill>
+                  <a:srgbClr val="757575"/>
+                </a:solidFill>
+              </a:rPr>
+              <a:t>📰 Libertaddigital.com</a:t>
+            </a:r>
+          </a:p>
+        </p:txBody>
+      </p:sp>
+      <p:sp>
+        <p:nvSpPr>
+          <p:cNvPr id="18" name="Rectangle 17"/>
+          <p:cNvSpPr/>
+          <p:nvPr/>
+        </p:nvSpPr>
+        <p:spPr>
+          <a:xfrm>
+            <a:off x="274320" y="3694176"/>
+            <a:ext cx="8595360" cy="1234440"/>
+          </a:xfrm>
+          <a:prstGeom prst="rect">
+            <a:avLst/>
+          </a:prstGeom>
+          <a:solidFill>
+            <a:srgbClr val="FFFFFF"/>
+          </a:solidFill>
+          <a:ln>
+            <a:noFill/>
+          </a:ln>
+        </p:spPr>
+        <p:style>
+          <a:lnRef idx="1">
+            <a:schemeClr val="accent1"/>
+          </a:lnRef>
+          <a:fillRef idx="3">
+            <a:schemeClr val="accent1"/>
+          </a:fillRef>
+          <a:effectRef idx="2">
+            <a:schemeClr val="accent1"/>
+          </a:effectRef>
+          <a:fontRef idx="minor">
+            <a:schemeClr val="lt1"/>
+          </a:fontRef>
+        </p:style>
+        <p:txBody>
+          <a:bodyPr rtlCol="0" anchor="ctr"/>
+          <a:lstStyle/>
+          <a:p>
+            <a:pPr algn="ctr"/>
+          </a:p>
+        </p:txBody>
+      </p:sp>
+      <p:sp>
+        <p:nvSpPr>
+          <p:cNvPr id="19" name="Rectangle 18"/>
+          <p:cNvSpPr/>
+          <p:nvPr/>
+        </p:nvSpPr>
+        <p:spPr>
+          <a:xfrm>
+            <a:off x="274320" y="3694176"/>
+            <a:ext cx="54864" cy="1234440"/>
+          </a:xfrm>
+          <a:prstGeom prst="rect">
+            <a:avLst/>
+          </a:prstGeom>
+          <a:solidFill>
+            <a:srgbClr val="E65C00"/>
+          </a:solidFill>
+          <a:ln>
+            <a:noFill/>
+          </a:ln>
+        </p:spPr>
+        <p:style>
+          <a:lnRef idx="1">
+            <a:schemeClr val="accent1"/>
+          </a:lnRef>
+          <a:fillRef idx="3">
+            <a:schemeClr val="accent1"/>
+          </a:fillRef>
+          <a:effectRef idx="2">
+            <a:schemeClr val="accent1"/>
+          </a:effectRef>
+          <a:fontRef idx="minor">
+            <a:schemeClr val="lt1"/>
+          </a:fontRef>
+        </p:style>
+        <p:txBody>
+          <a:bodyPr rtlCol="0" anchor="ctr"/>
+          <a:lstStyle/>
+          <a:p>
+            <a:pPr algn="ctr"/>
+          </a:p>
+        </p:txBody>
+      </p:sp>
+      <p:sp>
+        <p:nvSpPr>
+          <p:cNvPr id="20" name="Rectangle 19"/>
+          <p:cNvSpPr/>
+          <p:nvPr/>
+        </p:nvSpPr>
+        <p:spPr>
+          <a:xfrm>
+            <a:off x="8138160" y="3785616"/>
+            <a:ext cx="640080" cy="274320"/>
+          </a:xfrm>
+          <a:prstGeom prst="rect">
+            <a:avLst/>
+          </a:prstGeom>
+          <a:solidFill>
+            <a:srgbClr val="E65C00"/>
+          </a:solidFill>
+          <a:ln>
+            <a:noFill/>
+          </a:ln>
+        </p:spPr>
+        <p:style>
+          <a:lnRef idx="1">
+            <a:schemeClr val="accent1"/>
+          </a:lnRef>
+          <a:fillRef idx="3">
+            <a:schemeClr val="accent1"/>
+          </a:fillRef>
+          <a:effectRef idx="2">
+            <a:schemeClr val="accent1"/>
+          </a:effectRef>
+          <a:fontRef idx="minor">
+            <a:schemeClr val="lt1"/>
+          </a:fontRef>
+        </p:style>
+        <p:txBody>
+          <a:bodyPr rtlCol="0" anchor="ctr"/>
+          <a:lstStyle/>
+          <a:p>
+            <a:pPr algn="ctr"/>
+          </a:p>
+        </p:txBody>
+      </p:sp>
+      <p:sp>
+        <p:nvSpPr>
+          <p:cNvPr id="21" name="TextBox 20"/>
+          <p:cNvSpPr txBox="1"/>
+          <p:nvPr/>
+        </p:nvSpPr>
+        <p:spPr>
+          <a:xfrm>
+            <a:off x="8138160" y="3785616"/>
+            <a:ext cx="640080" cy="274320"/>
+          </a:xfrm>
+          <a:prstGeom prst="rect">
+            <a:avLst/>
+          </a:prstGeom>
+          <a:noFill/>
+        </p:spPr>
+        <p:txBody>
+          <a:bodyPr wrap="square">
+            <a:spAutoFit/>
+          </a:bodyPr>
+          <a:lstStyle/>
+          <a:p>
+            <a:pPr algn="ctr"/>
+            <a:r>
+              <a:rPr sz="900" b="1">
+                <a:solidFill>
+                  <a:srgbClr val="FFFFFF"/>
+                </a:solidFill>
+              </a:rPr>
+              <a:t>7/10</a:t>
+            </a:r>
+          </a:p>
+        </p:txBody>
+      </p:sp>
+      <p:sp>
+        <p:nvSpPr>
+          <p:cNvPr id="22" name="TextBox 21"/>
+          <p:cNvSpPr txBox="1"/>
+          <p:nvPr/>
+        </p:nvSpPr>
+        <p:spPr>
+          <a:xfrm>
+            <a:off x="457200" y="3785616"/>
+            <a:ext cx="7498080" cy="347472"/>
+          </a:xfrm>
+          <a:prstGeom prst="rect">
+            <a:avLst/>
+          </a:prstGeom>
+          <a:noFill/>
+        </p:spPr>
+        <p:txBody>
+          <a:bodyPr wrap="square">
+            <a:spAutoFit/>
+          </a:bodyPr>
+          <a:lstStyle/>
+          <a:p>
+            <a:pPr algn="l"/>
+            <a:r>
+              <a:rPr sz="1100" b="1">
+                <a:solidFill>
+                  <a:srgbClr val="212121"/>
+                </a:solidFill>
+              </a:rPr>
+              <a:t>Rusia exhibe su poder nuclear mientras crecen las fricciones con Estados Unidos por Cuba</a:t>
+            </a:r>
+          </a:p>
+        </p:txBody>
+      </p:sp>
+      <p:sp>
+        <p:nvSpPr>
+          <p:cNvPr id="23" name="TextBox 22"/>
+          <p:cNvSpPr txBox="1"/>
+          <p:nvPr/>
+        </p:nvSpPr>
+        <p:spPr>
+          <a:xfrm>
+            <a:off x="457200" y="4133088"/>
+            <a:ext cx="8321040" cy="502920"/>
+          </a:xfrm>
+          <a:prstGeom prst="rect">
+            <a:avLst/>
+          </a:prstGeom>
+          <a:noFill/>
+        </p:spPr>
+        <p:txBody>
+          <a:bodyPr wrap="square">
+            <a:spAutoFit/>
+          </a:bodyPr>
+          <a:lstStyle/>
+          <a:p>
+            <a:pPr algn="l"/>
+            <a:r>
+              <a:rPr sz="900" b="0">
+                <a:solidFill>
+                  <a:srgbClr val="757575"/>
+                </a:solidFill>
+              </a:rPr>
+              <a:t>Moscú realizó ensayos en medio de la guerra en Ucrania y tras el aumento de la presión estadounidense sobre La Habana</a:t>
+            </a:r>
+          </a:p>
+        </p:txBody>
+      </p:sp>
+      <p:sp>
+        <p:nvSpPr>
+          <p:cNvPr id="24" name="TextBox 23"/>
+          <p:cNvSpPr txBox="1"/>
+          <p:nvPr/>
+        </p:nvSpPr>
+        <p:spPr>
+          <a:xfrm>
+            <a:off x="457200" y="4654296"/>
+            <a:ext cx="3657600" cy="228600"/>
+          </a:xfrm>
+          <a:prstGeom prst="rect">
+            <a:avLst/>
+          </a:prstGeom>
+          <a:noFill/>
+        </p:spPr>
+        <p:txBody>
+          <a:bodyPr wrap="square">
+            <a:spAutoFit/>
+          </a:bodyPr>
+          <a:lstStyle/>
+          <a:p>
+            <a:pPr algn="l"/>
+            <a:r>
+              <a:rPr sz="800" b="0">
+                <a:solidFill>
+                  <a:srgbClr val="757575"/>
+                </a:solidFill>
+              </a:rPr>
+              <a:t>📰 La Nacion</a:t>
+            </a:r>
+          </a:p>
+        </p:txBody>
+      </p:sp>
+      <p:sp>
+        <p:nvSpPr>
+          <p:cNvPr id="25" name="Rectangle 24"/>
+          <p:cNvSpPr/>
+          <p:nvPr/>
+        </p:nvSpPr>
+        <p:spPr>
+          <a:xfrm>
+            <a:off x="274320" y="5038344"/>
+            <a:ext cx="8595360" cy="1234440"/>
+          </a:xfrm>
+          <a:prstGeom prst="rect">
+            <a:avLst/>
+          </a:prstGeom>
+          <a:solidFill>
+            <a:srgbClr val="FFFFFF"/>
+          </a:solidFill>
+          <a:ln>
+            <a:noFill/>
+          </a:ln>
+        </p:spPr>
+        <p:style>
+          <a:lnRef idx="1">
+            <a:schemeClr val="accent1"/>
+          </a:lnRef>
+          <a:fillRef idx="3">
+            <a:schemeClr val="accent1"/>
+          </a:fillRef>
+          <a:effectRef idx="2">
+            <a:schemeClr val="accent1"/>
+          </a:effectRef>
+          <a:fontRef idx="minor">
+            <a:schemeClr val="lt1"/>
+          </a:fontRef>
+        </p:style>
+        <p:txBody>
+          <a:bodyPr rtlCol="0" anchor="ctr"/>
+          <a:lstStyle/>
+          <a:p>
+            <a:pPr algn="ctr"/>
+          </a:p>
+        </p:txBody>
+      </p:sp>
+      <p:sp>
+        <p:nvSpPr>
+          <p:cNvPr id="26" name="Rectangle 25"/>
+          <p:cNvSpPr/>
+          <p:nvPr/>
+        </p:nvSpPr>
+        <p:spPr>
+          <a:xfrm>
+            <a:off x="274320" y="5038344"/>
+            <a:ext cx="54864" cy="1234440"/>
           </a:xfrm>
           <a:prstGeom prst="rect">
             <a:avLst/>
@@ -5853,193 +6340,14 @@
       </p:sp>
       <p:sp>
         <p:nvSpPr>
-          <p:cNvPr id="14" name="TextBox 13"/>
-          <p:cNvSpPr txBox="1"/>
-          <p:nvPr/>
-        </p:nvSpPr>
-        <p:spPr>
-          <a:xfrm>
-            <a:off x="8138160" y="2441448"/>
+          <p:cNvPr id="27" name="Rectangle 26"/>
+          <p:cNvSpPr/>
+          <p:nvPr/>
+        </p:nvSpPr>
+        <p:spPr>
+          <a:xfrm>
+            <a:off x="8138160" y="5129784"/>
             <a:ext cx="640080" cy="274320"/>
-          </a:xfrm>
-          <a:prstGeom prst="rect">
-            <a:avLst/>
-          </a:prstGeom>
-          <a:noFill/>
-        </p:spPr>
-        <p:txBody>
-          <a:bodyPr wrap="square">
-            <a:spAutoFit/>
-          </a:bodyPr>
-          <a:lstStyle/>
-          <a:p>
-            <a:pPr algn="ctr"/>
-            <a:r>
-              <a:rPr sz="900" b="1">
-                <a:solidFill>
-                  <a:srgbClr val="FFFFFF"/>
-                </a:solidFill>
-              </a:rPr>
-              <a:t>5/10</a:t>
-            </a:r>
-          </a:p>
-        </p:txBody>
-      </p:sp>
-      <p:sp>
-        <p:nvSpPr>
-          <p:cNvPr id="15" name="TextBox 14"/>
-          <p:cNvSpPr txBox="1"/>
-          <p:nvPr/>
-        </p:nvSpPr>
-        <p:spPr>
-          <a:xfrm>
-            <a:off x="457200" y="2441448"/>
-            <a:ext cx="7498080" cy="347472"/>
-          </a:xfrm>
-          <a:prstGeom prst="rect">
-            <a:avLst/>
-          </a:prstGeom>
-          <a:noFill/>
-        </p:spPr>
-        <p:txBody>
-          <a:bodyPr wrap="square">
-            <a:spAutoFit/>
-          </a:bodyPr>
-          <a:lstStyle/>
-          <a:p>
-            <a:pPr algn="l"/>
-            <a:r>
-              <a:rPr sz="1100" b="1">
-                <a:solidFill>
-                  <a:srgbClr val="212121"/>
-                </a:solidFill>
-              </a:rPr>
-              <a:t>Objetivo Gaesa: el multimillonario emporio del régimen cubano</a:t>
-            </a:r>
-          </a:p>
-        </p:txBody>
-      </p:sp>
-      <p:sp>
-        <p:nvSpPr>
-          <p:cNvPr id="16" name="TextBox 15"/>
-          <p:cNvSpPr txBox="1"/>
-          <p:nvPr/>
-        </p:nvSpPr>
-        <p:spPr>
-          <a:xfrm>
-            <a:off x="457200" y="2788920"/>
-            <a:ext cx="8321040" cy="502920"/>
-          </a:xfrm>
-          <a:prstGeom prst="rect">
-            <a:avLst/>
-          </a:prstGeom>
-          <a:noFill/>
-        </p:spPr>
-        <p:txBody>
-          <a:bodyPr wrap="square">
-            <a:spAutoFit/>
-          </a:bodyPr>
-          <a:lstStyle/>
-          <a:p>
-            <a:pPr algn="l"/>
-            <a:r>
-              <a:rPr sz="900" b="0">
-                <a:solidFill>
-                  <a:srgbClr val="757575"/>
-                </a:solidFill>
-              </a:rPr>
-              <a:t>En Cuba se registran cortes de electricidad hasta tres días consecutivos en algunas localidades, el abasto de agua potable es cada vez más escaso, pacientes fal…</a:t>
-            </a:r>
-          </a:p>
-        </p:txBody>
-      </p:sp>
-      <p:sp>
-        <p:nvSpPr>
-          <p:cNvPr id="17" name="TextBox 16"/>
-          <p:cNvSpPr txBox="1"/>
-          <p:nvPr/>
-        </p:nvSpPr>
-        <p:spPr>
-          <a:xfrm>
-            <a:off x="457200" y="3310128"/>
-            <a:ext cx="3657600" cy="228600"/>
-          </a:xfrm>
-          <a:prstGeom prst="rect">
-            <a:avLst/>
-          </a:prstGeom>
-          <a:noFill/>
-        </p:spPr>
-        <p:txBody>
-          <a:bodyPr wrap="square">
-            <a:spAutoFit/>
-          </a:bodyPr>
-          <a:lstStyle/>
-          <a:p>
-            <a:pPr algn="l"/>
-            <a:r>
-              <a:rPr sz="800" b="0">
-                <a:solidFill>
-                  <a:srgbClr val="757575"/>
-                </a:solidFill>
-              </a:rPr>
-              <a:t>📰 Www.abc.es</a:t>
-            </a:r>
-          </a:p>
-        </p:txBody>
-      </p:sp>
-      <p:sp>
-        <p:nvSpPr>
-          <p:cNvPr id="18" name="Rectangle 17"/>
-          <p:cNvSpPr/>
-          <p:nvPr/>
-        </p:nvSpPr>
-        <p:spPr>
-          <a:xfrm>
-            <a:off x="274320" y="3694176"/>
-            <a:ext cx="8595360" cy="1234440"/>
-          </a:xfrm>
-          <a:prstGeom prst="rect">
-            <a:avLst/>
-          </a:prstGeom>
-          <a:solidFill>
-            <a:srgbClr val="FFFFFF"/>
-          </a:solidFill>
-          <a:ln>
-            <a:noFill/>
-          </a:ln>
-        </p:spPr>
-        <p:style>
-          <a:lnRef idx="1">
-            <a:schemeClr val="accent1"/>
-          </a:lnRef>
-          <a:fillRef idx="3">
-            <a:schemeClr val="accent1"/>
-          </a:fillRef>
-          <a:effectRef idx="2">
-            <a:schemeClr val="accent1"/>
-          </a:effectRef>
-          <a:fontRef idx="minor">
-            <a:schemeClr val="lt1"/>
-          </a:fontRef>
-        </p:style>
-        <p:txBody>
-          <a:bodyPr rtlCol="0" anchor="ctr"/>
-          <a:lstStyle/>
-          <a:p>
-            <a:pPr algn="ctr"/>
-          </a:p>
-        </p:txBody>
-      </p:sp>
-      <p:sp>
-        <p:nvSpPr>
-          <p:cNvPr id="19" name="Rectangle 18"/>
-          <p:cNvSpPr/>
-          <p:nvPr/>
-        </p:nvSpPr>
-        <p:spPr>
-          <a:xfrm>
-            <a:off x="274320" y="3694176"/>
-            <a:ext cx="54864" cy="1234440"/>
           </a:xfrm>
           <a:prstGeom prst="rect">
             <a:avLst/>
@@ -6075,56 +6383,13 @@
       </p:sp>
       <p:sp>
         <p:nvSpPr>
-          <p:cNvPr id="20" name="Rectangle 19"/>
-          <p:cNvSpPr/>
-          <p:nvPr/>
-        </p:nvSpPr>
-        <p:spPr>
-          <a:xfrm>
-            <a:off x="8138160" y="3785616"/>
-            <a:ext cx="640080" cy="274320"/>
-          </a:xfrm>
-          <a:prstGeom prst="rect">
-            <a:avLst/>
-          </a:prstGeom>
-          <a:solidFill>
-            <a:srgbClr val="2E7D32"/>
-          </a:solidFill>
-          <a:ln>
-            <a:noFill/>
-          </a:ln>
-        </p:spPr>
-        <p:style>
-          <a:lnRef idx="1">
-            <a:schemeClr val="accent1"/>
-          </a:lnRef>
-          <a:fillRef idx="3">
-            <a:schemeClr val="accent1"/>
-          </a:fillRef>
-          <a:effectRef idx="2">
-            <a:schemeClr val="accent1"/>
-          </a:effectRef>
-          <a:fontRef idx="minor">
-            <a:schemeClr val="lt1"/>
-          </a:fontRef>
-        </p:style>
-        <p:txBody>
-          <a:bodyPr rtlCol="0" anchor="ctr"/>
-          <a:lstStyle/>
-          <a:p>
-            <a:pPr algn="ctr"/>
-          </a:p>
-        </p:txBody>
-      </p:sp>
-      <p:sp>
-        <p:nvSpPr>
-          <p:cNvPr id="21" name="TextBox 20"/>
+          <p:cNvPr id="28" name="TextBox 27"/>
           <p:cNvSpPr txBox="1"/>
           <p:nvPr/>
         </p:nvSpPr>
         <p:spPr>
           <a:xfrm>
-            <a:off x="8138160" y="3785616"/>
+            <a:off x="8138160" y="5129784"/>
             <a:ext cx="640080" cy="274320"/>
           </a:xfrm>
           <a:prstGeom prst="rect">
@@ -6152,13 +6417,13 @@
       </p:sp>
       <p:sp>
         <p:nvSpPr>
-          <p:cNvPr id="22" name="TextBox 21"/>
+          <p:cNvPr id="29" name="TextBox 28"/>
           <p:cNvSpPr txBox="1"/>
           <p:nvPr/>
         </p:nvSpPr>
         <p:spPr>
           <a:xfrm>
-            <a:off x="457200" y="3785616"/>
+            <a:off x="457200" y="5129784"/>
             <a:ext cx="7498080" cy="347472"/>
           </a:xfrm>
           <a:prstGeom prst="rect">
@@ -6179,20 +6444,20 @@
                   <a:srgbClr val="212121"/>
                 </a:solidFill>
               </a:rPr>
-              <a:t>VIDEO: Turistas rompen reglas y suben a la pirámide de Chichén Itzá</a:t>
-            </a:r>
-          </a:p>
-        </p:txBody>
-      </p:sp>
-      <p:sp>
-        <p:nvSpPr>
-          <p:cNvPr id="23" name="TextBox 22"/>
+              <a:t>Importar un coche de Alemania puede salirte más barato que comprarlo aquí, pero no con cua…</a:t>
+            </a:r>
+          </a:p>
+        </p:txBody>
+      </p:sp>
+      <p:sp>
+        <p:nvSpPr>
+          <p:cNvPr id="30" name="TextBox 29"/>
           <p:cNvSpPr txBox="1"/>
           <p:nvPr/>
         </p:nvSpPr>
         <p:spPr>
           <a:xfrm>
-            <a:off x="457200" y="4133088"/>
+            <a:off x="457200" y="5477256"/>
             <a:ext cx="8321040" cy="502920"/>
           </a:xfrm>
           <a:prstGeom prst="rect">
@@ -6213,20 +6478,20 @@
                   <a:srgbClr val="757575"/>
                 </a:solidFill>
               </a:rPr>
-              <a:t>Visitantes fueron captados escalando la pirámide de Kukulkán en Chichén Itzá pese a la prohibición vigente desde 2008 para proteger el patrimonio arqueológico.</a:t>
-            </a:r>
-          </a:p>
-        </p:txBody>
-      </p:sp>
-      <p:sp>
-        <p:nvSpPr>
-          <p:cNvPr id="24" name="TextBox 23"/>
+              <a:t>Los coches nuevos son cada vez más caros. Y aunque no hayamos comido casi un 23% de inflación entre enero de 2020 y este 2026, ésta no lo explica todo. Las ayud…</a:t>
+            </a:r>
+          </a:p>
+        </p:txBody>
+      </p:sp>
+      <p:sp>
+        <p:nvSpPr>
+          <p:cNvPr id="31" name="TextBox 30"/>
           <p:cNvSpPr txBox="1"/>
           <p:nvPr/>
         </p:nvSpPr>
         <p:spPr>
           <a:xfrm>
-            <a:off x="457200" y="4654296"/>
+            <a:off x="457200" y="5998464"/>
             <a:ext cx="3657600" cy="228600"/>
           </a:xfrm>
           <a:prstGeom prst="rect">
@@ -6247,272 +6512,7 @@
                   <a:srgbClr val="757575"/>
                 </a:solidFill>
               </a:rPr>
-              <a:t>📰 Record.com.mx</a:t>
-            </a:r>
-          </a:p>
-        </p:txBody>
-      </p:sp>
-      <p:sp>
-        <p:nvSpPr>
-          <p:cNvPr id="25" name="Rectangle 24"/>
-          <p:cNvSpPr/>
-          <p:nvPr/>
-        </p:nvSpPr>
-        <p:spPr>
-          <a:xfrm>
-            <a:off x="274320" y="5038344"/>
-            <a:ext cx="8595360" cy="1234440"/>
-          </a:xfrm>
-          <a:prstGeom prst="rect">
-            <a:avLst/>
-          </a:prstGeom>
-          <a:solidFill>
-            <a:srgbClr val="FFFFFF"/>
-          </a:solidFill>
-          <a:ln>
-            <a:noFill/>
-          </a:ln>
-        </p:spPr>
-        <p:style>
-          <a:lnRef idx="1">
-            <a:schemeClr val="accent1"/>
-          </a:lnRef>
-          <a:fillRef idx="3">
-            <a:schemeClr val="accent1"/>
-          </a:fillRef>
-          <a:effectRef idx="2">
-            <a:schemeClr val="accent1"/>
-          </a:effectRef>
-          <a:fontRef idx="minor">
-            <a:schemeClr val="lt1"/>
-          </a:fontRef>
-        </p:style>
-        <p:txBody>
-          <a:bodyPr rtlCol="0" anchor="ctr"/>
-          <a:lstStyle/>
-          <a:p>
-            <a:pPr algn="ctr"/>
-          </a:p>
-        </p:txBody>
-      </p:sp>
-      <p:sp>
-        <p:nvSpPr>
-          <p:cNvPr id="26" name="Rectangle 25"/>
-          <p:cNvSpPr/>
-          <p:nvPr/>
-        </p:nvSpPr>
-        <p:spPr>
-          <a:xfrm>
-            <a:off x="274320" y="5038344"/>
-            <a:ext cx="54864" cy="1234440"/>
-          </a:xfrm>
-          <a:prstGeom prst="rect">
-            <a:avLst/>
-          </a:prstGeom>
-          <a:solidFill>
-            <a:srgbClr val="2E7D32"/>
-          </a:solidFill>
-          <a:ln>
-            <a:noFill/>
-          </a:ln>
-        </p:spPr>
-        <p:style>
-          <a:lnRef idx="1">
-            <a:schemeClr val="accent1"/>
-          </a:lnRef>
-          <a:fillRef idx="3">
-            <a:schemeClr val="accent1"/>
-          </a:fillRef>
-          <a:effectRef idx="2">
-            <a:schemeClr val="accent1"/>
-          </a:effectRef>
-          <a:fontRef idx="minor">
-            <a:schemeClr val="lt1"/>
-          </a:fontRef>
-        </p:style>
-        <p:txBody>
-          <a:bodyPr rtlCol="0" anchor="ctr"/>
-          <a:lstStyle/>
-          <a:p>
-            <a:pPr algn="ctr"/>
-          </a:p>
-        </p:txBody>
-      </p:sp>
-      <p:sp>
-        <p:nvSpPr>
-          <p:cNvPr id="27" name="Rectangle 26"/>
-          <p:cNvSpPr/>
-          <p:nvPr/>
-        </p:nvSpPr>
-        <p:spPr>
-          <a:xfrm>
-            <a:off x="8138160" y="5129784"/>
-            <a:ext cx="640080" cy="274320"/>
-          </a:xfrm>
-          <a:prstGeom prst="rect">
-            <a:avLst/>
-          </a:prstGeom>
-          <a:solidFill>
-            <a:srgbClr val="2E7D32"/>
-          </a:solidFill>
-          <a:ln>
-            <a:noFill/>
-          </a:ln>
-        </p:spPr>
-        <p:style>
-          <a:lnRef idx="1">
-            <a:schemeClr val="accent1"/>
-          </a:lnRef>
-          <a:fillRef idx="3">
-            <a:schemeClr val="accent1"/>
-          </a:fillRef>
-          <a:effectRef idx="2">
-            <a:schemeClr val="accent1"/>
-          </a:effectRef>
-          <a:fontRef idx="minor">
-            <a:schemeClr val="lt1"/>
-          </a:fontRef>
-        </p:style>
-        <p:txBody>
-          <a:bodyPr rtlCol="0" anchor="ctr"/>
-          <a:lstStyle/>
-          <a:p>
-            <a:pPr algn="ctr"/>
-          </a:p>
-        </p:txBody>
-      </p:sp>
-      <p:sp>
-        <p:nvSpPr>
-          <p:cNvPr id="28" name="TextBox 27"/>
-          <p:cNvSpPr txBox="1"/>
-          <p:nvPr/>
-        </p:nvSpPr>
-        <p:spPr>
-          <a:xfrm>
-            <a:off x="8138160" y="5129784"/>
-            <a:ext cx="640080" cy="274320"/>
-          </a:xfrm>
-          <a:prstGeom prst="rect">
-            <a:avLst/>
-          </a:prstGeom>
-          <a:noFill/>
-        </p:spPr>
-        <p:txBody>
-          <a:bodyPr wrap="square">
-            <a:spAutoFit/>
-          </a:bodyPr>
-          <a:lstStyle/>
-          <a:p>
-            <a:pPr algn="ctr"/>
-            <a:r>
-              <a:rPr sz="900" b="1">
-                <a:solidFill>
-                  <a:srgbClr val="FFFFFF"/>
-                </a:solidFill>
-              </a:rPr>
-              <a:t>5/10</a:t>
-            </a:r>
-          </a:p>
-        </p:txBody>
-      </p:sp>
-      <p:sp>
-        <p:nvSpPr>
-          <p:cNvPr id="29" name="TextBox 28"/>
-          <p:cNvSpPr txBox="1"/>
-          <p:nvPr/>
-        </p:nvSpPr>
-        <p:spPr>
-          <a:xfrm>
-            <a:off x="457200" y="5129784"/>
-            <a:ext cx="7498080" cy="347472"/>
-          </a:xfrm>
-          <a:prstGeom prst="rect">
-            <a:avLst/>
-          </a:prstGeom>
-          <a:noFill/>
-        </p:spPr>
-        <p:txBody>
-          <a:bodyPr wrap="square">
-            <a:spAutoFit/>
-          </a:bodyPr>
-          <a:lstStyle/>
-          <a:p>
-            <a:pPr algn="l"/>
-            <a:r>
-              <a:rPr sz="1100" b="1">
-                <a:solidFill>
-                  <a:srgbClr val="212121"/>
-                </a:solidFill>
-              </a:rPr>
-              <a:t>MANTÉN LA VIGILIA FRENTE A TU ENEMIGO: Warhammer 40,000: Chaos Gate – Deathwatch anunciado…</a:t>
-            </a:r>
-          </a:p>
-        </p:txBody>
-      </p:sp>
-      <p:sp>
-        <p:nvSpPr>
-          <p:cNvPr id="30" name="TextBox 29"/>
-          <p:cNvSpPr txBox="1"/>
-          <p:nvPr/>
-        </p:nvSpPr>
-        <p:spPr>
-          <a:xfrm>
-            <a:off x="457200" y="5477256"/>
-            <a:ext cx="8321040" cy="502920"/>
-          </a:xfrm>
-          <a:prstGeom prst="rect">
-            <a:avLst/>
-          </a:prstGeom>
-          <a:noFill/>
-        </p:spPr>
-        <p:txBody>
-          <a:bodyPr wrap="square">
-            <a:spAutoFit/>
-          </a:bodyPr>
-          <a:lstStyle/>
-          <a:p>
-            <a:pPr algn="l"/>
-            <a:r>
-              <a:rPr sz="900" b="0">
-                <a:solidFill>
-                  <a:srgbClr val="757575"/>
-                </a:solidFill>
-              </a:rPr>
-              <a:t>Frontier Developments plc (AIM: FDEV) y Complex Games, en colaboración con Warhammer, se complacen en anunciar Warhammer 40,000: Chaos Gate – Deathwatch. Secuel…</a:t>
-            </a:r>
-          </a:p>
-        </p:txBody>
-      </p:sp>
-      <p:sp>
-        <p:nvSpPr>
-          <p:cNvPr id="31" name="TextBox 30"/>
-          <p:cNvSpPr txBox="1"/>
-          <p:nvPr/>
-        </p:nvSpPr>
-        <p:spPr>
-          <a:xfrm>
-            <a:off x="457200" y="5998464"/>
-            <a:ext cx="3657600" cy="228600"/>
-          </a:xfrm>
-          <a:prstGeom prst="rect">
-            <a:avLst/>
-          </a:prstGeom>
-          <a:noFill/>
-        </p:spPr>
-        <p:txBody>
-          <a:bodyPr wrap="square">
-            <a:spAutoFit/>
-          </a:bodyPr>
-          <a:lstStyle/>
-          <a:p>
-            <a:pPr algn="l"/>
-            <a:r>
-              <a:rPr sz="800" b="0">
-                <a:solidFill>
-                  <a:srgbClr val="757575"/>
-                </a:solidFill>
-              </a:rPr>
-              <a:t>📰 Zonammorpg.com</a:t>
+              <a:t>📰 Motorpasión</a:t>
             </a:r>
           </a:p>
         </p:txBody>
@@ -7086,7 +7086,7 @@
                   <a:srgbClr val="212121"/>
                 </a:solidFill>
               </a:rPr>
-              <a:t>Cruz Roja atendió en 2025 a casi 30.000 personas en La Rioja</a:t>
+              <a:t>Los mejores looks de la gala amfAR, la noche más glamurosa de Cannes que ha reunido a Eva …</a:t>
             </a:r>
           </a:p>
         </p:txBody>
@@ -7120,7 +7120,7 @@
                   <a:srgbClr val="757575"/>
                 </a:solidFill>
               </a:rPr>
-              <a:t>Cruz Roja en La Rioja ha presentado este jueves su Memoria Anual 2025 en un acto celebrado en el patio del Colegio Oficial de Aparejadores y Arquitectos Técnico…</a:t>
+              <a:t>La cita solidaria se ha convertido una vez más en una pasarela espectacular de Alta Costura</a:t>
             </a:r>
           </a:p>
         </p:txBody>
@@ -7154,7 +7154,7 @@
                   <a:srgbClr val="757575"/>
                 </a:solidFill>
               </a:rPr>
-              <a:t>📰 Europapress.es</a:t>
+              <a:t>📰 Hola</a:t>
             </a:r>
           </a:p>
         </p:txBody>
@@ -7351,7 +7351,7 @@
                   <a:srgbClr val="212121"/>
                 </a:solidFill>
               </a:rPr>
-              <a:t>Nuevo aumento confirmado para empleados de comercio: quiénes lo cobran y de cuánto es la s…</a:t>
+              <a:t>El rayismo se moviliza para ayudar a unos hinchas estafados</a:t>
             </a:r>
           </a:p>
         </p:txBody>
@@ -7385,7 +7385,7 @@
                   <a:srgbClr val="757575"/>
                 </a:solidFill>
               </a:rPr>
-              <a:t>La Federación Argentina de Empleados de Comercio y Servicios (FAECYS) cerró otro acuerdo paritario para una de sus ramas. Los detalles.</a:t>
+              <a:t>En menos de una semana, el próximo miércoles día 27, será un día histórico para un Rayo Vallecano que jugará la final de la Conference League ante el Crystal Pa…</a:t>
             </a:r>
           </a:p>
         </p:txBody>
@@ -7419,7 +7419,7 @@
                   <a:srgbClr val="757575"/>
                 </a:solidFill>
               </a:rPr>
-              <a:t>📰 El Cronista Comercial</a:t>
+              <a:t>📰 Mundodeportivo.com</a:t>
             </a:r>
           </a:p>
         </p:txBody>
@@ -7616,7 +7616,7 @@
                   <a:srgbClr val="212121"/>
                 </a:solidFill>
               </a:rPr>
-              <a:t>Eva Longoria brilla en la gran noche solidaria del Festival de Cannes: un espectacular loo…</a:t>
+              <a:t>Grande-Marlaska: «La delincuencia actual opera en un ecosistema dinámico y tecnológico»</a:t>
             </a:r>
           </a:p>
         </p:txBody>
@@ -7650,7 +7650,7 @@
                   <a:srgbClr val="757575"/>
                 </a:solidFill>
               </a:rPr>
-              <a:t>El evento ha reunido a figuras internacionales del cine, la música y el activismo social</a:t>
+              <a:t>El ministro del Interior, Fernando Grande-Marlaska, ha c lausurado este jueves en Toledo la 53ª Conferencia Regional Europea de Interpol, que ha reunido en la c…</a:t>
             </a:r>
           </a:p>
         </p:txBody>
@@ -7684,7 +7684,7 @@
                   <a:srgbClr val="757575"/>
                 </a:solidFill>
               </a:rPr>
-              <a:t>📰 Hola</a:t>
+              <a:t>📰 Www.abc.es</a:t>
             </a:r>
           </a:p>
         </p:txBody>
@@ -7881,7 +7881,7 @@
                   <a:srgbClr val="212121"/>
                 </a:solidFill>
               </a:rPr>
-              <a:t>Illa pacta con el Tercer Sector condonar la deuda energética a familias vulnerables</a:t>
+              <a:t>Cruz Roja atendió en 2025 a casi 30.000 personas en La Rioja</a:t>
             </a:r>
           </a:p>
         </p:txBody>
@@ -7915,7 +7915,7 @@
                   <a:srgbClr val="757575"/>
                 </a:solidFill>
               </a:rPr>
-              <a:t>El presidente de la Generalitat, Salvador Illa, y el de la Taula del Tercer Sector Social de Catalunya, Xavier Trabado, han firmado este jueves un acuerdo que c…</a:t>
+              <a:t>Cruz Roja en La Rioja ha presentado este jueves su Memoria Anual 2025 en un acto celebrado en el patio del Colegio Oficial de Aparejadores y Arquitectos Técnico…</a:t>
             </a:r>
           </a:p>
         </p:txBody>
